--- a/exports/pptx/lessons/middle-module-11-multiplication-near-base/day-08-when-to-use.pptx
+++ b/exports/pptx/lessons/middle-module-11-multiplication-near-base/day-08-when-to-use.pptx
@@ -17,9 +17,18 @@
     <p:sldId id="265" r:id="rId11"/>
     <p:sldId id="266" r:id="rId12"/>
     <p:sldId id="267" r:id="rId13"/>
+    <p:sldId id="268" r:id="rId14"/>
+    <p:sldId id="269" r:id="rId15"/>
+    <p:sldId id="270" r:id="rId16"/>
+    <p:sldId id="271" r:id="rId17"/>
+    <p:sldId id="272" r:id="rId18"/>
+    <p:sldId id="273" r:id="rId19"/>
+    <p:sldId id="274" r:id="rId20"/>
+    <p:sldId id="275" r:id="rId21"/>
+    <p:sldId id="276" r:id="rId22"/>
   </p:sldIdLst>
   <p:notesMasterIdLst>
-    <p:notesMasterId r:id="rId14"/>
+    <p:notesMasterId r:id="rId23"/>
   </p:notesMasterIdLst>
   <p:sldSz cx="9144000" cy="5143500"/>
   <p:notesSz cx="5143500" cy="9144000"/>
@@ -819,6 +828,622 @@
 </p:notes>
 </file>
 
+<file path=ppt/notesSlides/notesSlide13.xml><?xml version="1.0" encoding="utf-8"?>
+<p:notes xmlns:a="http://schemas.openxmlformats.org/drawingml/2006/main" xmlns:r="http://schemas.openxmlformats.org/officeDocument/2006/relationships" xmlns:p="http://schemas.openxmlformats.org/presentationml/2006/main">
+  <p:cSld>
+    <p:spTree>
+      <p:nvGrpSpPr>
+        <p:cNvPr id="1" name=""/>
+        <p:cNvGrpSpPr/>
+        <p:nvPr/>
+      </p:nvGrpSpPr>
+      <p:grpSpPr>
+        <a:xfrm>
+          <a:off x="0" y="0"/>
+          <a:ext cx="0" cy="0"/>
+          <a:chOff x="0" y="0"/>
+          <a:chExt cx="0" cy="0"/>
+        </a:xfrm>
+      </p:grpSpPr>
+      <p:sp>
+        <p:nvSpPr>
+          <p:cNvPr id="2" name="Slide Image Placeholder 1"/>
+          <p:cNvSpPr>
+            <a:spLocks noGrp="1" noRot="1" noChangeAspect="1"/>
+          </p:cNvSpPr>
+          <p:nvPr>
+            <p:ph type="sldImg"/>
+          </p:nvPr>
+        </p:nvSpPr>
+        <p:spPr/>
+      </p:sp>
+      <p:sp>
+        <p:nvSpPr>
+          <p:cNvPr id="3" name="Notes Placeholder 2"/>
+          <p:cNvSpPr>
+            <a:spLocks noGrp="1"/>
+          </p:cNvSpPr>
+          <p:nvPr>
+            <p:ph type="body" idx="1"/>
+          </p:nvPr>
+        </p:nvSpPr>
+        <p:spPr/>
+        <p:txBody>
+          <a:bodyPr/>
+          <a:lstStyle/>
+          <a:p>
+            <a:r>
+              <a:rPr lang="en-US" dirty="0"/>
+              <a:t/>
+            </a:r>
+            <a:endParaRPr lang="en-US" dirty="0"/>
+          </a:p>
+        </p:txBody>
+      </p:sp>
+      <p:sp>
+        <p:nvSpPr>
+          <p:cNvPr id="4" name="Slide Number Placeholder 3"/>
+          <p:cNvSpPr>
+            <a:spLocks noGrp="1"/>
+          </p:cNvSpPr>
+          <p:nvPr>
+            <p:ph type="sldNum" sz="quarter" idx="10"/>
+          </p:nvPr>
+        </p:nvSpPr>
+        <p:spPr/>
+        <p:txBody>
+          <a:bodyPr/>
+          <a:lstStyle/>
+          <a:p>
+            <a:fld id="{F7021451-1387-4CA6-816F-3879F97B5CBC}" type="slidenum">
+              <a:rPr lang="en-US"/>
+              <a:t>13</a:t>
+            </a:fld>
+            <a:endParaRPr lang="en-US"/>
+          </a:p>
+        </p:txBody>
+      </p:sp>
+    </p:spTree>
+    <p:extLst>
+      <p:ext uri="{BB962C8B-B14F-4D97-AF65-F5344CB8AC3E}">
+        <p14:creationId xmlns:p14="http://schemas.microsoft.com/office/powerpoint/2010/main" val="1024086991"/>
+      </p:ext>
+    </p:extLst>
+  </p:cSld>
+  <p:clrMapOvr>
+    <a:masterClrMapping/>
+  </p:clrMapOvr>
+</p:notes>
+</file>
+
+<file path=ppt/notesSlides/notesSlide14.xml><?xml version="1.0" encoding="utf-8"?>
+<p:notes xmlns:a="http://schemas.openxmlformats.org/drawingml/2006/main" xmlns:r="http://schemas.openxmlformats.org/officeDocument/2006/relationships" xmlns:p="http://schemas.openxmlformats.org/presentationml/2006/main">
+  <p:cSld>
+    <p:spTree>
+      <p:nvGrpSpPr>
+        <p:cNvPr id="1" name=""/>
+        <p:cNvGrpSpPr/>
+        <p:nvPr/>
+      </p:nvGrpSpPr>
+      <p:grpSpPr>
+        <a:xfrm>
+          <a:off x="0" y="0"/>
+          <a:ext cx="0" cy="0"/>
+          <a:chOff x="0" y="0"/>
+          <a:chExt cx="0" cy="0"/>
+        </a:xfrm>
+      </p:grpSpPr>
+      <p:sp>
+        <p:nvSpPr>
+          <p:cNvPr id="2" name="Slide Image Placeholder 1"/>
+          <p:cNvSpPr>
+            <a:spLocks noGrp="1" noRot="1" noChangeAspect="1"/>
+          </p:cNvSpPr>
+          <p:nvPr>
+            <p:ph type="sldImg"/>
+          </p:nvPr>
+        </p:nvSpPr>
+        <p:spPr/>
+      </p:sp>
+      <p:sp>
+        <p:nvSpPr>
+          <p:cNvPr id="3" name="Notes Placeholder 2"/>
+          <p:cNvSpPr>
+            <a:spLocks noGrp="1"/>
+          </p:cNvSpPr>
+          <p:nvPr>
+            <p:ph type="body" idx="1"/>
+          </p:nvPr>
+        </p:nvSpPr>
+        <p:spPr/>
+        <p:txBody>
+          <a:bodyPr/>
+          <a:lstStyle/>
+          <a:p>
+            <a:r>
+              <a:rPr lang="en-US" dirty="0"/>
+              <a:t/>
+            </a:r>
+            <a:endParaRPr lang="en-US" dirty="0"/>
+          </a:p>
+        </p:txBody>
+      </p:sp>
+      <p:sp>
+        <p:nvSpPr>
+          <p:cNvPr id="4" name="Slide Number Placeholder 3"/>
+          <p:cNvSpPr>
+            <a:spLocks noGrp="1"/>
+          </p:cNvSpPr>
+          <p:nvPr>
+            <p:ph type="sldNum" sz="quarter" idx="10"/>
+          </p:nvPr>
+        </p:nvSpPr>
+        <p:spPr/>
+        <p:txBody>
+          <a:bodyPr/>
+          <a:lstStyle/>
+          <a:p>
+            <a:fld id="{F7021451-1387-4CA6-816F-3879F97B5CBC}" type="slidenum">
+              <a:rPr lang="en-US"/>
+              <a:t>14</a:t>
+            </a:fld>
+            <a:endParaRPr lang="en-US"/>
+          </a:p>
+        </p:txBody>
+      </p:sp>
+    </p:spTree>
+    <p:extLst>
+      <p:ext uri="{BB962C8B-B14F-4D97-AF65-F5344CB8AC3E}">
+        <p14:creationId xmlns:p14="http://schemas.microsoft.com/office/powerpoint/2010/main" val="1024086991"/>
+      </p:ext>
+    </p:extLst>
+  </p:cSld>
+  <p:clrMapOvr>
+    <a:masterClrMapping/>
+  </p:clrMapOvr>
+</p:notes>
+</file>
+
+<file path=ppt/notesSlides/notesSlide15.xml><?xml version="1.0" encoding="utf-8"?>
+<p:notes xmlns:a="http://schemas.openxmlformats.org/drawingml/2006/main" xmlns:r="http://schemas.openxmlformats.org/officeDocument/2006/relationships" xmlns:p="http://schemas.openxmlformats.org/presentationml/2006/main">
+  <p:cSld>
+    <p:spTree>
+      <p:nvGrpSpPr>
+        <p:cNvPr id="1" name=""/>
+        <p:cNvGrpSpPr/>
+        <p:nvPr/>
+      </p:nvGrpSpPr>
+      <p:grpSpPr>
+        <a:xfrm>
+          <a:off x="0" y="0"/>
+          <a:ext cx="0" cy="0"/>
+          <a:chOff x="0" y="0"/>
+          <a:chExt cx="0" cy="0"/>
+        </a:xfrm>
+      </p:grpSpPr>
+      <p:sp>
+        <p:nvSpPr>
+          <p:cNvPr id="2" name="Slide Image Placeholder 1"/>
+          <p:cNvSpPr>
+            <a:spLocks noGrp="1" noRot="1" noChangeAspect="1"/>
+          </p:cNvSpPr>
+          <p:nvPr>
+            <p:ph type="sldImg"/>
+          </p:nvPr>
+        </p:nvSpPr>
+        <p:spPr/>
+      </p:sp>
+      <p:sp>
+        <p:nvSpPr>
+          <p:cNvPr id="3" name="Notes Placeholder 2"/>
+          <p:cNvSpPr>
+            <a:spLocks noGrp="1"/>
+          </p:cNvSpPr>
+          <p:nvPr>
+            <p:ph type="body" idx="1"/>
+          </p:nvPr>
+        </p:nvSpPr>
+        <p:spPr/>
+        <p:txBody>
+          <a:bodyPr/>
+          <a:lstStyle/>
+          <a:p>
+            <a:r>
+              <a:rPr lang="en-US" dirty="0"/>
+              <a:t/>
+            </a:r>
+            <a:endParaRPr lang="en-US" dirty="0"/>
+          </a:p>
+        </p:txBody>
+      </p:sp>
+      <p:sp>
+        <p:nvSpPr>
+          <p:cNvPr id="4" name="Slide Number Placeholder 3"/>
+          <p:cNvSpPr>
+            <a:spLocks noGrp="1"/>
+          </p:cNvSpPr>
+          <p:nvPr>
+            <p:ph type="sldNum" sz="quarter" idx="10"/>
+          </p:nvPr>
+        </p:nvSpPr>
+        <p:spPr/>
+        <p:txBody>
+          <a:bodyPr/>
+          <a:lstStyle/>
+          <a:p>
+            <a:fld id="{F7021451-1387-4CA6-816F-3879F97B5CBC}" type="slidenum">
+              <a:rPr lang="en-US"/>
+              <a:t>15</a:t>
+            </a:fld>
+            <a:endParaRPr lang="en-US"/>
+          </a:p>
+        </p:txBody>
+      </p:sp>
+    </p:spTree>
+    <p:extLst>
+      <p:ext uri="{BB962C8B-B14F-4D97-AF65-F5344CB8AC3E}">
+        <p14:creationId xmlns:p14="http://schemas.microsoft.com/office/powerpoint/2010/main" val="1024086991"/>
+      </p:ext>
+    </p:extLst>
+  </p:cSld>
+  <p:clrMapOvr>
+    <a:masterClrMapping/>
+  </p:clrMapOvr>
+</p:notes>
+</file>
+
+<file path=ppt/notesSlides/notesSlide16.xml><?xml version="1.0" encoding="utf-8"?>
+<p:notes xmlns:a="http://schemas.openxmlformats.org/drawingml/2006/main" xmlns:r="http://schemas.openxmlformats.org/officeDocument/2006/relationships" xmlns:p="http://schemas.openxmlformats.org/presentationml/2006/main">
+  <p:cSld>
+    <p:spTree>
+      <p:nvGrpSpPr>
+        <p:cNvPr id="1" name=""/>
+        <p:cNvGrpSpPr/>
+        <p:nvPr/>
+      </p:nvGrpSpPr>
+      <p:grpSpPr>
+        <a:xfrm>
+          <a:off x="0" y="0"/>
+          <a:ext cx="0" cy="0"/>
+          <a:chOff x="0" y="0"/>
+          <a:chExt cx="0" cy="0"/>
+        </a:xfrm>
+      </p:grpSpPr>
+      <p:sp>
+        <p:nvSpPr>
+          <p:cNvPr id="2" name="Slide Image Placeholder 1"/>
+          <p:cNvSpPr>
+            <a:spLocks noGrp="1" noRot="1" noChangeAspect="1"/>
+          </p:cNvSpPr>
+          <p:nvPr>
+            <p:ph type="sldImg"/>
+          </p:nvPr>
+        </p:nvSpPr>
+        <p:spPr/>
+      </p:sp>
+      <p:sp>
+        <p:nvSpPr>
+          <p:cNvPr id="3" name="Notes Placeholder 2"/>
+          <p:cNvSpPr>
+            <a:spLocks noGrp="1"/>
+          </p:cNvSpPr>
+          <p:nvPr>
+            <p:ph type="body" idx="1"/>
+          </p:nvPr>
+        </p:nvSpPr>
+        <p:spPr/>
+        <p:txBody>
+          <a:bodyPr/>
+          <a:lstStyle/>
+          <a:p>
+            <a:r>
+              <a:rPr lang="en-US" dirty="0"/>
+              <a:t/>
+            </a:r>
+            <a:endParaRPr lang="en-US" dirty="0"/>
+          </a:p>
+        </p:txBody>
+      </p:sp>
+      <p:sp>
+        <p:nvSpPr>
+          <p:cNvPr id="4" name="Slide Number Placeholder 3"/>
+          <p:cNvSpPr>
+            <a:spLocks noGrp="1"/>
+          </p:cNvSpPr>
+          <p:nvPr>
+            <p:ph type="sldNum" sz="quarter" idx="10"/>
+          </p:nvPr>
+        </p:nvSpPr>
+        <p:spPr/>
+        <p:txBody>
+          <a:bodyPr/>
+          <a:lstStyle/>
+          <a:p>
+            <a:fld id="{F7021451-1387-4CA6-816F-3879F97B5CBC}" type="slidenum">
+              <a:rPr lang="en-US"/>
+              <a:t>16</a:t>
+            </a:fld>
+            <a:endParaRPr lang="en-US"/>
+          </a:p>
+        </p:txBody>
+      </p:sp>
+    </p:spTree>
+    <p:extLst>
+      <p:ext uri="{BB962C8B-B14F-4D97-AF65-F5344CB8AC3E}">
+        <p14:creationId xmlns:p14="http://schemas.microsoft.com/office/powerpoint/2010/main" val="1024086991"/>
+      </p:ext>
+    </p:extLst>
+  </p:cSld>
+  <p:clrMapOvr>
+    <a:masterClrMapping/>
+  </p:clrMapOvr>
+</p:notes>
+</file>
+
+<file path=ppt/notesSlides/notesSlide17.xml><?xml version="1.0" encoding="utf-8"?>
+<p:notes xmlns:a="http://schemas.openxmlformats.org/drawingml/2006/main" xmlns:r="http://schemas.openxmlformats.org/officeDocument/2006/relationships" xmlns:p="http://schemas.openxmlformats.org/presentationml/2006/main">
+  <p:cSld>
+    <p:spTree>
+      <p:nvGrpSpPr>
+        <p:cNvPr id="1" name=""/>
+        <p:cNvGrpSpPr/>
+        <p:nvPr/>
+      </p:nvGrpSpPr>
+      <p:grpSpPr>
+        <a:xfrm>
+          <a:off x="0" y="0"/>
+          <a:ext cx="0" cy="0"/>
+          <a:chOff x="0" y="0"/>
+          <a:chExt cx="0" cy="0"/>
+        </a:xfrm>
+      </p:grpSpPr>
+      <p:sp>
+        <p:nvSpPr>
+          <p:cNvPr id="2" name="Slide Image Placeholder 1"/>
+          <p:cNvSpPr>
+            <a:spLocks noGrp="1" noRot="1" noChangeAspect="1"/>
+          </p:cNvSpPr>
+          <p:nvPr>
+            <p:ph type="sldImg"/>
+          </p:nvPr>
+        </p:nvSpPr>
+        <p:spPr/>
+      </p:sp>
+      <p:sp>
+        <p:nvSpPr>
+          <p:cNvPr id="3" name="Notes Placeholder 2"/>
+          <p:cNvSpPr>
+            <a:spLocks noGrp="1"/>
+          </p:cNvSpPr>
+          <p:nvPr>
+            <p:ph type="body" idx="1"/>
+          </p:nvPr>
+        </p:nvSpPr>
+        <p:spPr/>
+        <p:txBody>
+          <a:bodyPr/>
+          <a:lstStyle/>
+          <a:p>
+            <a:r>
+              <a:rPr lang="en-US" dirty="0"/>
+              <a:t/>
+            </a:r>
+            <a:endParaRPr lang="en-US" dirty="0"/>
+          </a:p>
+        </p:txBody>
+      </p:sp>
+      <p:sp>
+        <p:nvSpPr>
+          <p:cNvPr id="4" name="Slide Number Placeholder 3"/>
+          <p:cNvSpPr>
+            <a:spLocks noGrp="1"/>
+          </p:cNvSpPr>
+          <p:nvPr>
+            <p:ph type="sldNum" sz="quarter" idx="10"/>
+          </p:nvPr>
+        </p:nvSpPr>
+        <p:spPr/>
+        <p:txBody>
+          <a:bodyPr/>
+          <a:lstStyle/>
+          <a:p>
+            <a:fld id="{F7021451-1387-4CA6-816F-3879F97B5CBC}" type="slidenum">
+              <a:rPr lang="en-US"/>
+              <a:t>17</a:t>
+            </a:fld>
+            <a:endParaRPr lang="en-US"/>
+          </a:p>
+        </p:txBody>
+      </p:sp>
+    </p:spTree>
+    <p:extLst>
+      <p:ext uri="{BB962C8B-B14F-4D97-AF65-F5344CB8AC3E}">
+        <p14:creationId xmlns:p14="http://schemas.microsoft.com/office/powerpoint/2010/main" val="1024086991"/>
+      </p:ext>
+    </p:extLst>
+  </p:cSld>
+  <p:clrMapOvr>
+    <a:masterClrMapping/>
+  </p:clrMapOvr>
+</p:notes>
+</file>
+
+<file path=ppt/notesSlides/notesSlide18.xml><?xml version="1.0" encoding="utf-8"?>
+<p:notes xmlns:a="http://schemas.openxmlformats.org/drawingml/2006/main" xmlns:r="http://schemas.openxmlformats.org/officeDocument/2006/relationships" xmlns:p="http://schemas.openxmlformats.org/presentationml/2006/main">
+  <p:cSld>
+    <p:spTree>
+      <p:nvGrpSpPr>
+        <p:cNvPr id="1" name=""/>
+        <p:cNvGrpSpPr/>
+        <p:nvPr/>
+      </p:nvGrpSpPr>
+      <p:grpSpPr>
+        <a:xfrm>
+          <a:off x="0" y="0"/>
+          <a:ext cx="0" cy="0"/>
+          <a:chOff x="0" y="0"/>
+          <a:chExt cx="0" cy="0"/>
+        </a:xfrm>
+      </p:grpSpPr>
+      <p:sp>
+        <p:nvSpPr>
+          <p:cNvPr id="2" name="Slide Image Placeholder 1"/>
+          <p:cNvSpPr>
+            <a:spLocks noGrp="1" noRot="1" noChangeAspect="1"/>
+          </p:cNvSpPr>
+          <p:nvPr>
+            <p:ph type="sldImg"/>
+          </p:nvPr>
+        </p:nvSpPr>
+        <p:spPr/>
+      </p:sp>
+      <p:sp>
+        <p:nvSpPr>
+          <p:cNvPr id="3" name="Notes Placeholder 2"/>
+          <p:cNvSpPr>
+            <a:spLocks noGrp="1"/>
+          </p:cNvSpPr>
+          <p:nvPr>
+            <p:ph type="body" idx="1"/>
+          </p:nvPr>
+        </p:nvSpPr>
+        <p:spPr/>
+        <p:txBody>
+          <a:bodyPr/>
+          <a:lstStyle/>
+          <a:p>
+            <a:r>
+              <a:rPr lang="en-US" dirty="0"/>
+              <a:t/>
+            </a:r>
+            <a:endParaRPr lang="en-US" dirty="0"/>
+          </a:p>
+        </p:txBody>
+      </p:sp>
+      <p:sp>
+        <p:nvSpPr>
+          <p:cNvPr id="4" name="Slide Number Placeholder 3"/>
+          <p:cNvSpPr>
+            <a:spLocks noGrp="1"/>
+          </p:cNvSpPr>
+          <p:nvPr>
+            <p:ph type="sldNum" sz="quarter" idx="10"/>
+          </p:nvPr>
+        </p:nvSpPr>
+        <p:spPr/>
+        <p:txBody>
+          <a:bodyPr/>
+          <a:lstStyle/>
+          <a:p>
+            <a:fld id="{F7021451-1387-4CA6-816F-3879F97B5CBC}" type="slidenum">
+              <a:rPr lang="en-US"/>
+              <a:t>18</a:t>
+            </a:fld>
+            <a:endParaRPr lang="en-US"/>
+          </a:p>
+        </p:txBody>
+      </p:sp>
+    </p:spTree>
+    <p:extLst>
+      <p:ext uri="{BB962C8B-B14F-4D97-AF65-F5344CB8AC3E}">
+        <p14:creationId xmlns:p14="http://schemas.microsoft.com/office/powerpoint/2010/main" val="1024086991"/>
+      </p:ext>
+    </p:extLst>
+  </p:cSld>
+  <p:clrMapOvr>
+    <a:masterClrMapping/>
+  </p:clrMapOvr>
+</p:notes>
+</file>
+
+<file path=ppt/notesSlides/notesSlide19.xml><?xml version="1.0" encoding="utf-8"?>
+<p:notes xmlns:a="http://schemas.openxmlformats.org/drawingml/2006/main" xmlns:r="http://schemas.openxmlformats.org/officeDocument/2006/relationships" xmlns:p="http://schemas.openxmlformats.org/presentationml/2006/main">
+  <p:cSld>
+    <p:spTree>
+      <p:nvGrpSpPr>
+        <p:cNvPr id="1" name=""/>
+        <p:cNvGrpSpPr/>
+        <p:nvPr/>
+      </p:nvGrpSpPr>
+      <p:grpSpPr>
+        <a:xfrm>
+          <a:off x="0" y="0"/>
+          <a:ext cx="0" cy="0"/>
+          <a:chOff x="0" y="0"/>
+          <a:chExt cx="0" cy="0"/>
+        </a:xfrm>
+      </p:grpSpPr>
+      <p:sp>
+        <p:nvSpPr>
+          <p:cNvPr id="2" name="Slide Image Placeholder 1"/>
+          <p:cNvSpPr>
+            <a:spLocks noGrp="1" noRot="1" noChangeAspect="1"/>
+          </p:cNvSpPr>
+          <p:nvPr>
+            <p:ph type="sldImg"/>
+          </p:nvPr>
+        </p:nvSpPr>
+        <p:spPr/>
+      </p:sp>
+      <p:sp>
+        <p:nvSpPr>
+          <p:cNvPr id="3" name="Notes Placeholder 2"/>
+          <p:cNvSpPr>
+            <a:spLocks noGrp="1"/>
+          </p:cNvSpPr>
+          <p:nvPr>
+            <p:ph type="body" idx="1"/>
+          </p:nvPr>
+        </p:nvSpPr>
+        <p:spPr/>
+        <p:txBody>
+          <a:bodyPr/>
+          <a:lstStyle/>
+          <a:p>
+            <a:r>
+              <a:rPr lang="en-US" dirty="0"/>
+              <a:t/>
+            </a:r>
+            <a:endParaRPr lang="en-US" dirty="0"/>
+          </a:p>
+        </p:txBody>
+      </p:sp>
+      <p:sp>
+        <p:nvSpPr>
+          <p:cNvPr id="4" name="Slide Number Placeholder 3"/>
+          <p:cNvSpPr>
+            <a:spLocks noGrp="1"/>
+          </p:cNvSpPr>
+          <p:nvPr>
+            <p:ph type="sldNum" sz="quarter" idx="10"/>
+          </p:nvPr>
+        </p:nvSpPr>
+        <p:spPr/>
+        <p:txBody>
+          <a:bodyPr/>
+          <a:lstStyle/>
+          <a:p>
+            <a:fld id="{F7021451-1387-4CA6-816F-3879F97B5CBC}" type="slidenum">
+              <a:rPr lang="en-US"/>
+              <a:t>19</a:t>
+            </a:fld>
+            <a:endParaRPr lang="en-US"/>
+          </a:p>
+        </p:txBody>
+      </p:sp>
+    </p:spTree>
+    <p:extLst>
+      <p:ext uri="{BB962C8B-B14F-4D97-AF65-F5344CB8AC3E}">
+        <p14:creationId xmlns:p14="http://schemas.microsoft.com/office/powerpoint/2010/main" val="1024086991"/>
+      </p:ext>
+    </p:extLst>
+  </p:cSld>
+  <p:clrMapOvr>
+    <a:masterClrMapping/>
+  </p:clrMapOvr>
+</p:notes>
+</file>
+
 <file path=ppt/notesSlides/notesSlide2.xml><?xml version="1.0" encoding="utf-8"?>
 <p:notes xmlns:a="http://schemas.openxmlformats.org/drawingml/2006/main" xmlns:r="http://schemas.openxmlformats.org/officeDocument/2006/relationships" xmlns:p="http://schemas.openxmlformats.org/presentationml/2006/main">
   <p:cSld>
@@ -889,6 +1514,182 @@
             <a:fld id="{F7021451-1387-4CA6-816F-3879F97B5CBC}" type="slidenum">
               <a:rPr lang="en-US"/>
               <a:t>2</a:t>
+            </a:fld>
+            <a:endParaRPr lang="en-US"/>
+          </a:p>
+        </p:txBody>
+      </p:sp>
+    </p:spTree>
+    <p:extLst>
+      <p:ext uri="{BB962C8B-B14F-4D97-AF65-F5344CB8AC3E}">
+        <p14:creationId xmlns:p14="http://schemas.microsoft.com/office/powerpoint/2010/main" val="1024086991"/>
+      </p:ext>
+    </p:extLst>
+  </p:cSld>
+  <p:clrMapOvr>
+    <a:masterClrMapping/>
+  </p:clrMapOvr>
+</p:notes>
+</file>
+
+<file path=ppt/notesSlides/notesSlide20.xml><?xml version="1.0" encoding="utf-8"?>
+<p:notes xmlns:a="http://schemas.openxmlformats.org/drawingml/2006/main" xmlns:r="http://schemas.openxmlformats.org/officeDocument/2006/relationships" xmlns:p="http://schemas.openxmlformats.org/presentationml/2006/main">
+  <p:cSld>
+    <p:spTree>
+      <p:nvGrpSpPr>
+        <p:cNvPr id="1" name=""/>
+        <p:cNvGrpSpPr/>
+        <p:nvPr/>
+      </p:nvGrpSpPr>
+      <p:grpSpPr>
+        <a:xfrm>
+          <a:off x="0" y="0"/>
+          <a:ext cx="0" cy="0"/>
+          <a:chOff x="0" y="0"/>
+          <a:chExt cx="0" cy="0"/>
+        </a:xfrm>
+      </p:grpSpPr>
+      <p:sp>
+        <p:nvSpPr>
+          <p:cNvPr id="2" name="Slide Image Placeholder 1"/>
+          <p:cNvSpPr>
+            <a:spLocks noGrp="1" noRot="1" noChangeAspect="1"/>
+          </p:cNvSpPr>
+          <p:nvPr>
+            <p:ph type="sldImg"/>
+          </p:nvPr>
+        </p:nvSpPr>
+        <p:spPr/>
+      </p:sp>
+      <p:sp>
+        <p:nvSpPr>
+          <p:cNvPr id="3" name="Notes Placeholder 2"/>
+          <p:cNvSpPr>
+            <a:spLocks noGrp="1"/>
+          </p:cNvSpPr>
+          <p:nvPr>
+            <p:ph type="body" idx="1"/>
+          </p:nvPr>
+        </p:nvSpPr>
+        <p:spPr/>
+        <p:txBody>
+          <a:bodyPr/>
+          <a:lstStyle/>
+          <a:p>
+            <a:r>
+              <a:rPr lang="en-US" dirty="0"/>
+              <a:t/>
+            </a:r>
+            <a:endParaRPr lang="en-US" dirty="0"/>
+          </a:p>
+        </p:txBody>
+      </p:sp>
+      <p:sp>
+        <p:nvSpPr>
+          <p:cNvPr id="4" name="Slide Number Placeholder 3"/>
+          <p:cNvSpPr>
+            <a:spLocks noGrp="1"/>
+          </p:cNvSpPr>
+          <p:nvPr>
+            <p:ph type="sldNum" sz="quarter" idx="10"/>
+          </p:nvPr>
+        </p:nvSpPr>
+        <p:spPr/>
+        <p:txBody>
+          <a:bodyPr/>
+          <a:lstStyle/>
+          <a:p>
+            <a:fld id="{F7021451-1387-4CA6-816F-3879F97B5CBC}" type="slidenum">
+              <a:rPr lang="en-US"/>
+              <a:t>20</a:t>
+            </a:fld>
+            <a:endParaRPr lang="en-US"/>
+          </a:p>
+        </p:txBody>
+      </p:sp>
+    </p:spTree>
+    <p:extLst>
+      <p:ext uri="{BB962C8B-B14F-4D97-AF65-F5344CB8AC3E}">
+        <p14:creationId xmlns:p14="http://schemas.microsoft.com/office/powerpoint/2010/main" val="1024086991"/>
+      </p:ext>
+    </p:extLst>
+  </p:cSld>
+  <p:clrMapOvr>
+    <a:masterClrMapping/>
+  </p:clrMapOvr>
+</p:notes>
+</file>
+
+<file path=ppt/notesSlides/notesSlide21.xml><?xml version="1.0" encoding="utf-8"?>
+<p:notes xmlns:a="http://schemas.openxmlformats.org/drawingml/2006/main" xmlns:r="http://schemas.openxmlformats.org/officeDocument/2006/relationships" xmlns:p="http://schemas.openxmlformats.org/presentationml/2006/main">
+  <p:cSld>
+    <p:spTree>
+      <p:nvGrpSpPr>
+        <p:cNvPr id="1" name=""/>
+        <p:cNvGrpSpPr/>
+        <p:nvPr/>
+      </p:nvGrpSpPr>
+      <p:grpSpPr>
+        <a:xfrm>
+          <a:off x="0" y="0"/>
+          <a:ext cx="0" cy="0"/>
+          <a:chOff x="0" y="0"/>
+          <a:chExt cx="0" cy="0"/>
+        </a:xfrm>
+      </p:grpSpPr>
+      <p:sp>
+        <p:nvSpPr>
+          <p:cNvPr id="2" name="Slide Image Placeholder 1"/>
+          <p:cNvSpPr>
+            <a:spLocks noGrp="1" noRot="1" noChangeAspect="1"/>
+          </p:cNvSpPr>
+          <p:nvPr>
+            <p:ph type="sldImg"/>
+          </p:nvPr>
+        </p:nvSpPr>
+        <p:spPr/>
+      </p:sp>
+      <p:sp>
+        <p:nvSpPr>
+          <p:cNvPr id="3" name="Notes Placeholder 2"/>
+          <p:cNvSpPr>
+            <a:spLocks noGrp="1"/>
+          </p:cNvSpPr>
+          <p:nvPr>
+            <p:ph type="body" idx="1"/>
+          </p:nvPr>
+        </p:nvSpPr>
+        <p:spPr/>
+        <p:txBody>
+          <a:bodyPr/>
+          <a:lstStyle/>
+          <a:p>
+            <a:r>
+              <a:rPr lang="en-US" dirty="0"/>
+              <a:t/>
+            </a:r>
+            <a:endParaRPr lang="en-US" dirty="0"/>
+          </a:p>
+        </p:txBody>
+      </p:sp>
+      <p:sp>
+        <p:nvSpPr>
+          <p:cNvPr id="4" name="Slide Number Placeholder 3"/>
+          <p:cNvSpPr>
+            <a:spLocks noGrp="1"/>
+          </p:cNvSpPr>
+          <p:nvPr>
+            <p:ph type="sldNum" sz="quarter" idx="10"/>
+          </p:nvPr>
+        </p:nvSpPr>
+        <p:spPr/>
+        <p:txBody>
+          <a:bodyPr/>
+          <a:lstStyle/>
+          <a:p>
+            <a:fld id="{F7021451-1387-4CA6-816F-3879F97B5CBC}" type="slidenum">
+              <a:rPr lang="en-US"/>
+              <a:t>21</a:t>
             </a:fld>
             <a:endParaRPr lang="en-US"/>
           </a:p>
@@ -2100,148 +2901,6 @@
         </p:nvSpPr>
         <p:spPr>
           <a:xfrm>
-            <a:off x="406301" y="1574453"/>
-            <a:ext cx="8498026" cy="274290"/>
-          </a:xfrm>
-          <a:prstGeom prst="rect">
-            <a:avLst/>
-          </a:prstGeom>
-          <a:noFill/>
-          <a:ln/>
-        </p:spPr>
-        <p:txBody>
-          <a:bodyPr wrap="square" lIns="0" tIns="0" rIns="0" bIns="0" rtlCol="0" anchor="t"/>
-          <a:lstStyle/>
-          <a:p>
-            <a:pPr algn="l" indent="0" marL="0">
-              <a:lnSpc>
-                <a:spcPts val="2160"/>
-              </a:lnSpc>
-              <a:spcBef>
-                <a:spcPts val="600"/>
-              </a:spcBef>
-              <a:spcAft>
-                <a:spcPts val="800"/>
-              </a:spcAft>
-              <a:buNone/>
-            </a:pPr>
-            <a:r>
-              <a:rPr lang="en-US" sz="1800" b="1" dirty="0">
-                <a:solidFill>
-                  <a:srgbClr val="FE4447"/>
-                </a:solidFill>
-                <a:latin typeface="Georgia" pitchFamily="34" charset="0"/>
-                <a:ea typeface="Georgia" pitchFamily="34" charset="-122"/>
-                <a:cs typeface="Georgia" pitchFamily="34" charset="-120"/>
-              </a:rPr>
-              <a:t>Learning objective</a:t>
-            </a:r>
-            <a:endParaRPr lang="en-US" sz="1800" dirty="0"/>
-          </a:p>
-        </p:txBody>
-      </p:sp>
-      <p:sp>
-        <p:nvSpPr>
-          <p:cNvPr id="6" name="Text 4"/>
-          <p:cNvSpPr/>
-          <p:nvPr/>
-        </p:nvSpPr>
-        <p:spPr>
-          <a:xfrm>
-            <a:off x="406301" y="1988344"/>
-            <a:ext cx="8498026" cy="639812"/>
-          </a:xfrm>
-          <a:prstGeom prst="rect">
-            <a:avLst/>
-          </a:prstGeom>
-          <a:noFill/>
-          <a:ln/>
-        </p:spPr>
-        <p:txBody>
-          <a:bodyPr wrap="square" lIns="0" tIns="0" rIns="0" bIns="0" rtlCol="0" anchor="t"/>
-          <a:lstStyle/>
-          <a:p>
-            <a:pPr algn="l" indent="0" marL="0">
-              <a:lnSpc>
-                <a:spcPts val="1680"/>
-              </a:lnSpc>
-              <a:spcBef>
-                <a:spcPts val="300"/>
-              </a:spcBef>
-              <a:spcAft>
-                <a:spcPts val="300"/>
-              </a:spcAft>
-              <a:buNone/>
-            </a:pPr>
-            <a:r>
-              <a:rPr lang="en-US" sz="1200" dirty="0">
-                <a:solidFill>
-                  <a:srgbClr val="1C2833"/>
-                </a:solidFill>
-                <a:latin typeface="Arial" pitchFamily="34" charset="0"/>
-                <a:ea typeface="Arial" pitchFamily="34" charset="-122"/>
-                <a:cs typeface="Arial" pitchFamily="34" charset="-120"/>
-              </a:rPr>
-              <a:t>By the end of this lesson, students will articulate the regime where Nikhilam is faster than long multiplication, AND will recognise problems where long multiplication (or </a:t>
-            </a:r>
-            <a:pPr algn="l" indent="0" marL="0">
-              <a:lnSpc>
-                <a:spcPts val="1680"/>
-              </a:lnSpc>
-              <a:spcBef>
-                <a:spcPts val="300"/>
-              </a:spcBef>
-              <a:spcAft>
-                <a:spcPts val="300"/>
-              </a:spcAft>
-              <a:buNone/>
-            </a:pPr>
-            <a:r>
-              <a:rPr lang="en-US" sz="1200" i="1" dirty="0">
-                <a:solidFill>
-                  <a:srgbClr val="1C2833"/>
-                </a:solidFill>
-                <a:latin typeface="Arial" pitchFamily="34" charset="0"/>
-                <a:ea typeface="Arial" pitchFamily="34" charset="-122"/>
-                <a:cs typeface="Arial" pitchFamily="34" charset="-120"/>
-              </a:rPr>
-              <a:t>Ūrdhva-tiryagbhyāṁ</a:t>
-            </a:r>
-            <a:pPr algn="l" indent="0" marL="0">
-              <a:lnSpc>
-                <a:spcPts val="1680"/>
-              </a:lnSpc>
-              <a:spcBef>
-                <a:spcPts val="300"/>
-              </a:spcBef>
-              <a:spcAft>
-                <a:spcPts val="300"/>
-              </a:spcAft>
-              <a:buNone/>
-            </a:pPr>
-            <a:r>
-              <a:rPr lang="en-US" sz="1200" dirty="0">
-                <a:solidFill>
-                  <a:srgbClr val="1C2833"/>
-                </a:solidFill>
-                <a:latin typeface="Arial" pitchFamily="34" charset="0"/>
-                <a:ea typeface="Arial" pitchFamily="34" charset="-122"/>
-                <a:cs typeface="Arial" pitchFamily="34" charset="-120"/>
-              </a:rPr>
-              <a:t>, the general "vertically and crosswise" method) is the better choice.</a:t>
-            </a:r>
-            <a:endParaRPr lang="en-US" sz="1200" dirty="0"/>
-          </a:p>
-        </p:txBody>
-      </p:sp>
-      <p:sp>
-        <p:nvSpPr>
-          <p:cNvPr id="7" name="Text 5"/>
-          <p:cNvSpPr/>
-          <p:nvPr/>
-        </p:nvSpPr>
-        <p:spPr>
-          <a:xfrm>
             <a:off x="406301" y="4434929"/>
             <a:ext cx="8498026" cy="213271"/>
           </a:xfrm>
@@ -2386,7 +3045,7 @@
                 <a:ea typeface="Georgia" pitchFamily="34" charset="-122"/>
                 <a:cs typeface="Georgia" pitchFamily="34" charset="-120"/>
               </a:rPr>
-              <a:t>Differentiation</a:t>
+              <a:t>Core (15 min) — When it works, when it doesn't (cont.)</a:t>
             </a:r>
             <a:endParaRPr lang="en-US" sz="1800" dirty="0"/>
           </a:p>
@@ -2401,7 +3060,7 @@
         <p:spPr>
           <a:xfrm>
             <a:off x="634901" y="883593"/>
-            <a:ext cx="8102798" cy="750391"/>
+            <a:ext cx="8102798" cy="281880"/>
           </a:xfrm>
           <a:prstGeom prst="rect">
             <a:avLst/>
@@ -2432,70 +3091,32 @@
                 <a:ea typeface="Arial" pitchFamily="34" charset="-122"/>
                 <a:cs typeface="Arial" pitchFamily="34" charset="-120"/>
               </a:rPr>
-              <a:t>Tier up:</a:t>
-            </a:r>
-            <a:pPr algn="l" indent="0" marL="0">
-              <a:lnSpc>
-                <a:spcPts val="1620"/>
-              </a:lnSpc>
-              <a:spcAft>
-                <a:spcPts val="300"/>
-              </a:spcAft>
-              <a:buNone/>
-            </a:pPr>
-            <a:r>
-              <a:rPr lang="en-US" sz="1200" dirty="0">
-                <a:solidFill>
-                  <a:srgbClr val="1C2833"/>
-                </a:solidFill>
-                <a:latin typeface="Arial" pitchFamily="34" charset="0"/>
-                <a:ea typeface="Arial" pitchFamily="34" charset="-122"/>
-                <a:cs typeface="Arial" pitchFamily="34" charset="-120"/>
-              </a:rPr>
-              <a:t> Try a sub-base (base 50). Compute </a:t>
-            </a:r>
-            <a:pPr algn="l" indent="0" marL="0">
-              <a:lnSpc>
-                <a:spcPts val="1620"/>
-              </a:lnSpc>
-              <a:spcAft>
-                <a:spcPts val="300"/>
-              </a:spcAft>
-              <a:buNone/>
-            </a:pPr>
-            <a:r>
-              <a:rPr lang="en-US" sz="1200" dirty="0">
-                <a:solidFill>
-                  <a:srgbClr val="1C2833"/>
-                </a:solidFill>
-                <a:latin typeface="Arial" pitchFamily="34" charset="0"/>
-                <a:ea typeface="Arial" pitchFamily="34" charset="-122"/>
-                <a:cs typeface="Arial" pitchFamily="34" charset="-120"/>
-              </a:rPr>
-              <a:t>47 × 48</a:t>
-            </a:r>
-            <a:pPr algn="l" indent="0" marL="0">
-              <a:lnSpc>
-                <a:spcPts val="1620"/>
-              </a:lnSpc>
-              <a:spcAft>
-                <a:spcPts val="300"/>
-              </a:spcAft>
-              <a:buNone/>
-            </a:pPr>
-            <a:r>
-              <a:rPr lang="en-US" sz="1200" dirty="0">
-                <a:solidFill>
-                  <a:srgbClr val="1C2833"/>
-                </a:solidFill>
-                <a:latin typeface="Arial" pitchFamily="34" charset="0"/>
-                <a:ea typeface="Arial" pitchFamily="34" charset="-122"/>
-                <a:cs typeface="Arial" pitchFamily="34" charset="-120"/>
-              </a:rPr>
-              <a:t> via base 50: deficits 3, 2. Cross: 47 − 2 = 45. Multiply by 50: 2250. Add deficit product 6 → 2256. (Real: 47 × 48 = 2256. ✓) Compare with long multiplication. Which felt faster?</a:t>
+              <a:t>The contrast with Module 7 (×11) and Module 9 (subtraction).</a:t>
             </a:r>
             <a:endParaRPr lang="en-US" sz="1200" dirty="0"/>
           </a:p>
+        </p:txBody>
+      </p:sp>
+      <p:sp>
+        <p:nvSpPr>
+          <p:cNvPr id="5" name="Text 3"/>
+          <p:cNvSpPr/>
+          <p:nvPr/>
+        </p:nvSpPr>
+        <p:spPr>
+          <a:xfrm>
+            <a:off x="634901" y="1266974"/>
+            <a:ext cx="8102798" cy="769441"/>
+          </a:xfrm>
+          <a:prstGeom prst="rect">
+            <a:avLst/>
+          </a:prstGeom>
+          <a:noFill/>
+          <a:ln/>
+        </p:spPr>
+        <p:txBody>
+          <a:bodyPr wrap="square" lIns="0" tIns="0" rIns="0" bIns="0" rtlCol="0" anchor="t"/>
+          <a:lstStyle/>
           <a:p>
             <a:pPr algn="l" marL="342900" indent="-342900">
               <a:lnSpc>
@@ -2508,15 +3129,15 @@
               <a:buChar char="•"/>
             </a:pPr>
             <a:r>
-              <a:rPr lang="en-US" sz="1200" b="1" dirty="0">
-                <a:solidFill>
-                  <a:srgbClr val="1C2833"/>
-                </a:solidFill>
-                <a:latin typeface="Arial" pitchFamily="34" charset="0"/>
-                <a:ea typeface="Arial" pitchFamily="34" charset="-122"/>
-                <a:cs typeface="Arial" pitchFamily="34" charset="-120"/>
-              </a:rPr>
-              <a:t>Tier down:</a:t>
+              <a:rPr lang="en-US" sz="1200" dirty="0">
+                <a:solidFill>
+                  <a:srgbClr val="1C2833"/>
+                </a:solidFill>
+                <a:latin typeface="Arial" pitchFamily="34" charset="0"/>
+                <a:ea typeface="Arial" pitchFamily="34" charset="-122"/>
+                <a:cs typeface="Arial" pitchFamily="34" charset="-120"/>
+              </a:rPr>
+              <a:t>Module 7's ×11 trick works </a:t>
             </a:r>
             <a:pPr algn="l" indent="0" marL="0">
               <a:lnSpc>
@@ -2528,6 +3149,26 @@
               <a:buNone/>
             </a:pPr>
             <a:r>
+              <a:rPr lang="en-US" sz="1200" i="1" dirty="0">
+                <a:solidFill>
+                  <a:srgbClr val="1C2833"/>
+                </a:solidFill>
+                <a:latin typeface="Arial" pitchFamily="34" charset="0"/>
+                <a:ea typeface="Arial" pitchFamily="34" charset="-122"/>
+                <a:cs typeface="Arial" pitchFamily="34" charset="-120"/>
+              </a:rPr>
+              <a:t>always</a:t>
+            </a:r>
+            <a:pPr algn="l" indent="0" marL="0">
+              <a:lnSpc>
+                <a:spcPts val="1620"/>
+              </a:lnSpc>
+              <a:spcAft>
+                <a:spcPts val="300"/>
+              </a:spcAft>
+              <a:buNone/>
+            </a:pPr>
+            <a:r>
               <a:rPr lang="en-US" sz="1200" dirty="0">
                 <a:solidFill>
                   <a:srgbClr val="1C2833"/>
@@ -2536,15 +3177,63 @@
                 <a:ea typeface="Arial" pitchFamily="34" charset="-122"/>
                 <a:cs typeface="Arial" pitchFamily="34" charset="-120"/>
               </a:rPr>
-              <a:t> Stick to clear-cut cases. Distinguish: "is this near 100?" If yes, Nikhilam. If no, long.</a:t>
+              <a:t> when one factor is 11. It's a different niche.</a:t>
             </a:r>
             <a:endParaRPr lang="en-US" sz="1200" dirty="0"/>
           </a:p>
-        </p:txBody>
-      </p:sp>
-      <p:sp>
-        <p:nvSpPr>
-          <p:cNvPr id="5" name="Text 3"/>
+          <a:p>
+            <a:pPr algn="l" marL="342900" indent="-342900">
+              <a:lnSpc>
+                <a:spcPts val="1620"/>
+              </a:lnSpc>
+              <a:spcAft>
+                <a:spcPts val="300"/>
+              </a:spcAft>
+              <a:buSzPct val="100000"/>
+              <a:buChar char="•"/>
+            </a:pPr>
+            <a:r>
+              <a:rPr lang="en-US" sz="1200" dirty="0">
+                <a:solidFill>
+                  <a:srgbClr val="1C2833"/>
+                </a:solidFill>
+                <a:latin typeface="Arial" pitchFamily="34" charset="0"/>
+                <a:ea typeface="Arial" pitchFamily="34" charset="-122"/>
+                <a:cs typeface="Arial" pitchFamily="34" charset="-120"/>
+              </a:rPr>
+              <a:t>Module 9's subtraction-by-complement (Nikhilam again) works when subtracting from a power of 10.</a:t>
+            </a:r>
+            <a:endParaRPr lang="en-US" sz="1200" dirty="0"/>
+          </a:p>
+          <a:p>
+            <a:pPr algn="l" marL="342900" indent="-342900">
+              <a:lnSpc>
+                <a:spcPts val="1620"/>
+              </a:lnSpc>
+              <a:spcAft>
+                <a:spcPts val="300"/>
+              </a:spcAft>
+              <a:buSzPct val="100000"/>
+              <a:buChar char="•"/>
+            </a:pPr>
+            <a:r>
+              <a:rPr lang="en-US" sz="1200" dirty="0">
+                <a:solidFill>
+                  <a:srgbClr val="1C2833"/>
+                </a:solidFill>
+                <a:latin typeface="Arial" pitchFamily="34" charset="0"/>
+                <a:ea typeface="Arial" pitchFamily="34" charset="-122"/>
+                <a:cs typeface="Arial" pitchFamily="34" charset="-120"/>
+              </a:rPr>
+              <a:t>Nikhilam multiplication is just one shortcut in a toolkit. Long multiplication remains the workhorse.</a:t>
+            </a:r>
+            <a:endParaRPr lang="en-US" sz="1200" dirty="0"/>
+          </a:p>
+        </p:txBody>
+      </p:sp>
+      <p:sp>
+        <p:nvSpPr>
+          <p:cNvPr id="6" name="Text 4"/>
           <p:cNvSpPr/>
           <p:nvPr/>
         </p:nvSpPr>
@@ -2694,7 +3383,7 @@
                 <a:ea typeface="Georgia" pitchFamily="34" charset="-122"/>
                 <a:cs typeface="Georgia" pitchFamily="34" charset="-120"/>
               </a:rPr>
-              <a:t>Teacher notes</a:t>
+              <a:t>Core (15 min) — When it works, when it doesn't (cont.)</a:t>
             </a:r>
             <a:endParaRPr lang="en-US" sz="1800" dirty="0"/>
           </a:p>
@@ -2708,8 +3397,8 @@
         </p:nvSpPr>
         <p:spPr>
           <a:xfrm>
-            <a:off x="406301" y="870942"/>
-            <a:ext cx="8498026" cy="1066354"/>
+            <a:off x="634901" y="883593"/>
+            <a:ext cx="8102798" cy="693241"/>
           </a:xfrm>
           <a:prstGeom prst="rect">
             <a:avLst/>
@@ -2721,13 +3410,40 @@
           <a:bodyPr wrap="square" lIns="0" tIns="0" rIns="0" bIns="0" rtlCol="0" anchor="t"/>
           <a:lstStyle/>
           <a:p>
-            <a:pPr algn="l" indent="0" marL="0">
-              <a:lnSpc>
-                <a:spcPts val="1680"/>
-              </a:lnSpc>
-              <a:spcBef>
-                <a:spcPts val="300"/>
-              </a:spcBef>
+            <a:pPr algn="l" marL="342900" indent="-342900">
+              <a:lnSpc>
+                <a:spcPts val="1620"/>
+              </a:lnSpc>
+              <a:spcAft>
+                <a:spcPts val="300"/>
+              </a:spcAft>
+              <a:buSzPct val="100000"/>
+              <a:buChar char="•"/>
+            </a:pPr>
+            <a:pPr algn="l" indent="0" marL="0">
+              <a:lnSpc>
+                <a:spcPts val="1620"/>
+              </a:lnSpc>
+              <a:spcAft>
+                <a:spcPts val="300"/>
+              </a:spcAft>
+              <a:buNone/>
+            </a:pPr>
+            <a:r>
+              <a:rPr lang="en-US" sz="1200" i="1" dirty="0">
+                <a:solidFill>
+                  <a:srgbClr val="1C2833"/>
+                </a:solidFill>
+                <a:latin typeface="Arial" pitchFamily="34" charset="0"/>
+                <a:ea typeface="Arial" pitchFamily="34" charset="-122"/>
+                <a:cs typeface="Arial" pitchFamily="34" charset="-120"/>
+              </a:rPr>
+              <a:t>The other Tirthaji sūtra mentioned today:</a:t>
+            </a:r>
+            <a:pPr algn="l" indent="0" marL="0">
+              <a:lnSpc>
+                <a:spcPts val="1620"/>
+              </a:lnSpc>
               <a:spcAft>
                 <a:spcPts val="300"/>
               </a:spcAft>
@@ -2742,15 +3458,32 @@
                 <a:ea typeface="Arial" pitchFamily="34" charset="-122"/>
                 <a:cs typeface="Arial" pitchFamily="34" charset="-120"/>
               </a:rPr>
-              <a:t>– This is the honesty day. Some students will be disappointed that Nikhilam isn't universally faster. That's the point: claims about Vedic mathematics often overstate the universal advantage. The honest framing protects against later disillusionment. – The "decide" step before solving is the habit-of-mind worth building. Without it, students apply Nikhilam to inappropriate problems and get slower than the standard algorithm. – The mention of </a:t>
-            </a:r>
-            <a:pPr algn="l" indent="0" marL="0">
-              <a:lnSpc>
-                <a:spcPts val="1680"/>
-              </a:lnSpc>
-              <a:spcBef>
-                <a:spcPts val="300"/>
-              </a:spcBef>
+              <a:t>Ūrdhva-tiryagbhyāṁ</a:t>
+            </a:r>
+            <a:pPr algn="l" indent="0" marL="0">
+              <a:lnSpc>
+                <a:spcPts val="1620"/>
+              </a:lnSpc>
+              <a:spcAft>
+                <a:spcPts val="300"/>
+              </a:spcAft>
+              <a:buNone/>
+            </a:pPr>
+            <a:r>
+              <a:rPr lang="en-US" sz="1200" b="1" i="1" dirty="0">
+                <a:solidFill>
+                  <a:srgbClr val="1C2833"/>
+                </a:solidFill>
+                <a:latin typeface="Arial" pitchFamily="34" charset="0"/>
+                <a:ea typeface="Arial" pitchFamily="34" charset="-122"/>
+                <a:cs typeface="Arial" pitchFamily="34" charset="-120"/>
+              </a:rPr>
+              <a:t> ("vertically and crosswise") is Tirthaji's sūtra #3 — the</a:t>
+            </a:r>
+            <a:pPr algn="l" indent="0" marL="0">
+              <a:lnSpc>
+                <a:spcPts val="1620"/>
+              </a:lnSpc>
               <a:spcAft>
                 <a:spcPts val="300"/>
               </a:spcAft>
@@ -2765,15 +3498,32 @@
                 <a:ea typeface="Arial" pitchFamily="34" charset="-122"/>
                 <a:cs typeface="Arial" pitchFamily="34" charset="-120"/>
               </a:rPr>
-              <a:t>Ūrdhva-tiryagbhyāṁ</a:t>
-            </a:r>
-            <a:pPr algn="l" indent="0" marL="0">
-              <a:lnSpc>
-                <a:spcPts val="1680"/>
-              </a:lnSpc>
-              <a:spcBef>
-                <a:spcPts val="300"/>
-              </a:spcBef>
+              <a:t>general</a:t>
+            </a:r>
+            <a:pPr algn="l" indent="0" marL="0">
+              <a:lnSpc>
+                <a:spcPts val="1620"/>
+              </a:lnSpc>
+              <a:spcAft>
+                <a:spcPts val="300"/>
+              </a:spcAft>
+              <a:buNone/>
+            </a:pPr>
+            <a:r>
+              <a:rPr lang="en-US" sz="1200" i="1" dirty="0">
+                <a:solidFill>
+                  <a:srgbClr val="1C2833"/>
+                </a:solidFill>
+                <a:latin typeface="Arial" pitchFamily="34" charset="0"/>
+                <a:ea typeface="Arial" pitchFamily="34" charset="-122"/>
+                <a:cs typeface="Arial" pitchFamily="34" charset="-120"/>
+              </a:rPr>
+              <a:t> multiplication procedure. It works for any pair of numbers. We won't drill it in this module; it's a topic of its own. Just notice:</a:t>
+            </a:r>
+            <a:pPr algn="l" indent="0" marL="0">
+              <a:lnSpc>
+                <a:spcPts val="1620"/>
+              </a:lnSpc>
               <a:spcAft>
                 <a:spcPts val="300"/>
               </a:spcAft>
@@ -2788,7 +3538,7 @@
                 <a:ea typeface="Arial" pitchFamily="34" charset="-122"/>
                 <a:cs typeface="Arial" pitchFamily="34" charset="-120"/>
               </a:rPr>
-              <a:t> sets up future modules. Don't elaborate on the procedure today — it's a 2-week topic of its own.</a:t>
+              <a:t>Ūrdhva* covers what Nikhilam can't.</a:t>
             </a:r>
             <a:endParaRPr lang="en-US" sz="1200" dirty="0"/>
           </a:p>
@@ -2946,7 +3696,7 @@
                 <a:ea typeface="Georgia" pitchFamily="34" charset="-122"/>
                 <a:cs typeface="Georgia" pitchFamily="34" charset="-120"/>
               </a:rPr>
-              <a:t>Citation(s) used in this lesson</a:t>
+              <a:t>Activity (20 min) — "Decide-or-don't" game</a:t>
             </a:r>
             <a:endParaRPr lang="en-US" sz="1800" dirty="0"/>
           </a:p>
@@ -2960,8 +3710,56 @@
         </p:nvSpPr>
         <p:spPr>
           <a:xfrm>
-            <a:off x="634901" y="883593"/>
-            <a:ext cx="8102798" cy="525661"/>
+            <a:off x="406301" y="870942"/>
+            <a:ext cx="8498026" cy="213271"/>
+          </a:xfrm>
+          <a:prstGeom prst="rect">
+            <a:avLst/>
+          </a:prstGeom>
+          <a:noFill/>
+          <a:ln/>
+        </p:spPr>
+        <p:txBody>
+          <a:bodyPr wrap="square" lIns="0" tIns="0" rIns="0" bIns="0" rtlCol="0" anchor="t"/>
+          <a:lstStyle/>
+          <a:p>
+            <a:pPr algn="l" indent="0" marL="0">
+              <a:lnSpc>
+                <a:spcPts val="1680"/>
+              </a:lnSpc>
+              <a:spcBef>
+                <a:spcPts val="300"/>
+              </a:spcBef>
+              <a:spcAft>
+                <a:spcPts val="300"/>
+              </a:spcAft>
+              <a:buNone/>
+            </a:pPr>
+            <a:r>
+              <a:rPr lang="en-US" sz="1200" dirty="0">
+                <a:solidFill>
+                  <a:srgbClr val="1C2833"/>
+                </a:solidFill>
+                <a:latin typeface="Arial" pitchFamily="34" charset="0"/>
+                <a:ea typeface="Arial" pitchFamily="34" charset="-122"/>
+                <a:cs typeface="Arial" pitchFamily="34" charset="-120"/>
+              </a:rPr>
+              <a:t>Rules:</a:t>
+            </a:r>
+            <a:endParaRPr lang="en-US" sz="1200" dirty="0"/>
+          </a:p>
+        </p:txBody>
+      </p:sp>
+      <p:sp>
+        <p:nvSpPr>
+          <p:cNvPr id="5" name="Text 3"/>
+          <p:cNvSpPr/>
+          <p:nvPr/>
+        </p:nvSpPr>
+        <p:spPr>
+          <a:xfrm>
+            <a:off x="634901" y="1173063"/>
+            <a:ext cx="8102798" cy="1500783"/>
           </a:xfrm>
           <a:prstGeom prst="rect">
             <a:avLst/>
@@ -2984,26 +3782,6 @@
               <a:buChar char="•"/>
             </a:pPr>
             <a:r>
-              <a:rPr lang="en-US" sz="1200" i="1" dirty="0">
-                <a:solidFill>
-                  <a:srgbClr val="1C2833"/>
-                </a:solidFill>
-                <a:latin typeface="Arial" pitchFamily="34" charset="0"/>
-                <a:ea typeface="Arial" pitchFamily="34" charset="-122"/>
-                <a:cs typeface="Arial" pitchFamily="34" charset="-120"/>
-              </a:rPr>
-              <a:t>Vedic Mathematics Batch1.pdf</a:t>
-            </a:r>
-            <a:pPr algn="l" indent="0" marL="0">
-              <a:lnSpc>
-                <a:spcPts val="1620"/>
-              </a:lnSpc>
-              <a:spcAft>
-                <a:spcPts val="300"/>
-              </a:spcAft>
-              <a:buNone/>
-            </a:pPr>
-            <a:r>
               <a:rPr lang="en-US" sz="1200" dirty="0">
                 <a:solidFill>
                   <a:srgbClr val="1C2833"/>
@@ -3012,7 +3790,7 @@
                 <a:ea typeface="Arial" pitchFamily="34" charset="-122"/>
                 <a:cs typeface="Arial" pitchFamily="34" charset="-120"/>
               </a:rPr>
-              <a:t> (Vedic Cultural Center, Sammamish WA) — Nikhilam scope and limits.</a:t>
+              <a:t>Pairs receive a deck of 20 cards. Each card has one multiplication problem.</a:t>
             </a:r>
             <a:endParaRPr lang="en-US" sz="1200" dirty="0"/>
           </a:p>
@@ -3028,6 +3806,1891 @@
               <a:buChar char="•"/>
             </a:pPr>
             <a:r>
+              <a:rPr lang="en-US" sz="1200" dirty="0">
+                <a:solidFill>
+                  <a:srgbClr val="1C2833"/>
+                </a:solidFill>
+                <a:latin typeface="Arial" pitchFamily="34" charset="0"/>
+                <a:ea typeface="Arial" pitchFamily="34" charset="-122"/>
+                <a:cs typeface="Arial" pitchFamily="34" charset="-120"/>
+              </a:rPr>
+              <a:t>For each card, the pair must </a:t>
+            </a:r>
+            <a:pPr algn="l" indent="0" marL="0">
+              <a:lnSpc>
+                <a:spcPts val="1620"/>
+              </a:lnSpc>
+              <a:spcAft>
+                <a:spcPts val="300"/>
+              </a:spcAft>
+              <a:buNone/>
+            </a:pPr>
+            <a:r>
+              <a:rPr lang="en-US" sz="1200" b="1" dirty="0">
+                <a:solidFill>
+                  <a:srgbClr val="1C2833"/>
+                </a:solidFill>
+                <a:latin typeface="Arial" pitchFamily="34" charset="0"/>
+                <a:ea typeface="Arial" pitchFamily="34" charset="-122"/>
+                <a:cs typeface="Arial" pitchFamily="34" charset="-120"/>
+              </a:rPr>
+              <a:t>first decide</a:t>
+            </a:r>
+            <a:pPr algn="l" indent="0" marL="0">
+              <a:lnSpc>
+                <a:spcPts val="1620"/>
+              </a:lnSpc>
+              <a:spcAft>
+                <a:spcPts val="300"/>
+              </a:spcAft>
+              <a:buNone/>
+            </a:pPr>
+            <a:r>
+              <a:rPr lang="en-US" sz="1200" dirty="0">
+                <a:solidFill>
+                  <a:srgbClr val="1C2833"/>
+                </a:solidFill>
+                <a:latin typeface="Arial" pitchFamily="34" charset="0"/>
+                <a:ea typeface="Arial" pitchFamily="34" charset="-122"/>
+                <a:cs typeface="Arial" pitchFamily="34" charset="-120"/>
+              </a:rPr>
+              <a:t> in 5 seconds: Nikhilam or long?</a:t>
+            </a:r>
+            <a:endParaRPr lang="en-US" sz="1200" dirty="0"/>
+          </a:p>
+          <a:p>
+            <a:pPr algn="l" marL="342900" indent="-342900">
+              <a:lnSpc>
+                <a:spcPts val="1620"/>
+              </a:lnSpc>
+              <a:spcAft>
+                <a:spcPts val="300"/>
+              </a:spcAft>
+              <a:buSzPct val="100000"/>
+              <a:buChar char="•"/>
+            </a:pPr>
+            <a:r>
+              <a:rPr lang="en-US" sz="1200" dirty="0">
+                <a:solidFill>
+                  <a:srgbClr val="1C2833"/>
+                </a:solidFill>
+                <a:latin typeface="Arial" pitchFamily="34" charset="0"/>
+                <a:ea typeface="Arial" pitchFamily="34" charset="-122"/>
+                <a:cs typeface="Arial" pitchFamily="34" charset="-120"/>
+              </a:rPr>
+              <a:t>Then they solve it.</a:t>
+            </a:r>
+            <a:endParaRPr lang="en-US" sz="1200" dirty="0"/>
+          </a:p>
+          <a:p>
+            <a:pPr algn="l" marL="342900" indent="-342900">
+              <a:lnSpc>
+                <a:spcPts val="1620"/>
+              </a:lnSpc>
+              <a:spcAft>
+                <a:spcPts val="300"/>
+              </a:spcAft>
+              <a:buSzPct val="100000"/>
+              <a:buChar char="•"/>
+            </a:pPr>
+            <a:r>
+              <a:rPr lang="en-US" sz="1200" dirty="0">
+                <a:solidFill>
+                  <a:srgbClr val="1C2833"/>
+                </a:solidFill>
+                <a:latin typeface="Arial" pitchFamily="34" charset="0"/>
+                <a:ea typeface="Arial" pitchFamily="34" charset="-122"/>
+                <a:cs typeface="Arial" pitchFamily="34" charset="-120"/>
+              </a:rPr>
+              <a:t>If they used Nikhilam and the method actually applies: full marks.</a:t>
+            </a:r>
+            <a:endParaRPr lang="en-US" sz="1200" dirty="0"/>
+          </a:p>
+          <a:p>
+            <a:pPr algn="l" marL="342900" indent="-342900">
+              <a:lnSpc>
+                <a:spcPts val="1620"/>
+              </a:lnSpc>
+              <a:spcAft>
+                <a:spcPts val="300"/>
+              </a:spcAft>
+              <a:buSzPct val="100000"/>
+              <a:buChar char="•"/>
+            </a:pPr>
+            <a:r>
+              <a:rPr lang="en-US" sz="1200" dirty="0">
+                <a:solidFill>
+                  <a:srgbClr val="1C2833"/>
+                </a:solidFill>
+                <a:latin typeface="Arial" pitchFamily="34" charset="0"/>
+                <a:ea typeface="Arial" pitchFamily="34" charset="-122"/>
+                <a:cs typeface="Arial" pitchFamily="34" charset="-120"/>
+              </a:rPr>
+              <a:t>If they used long multiplication and Nikhilam would have been visibly faster: half marks.</a:t>
+            </a:r>
+            <a:endParaRPr lang="en-US" sz="1200" dirty="0"/>
+          </a:p>
+          <a:p>
+            <a:pPr algn="l" marL="342900" indent="-342900">
+              <a:lnSpc>
+                <a:spcPts val="1620"/>
+              </a:lnSpc>
+              <a:spcAft>
+                <a:spcPts val="300"/>
+              </a:spcAft>
+              <a:buSzPct val="100000"/>
+              <a:buChar char="•"/>
+            </a:pPr>
+            <a:r>
+              <a:rPr lang="en-US" sz="1200" dirty="0">
+                <a:solidFill>
+                  <a:srgbClr val="1C2833"/>
+                </a:solidFill>
+                <a:latin typeface="Arial" pitchFamily="34" charset="0"/>
+                <a:ea typeface="Arial" pitchFamily="34" charset="-122"/>
+                <a:cs typeface="Arial" pitchFamily="34" charset="-120"/>
+              </a:rPr>
+              <a:t>If they used Nikhilam where it wasn't suitable and got stuck: zero marks (but learning is the lesson).</a:t>
+            </a:r>
+            <a:endParaRPr lang="en-US" sz="1200" dirty="0"/>
+          </a:p>
+        </p:txBody>
+      </p:sp>
+      <p:sp>
+        <p:nvSpPr>
+          <p:cNvPr id="6" name="Text 4"/>
+          <p:cNvSpPr/>
+          <p:nvPr/>
+        </p:nvSpPr>
+        <p:spPr>
+          <a:xfrm>
+            <a:off x="406301" y="4434929"/>
+            <a:ext cx="8498026" cy="213271"/>
+          </a:xfrm>
+          <a:prstGeom prst="rect">
+            <a:avLst/>
+          </a:prstGeom>
+          <a:noFill/>
+          <a:ln/>
+        </p:spPr>
+        <p:txBody>
+          <a:bodyPr wrap="square" lIns="0" tIns="0" rIns="0" bIns="0" rtlCol="0" anchor="t"/>
+          <a:lstStyle/>
+          <a:p>
+            <a:pPr algn="l" indent="0" marL="0">
+              <a:lnSpc>
+                <a:spcPts val="1680"/>
+              </a:lnSpc>
+              <a:spcBef>
+                <a:spcPts val="300"/>
+              </a:spcBef>
+              <a:spcAft>
+                <a:spcPts val="300"/>
+              </a:spcAft>
+              <a:buNone/>
+            </a:pPr>
+            <a:r>
+              <a:rPr lang="en-US" sz="1200" dirty="0">
+                <a:solidFill>
+                  <a:srgbClr val="1C2833"/>
+                </a:solidFill>
+                <a:latin typeface="Arial" pitchFamily="34" charset="0"/>
+                <a:ea typeface="Arial" pitchFamily="34" charset="-122"/>
+                <a:cs typeface="Arial" pitchFamily="34" charset="-120"/>
+              </a:rPr>
+              <a:t>Middle ·  · IKS Curriculum</a:t>
+            </a:r>
+            <a:endParaRPr lang="en-US" sz="1200" dirty="0"/>
+          </a:p>
+        </p:txBody>
+      </p:sp>
+    </p:spTree>
+  </p:cSld>
+  <p:clrMapOvr>
+    <a:masterClrMapping/>
+  </p:clrMapOvr>
+</p:sld>
+</file>
+
+<file path=ppt/slides/slide13.xml><?xml version="1.0" encoding="utf-8"?>
+<p:sld xmlns:a="http://schemas.openxmlformats.org/drawingml/2006/main" xmlns:r="http://schemas.openxmlformats.org/officeDocument/2006/relationships" xmlns:p="http://schemas.openxmlformats.org/presentationml/2006/main">
+  <p:cSld name="Slide 13">
+    <p:bg>
+      <p:bgPr>
+        <a:solidFill>
+          <a:srgbClr val="FFFFFF"/>
+        </a:solidFill>
+      </p:bgPr>
+    </p:bg>
+    <p:spTree>
+      <p:nvGrpSpPr>
+        <p:cNvPr id="1" name=""/>
+        <p:cNvGrpSpPr/>
+        <p:nvPr/>
+      </p:nvGrpSpPr>
+      <p:grpSpPr>
+        <a:xfrm>
+          <a:off x="0" y="0"/>
+          <a:ext cx="0" cy="0"/>
+          <a:chOff x="0" y="0"/>
+          <a:chExt cx="0" cy="0"/>
+        </a:xfrm>
+      </p:grpSpPr>
+      <p:sp>
+        <p:nvSpPr>
+          <p:cNvPr id="2" name="Text 0"/>
+          <p:cNvSpPr/>
+          <p:nvPr/>
+        </p:nvSpPr>
+        <p:spPr>
+          <a:xfrm>
+            <a:off x="0" y="0"/>
+            <a:ext cx="9144000" cy="101501"/>
+          </a:xfrm>
+          <a:prstGeom prst="rect">
+            <a:avLst/>
+          </a:prstGeom>
+          <a:solidFill>
+            <a:srgbClr val="277884"/>
+          </a:solidFill>
+          <a:ln/>
+        </p:spPr>
+        <p:txBody>
+          <a:bodyPr wrap="square" rtlCol="0" anchor="ctr"/>
+          <a:lstStyle/>
+          <a:p>
+            <a:pPr indent="0" marL="0">
+              <a:buNone/>
+            </a:pPr>
+            <a:endParaRPr lang="en-US" dirty="0"/>
+          </a:p>
+        </p:txBody>
+      </p:sp>
+      <p:sp>
+        <p:nvSpPr>
+          <p:cNvPr id="3" name="Text 1"/>
+          <p:cNvSpPr/>
+          <p:nvPr/>
+        </p:nvSpPr>
+        <p:spPr>
+          <a:xfrm>
+            <a:off x="406301" y="457051"/>
+            <a:ext cx="8498026" cy="274290"/>
+          </a:xfrm>
+          <a:prstGeom prst="rect">
+            <a:avLst/>
+          </a:prstGeom>
+          <a:noFill/>
+          <a:ln/>
+        </p:spPr>
+        <p:txBody>
+          <a:bodyPr wrap="square" lIns="0" tIns="0" rIns="0" bIns="0" rtlCol="0" anchor="t"/>
+          <a:lstStyle/>
+          <a:p>
+            <a:pPr algn="l" indent="0" marL="0">
+              <a:lnSpc>
+                <a:spcPts val="2160"/>
+              </a:lnSpc>
+              <a:spcBef>
+                <a:spcPts val="600"/>
+              </a:spcBef>
+              <a:spcAft>
+                <a:spcPts val="800"/>
+              </a:spcAft>
+              <a:buNone/>
+            </a:pPr>
+            <a:r>
+              <a:rPr lang="en-US" sz="1800" b="1" dirty="0">
+                <a:solidFill>
+                  <a:srgbClr val="FE4447"/>
+                </a:solidFill>
+                <a:latin typeface="Georgia" pitchFamily="34" charset="0"/>
+                <a:ea typeface="Georgia" pitchFamily="34" charset="-122"/>
+                <a:cs typeface="Georgia" pitchFamily="34" charset="-120"/>
+              </a:rPr>
+              <a:t>Activity (20 min) — "Decide-or-don't" game (cont.)</a:t>
+            </a:r>
+            <a:endParaRPr lang="en-US" sz="1800" dirty="0"/>
+          </a:p>
+        </p:txBody>
+      </p:sp>
+      <p:sp>
+        <p:nvSpPr>
+          <p:cNvPr id="4" name="Text 2"/>
+          <p:cNvSpPr/>
+          <p:nvPr/>
+        </p:nvSpPr>
+        <p:spPr>
+          <a:xfrm>
+            <a:off x="406301" y="870942"/>
+            <a:ext cx="8498026" cy="213271"/>
+          </a:xfrm>
+          <a:prstGeom prst="rect">
+            <a:avLst/>
+          </a:prstGeom>
+          <a:noFill/>
+          <a:ln/>
+        </p:spPr>
+        <p:txBody>
+          <a:bodyPr wrap="square" lIns="0" tIns="0" rIns="0" bIns="0" rtlCol="0" anchor="t"/>
+          <a:lstStyle/>
+          <a:p>
+            <a:pPr algn="l" indent="0" marL="0">
+              <a:lnSpc>
+                <a:spcPts val="1680"/>
+              </a:lnSpc>
+              <a:spcBef>
+                <a:spcPts val="300"/>
+              </a:spcBef>
+              <a:spcAft>
+                <a:spcPts val="300"/>
+              </a:spcAft>
+              <a:buNone/>
+            </a:pPr>
+            <a:r>
+              <a:rPr lang="en-US" sz="1200" dirty="0">
+                <a:solidFill>
+                  <a:srgbClr val="1C2833"/>
+                </a:solidFill>
+                <a:latin typeface="Arial" pitchFamily="34" charset="0"/>
+                <a:ea typeface="Arial" pitchFamily="34" charset="-122"/>
+                <a:cs typeface="Arial" pitchFamily="34" charset="-120"/>
+              </a:rPr>
+              <a:t>Sample cards:</a:t>
+            </a:r>
+            <a:endParaRPr lang="en-US" sz="1200" dirty="0"/>
+          </a:p>
+        </p:txBody>
+      </p:sp>
+      <p:sp>
+        <p:nvSpPr>
+          <p:cNvPr id="5" name="Text 3"/>
+          <p:cNvSpPr/>
+          <p:nvPr/>
+        </p:nvSpPr>
+        <p:spPr>
+          <a:xfrm>
+            <a:off x="406301" y="4434929"/>
+            <a:ext cx="8498026" cy="213271"/>
+          </a:xfrm>
+          <a:prstGeom prst="rect">
+            <a:avLst/>
+          </a:prstGeom>
+          <a:noFill/>
+          <a:ln/>
+        </p:spPr>
+        <p:txBody>
+          <a:bodyPr wrap="square" lIns="0" tIns="0" rIns="0" bIns="0" rtlCol="0" anchor="t"/>
+          <a:lstStyle/>
+          <a:p>
+            <a:pPr algn="l" indent="0" marL="0">
+              <a:lnSpc>
+                <a:spcPts val="1680"/>
+              </a:lnSpc>
+              <a:spcBef>
+                <a:spcPts val="300"/>
+              </a:spcBef>
+              <a:spcAft>
+                <a:spcPts val="300"/>
+              </a:spcAft>
+              <a:buNone/>
+            </a:pPr>
+            <a:r>
+              <a:rPr lang="en-US" sz="1200" dirty="0">
+                <a:solidFill>
+                  <a:srgbClr val="1C2833"/>
+                </a:solidFill>
+                <a:latin typeface="Arial" pitchFamily="34" charset="0"/>
+                <a:ea typeface="Arial" pitchFamily="34" charset="-122"/>
+                <a:cs typeface="Arial" pitchFamily="34" charset="-120"/>
+              </a:rPr>
+              <a:t>Middle ·  · IKS Curriculum</a:t>
+            </a:r>
+            <a:endParaRPr lang="en-US" sz="1200" dirty="0"/>
+          </a:p>
+        </p:txBody>
+      </p:sp>
+    </p:spTree>
+  </p:cSld>
+  <p:clrMapOvr>
+    <a:masterClrMapping/>
+  </p:clrMapOvr>
+</p:sld>
+</file>
+
+<file path=ppt/slides/slide14.xml><?xml version="1.0" encoding="utf-8"?>
+<p:sld xmlns:a="http://schemas.openxmlformats.org/drawingml/2006/main" xmlns:r="http://schemas.openxmlformats.org/officeDocument/2006/relationships" xmlns:p="http://schemas.openxmlformats.org/presentationml/2006/main">
+  <p:cSld name="Slide 14">
+    <p:bg>
+      <p:bgPr>
+        <a:solidFill>
+          <a:srgbClr val="FFFFFF"/>
+        </a:solidFill>
+      </p:bgPr>
+    </p:bg>
+    <p:spTree>
+      <p:nvGrpSpPr>
+        <p:cNvPr id="1" name=""/>
+        <p:cNvGrpSpPr/>
+        <p:nvPr/>
+      </p:nvGrpSpPr>
+      <p:grpSpPr>
+        <a:xfrm>
+          <a:off x="0" y="0"/>
+          <a:ext cx="0" cy="0"/>
+          <a:chOff x="0" y="0"/>
+          <a:chExt cx="0" cy="0"/>
+        </a:xfrm>
+      </p:grpSpPr>
+      <p:sp>
+        <p:nvSpPr>
+          <p:cNvPr id="2" name="Text 0"/>
+          <p:cNvSpPr/>
+          <p:nvPr/>
+        </p:nvSpPr>
+        <p:spPr>
+          <a:xfrm>
+            <a:off x="0" y="0"/>
+            <a:ext cx="9144000" cy="101501"/>
+          </a:xfrm>
+          <a:prstGeom prst="rect">
+            <a:avLst/>
+          </a:prstGeom>
+          <a:solidFill>
+            <a:srgbClr val="277884"/>
+          </a:solidFill>
+          <a:ln/>
+        </p:spPr>
+        <p:txBody>
+          <a:bodyPr wrap="square" rtlCol="0" anchor="ctr"/>
+          <a:lstStyle/>
+          <a:p>
+            <a:pPr indent="0" marL="0">
+              <a:buNone/>
+            </a:pPr>
+            <a:endParaRPr lang="en-US" dirty="0"/>
+          </a:p>
+        </p:txBody>
+      </p:sp>
+      <p:sp>
+        <p:nvSpPr>
+          <p:cNvPr id="3" name="Text 1"/>
+          <p:cNvSpPr/>
+          <p:nvPr/>
+        </p:nvSpPr>
+        <p:spPr>
+          <a:xfrm>
+            <a:off x="406301" y="457051"/>
+            <a:ext cx="8498026" cy="274290"/>
+          </a:xfrm>
+          <a:prstGeom prst="rect">
+            <a:avLst/>
+          </a:prstGeom>
+          <a:noFill/>
+          <a:ln/>
+        </p:spPr>
+        <p:txBody>
+          <a:bodyPr wrap="square" lIns="0" tIns="0" rIns="0" bIns="0" rtlCol="0" anchor="t"/>
+          <a:lstStyle/>
+          <a:p>
+            <a:pPr algn="l" indent="0" marL="0">
+              <a:lnSpc>
+                <a:spcPts val="2160"/>
+              </a:lnSpc>
+              <a:spcBef>
+                <a:spcPts val="600"/>
+              </a:spcBef>
+              <a:spcAft>
+                <a:spcPts val="800"/>
+              </a:spcAft>
+              <a:buNone/>
+            </a:pPr>
+            <a:r>
+              <a:rPr lang="en-US" sz="1800" b="1" dirty="0">
+                <a:solidFill>
+                  <a:srgbClr val="FE4447"/>
+                </a:solidFill>
+                <a:latin typeface="Georgia" pitchFamily="34" charset="0"/>
+                <a:ea typeface="Georgia" pitchFamily="34" charset="-122"/>
+                <a:cs typeface="Georgia" pitchFamily="34" charset="-120"/>
+              </a:rPr>
+              <a:t>Activity (20 min) — "Decide-or-don't" game (cont.)</a:t>
+            </a:r>
+            <a:endParaRPr lang="en-US" sz="1800" dirty="0"/>
+          </a:p>
+        </p:txBody>
+      </p:sp>
+      <p:sp>
+        <p:nvSpPr>
+          <p:cNvPr id="4" name="Text 2"/>
+          <p:cNvSpPr/>
+          <p:nvPr/>
+        </p:nvSpPr>
+        <p:spPr>
+          <a:xfrm>
+            <a:off x="406301" y="883593"/>
+            <a:ext cx="8331398" cy="3745409"/>
+          </a:xfrm>
+          <a:prstGeom prst="rect">
+            <a:avLst/>
+          </a:prstGeom>
+          <a:solidFill>
+            <a:srgbClr val="F4F8F9"/>
+          </a:solidFill>
+          <a:ln/>
+        </p:spPr>
+        <p:txBody>
+          <a:bodyPr wrap="square" rtlCol="0" anchor="ctr"/>
+          <a:lstStyle/>
+          <a:p>
+            <a:pPr indent="0" marL="0">
+              <a:buNone/>
+            </a:pPr>
+            <a:endParaRPr lang="en-US" dirty="0"/>
+          </a:p>
+        </p:txBody>
+      </p:sp>
+      <p:sp>
+        <p:nvSpPr>
+          <p:cNvPr id="5" name="Shape 3"/>
+          <p:cNvSpPr/>
+          <p:nvPr/>
+        </p:nvSpPr>
+        <p:spPr>
+          <a:xfrm>
+            <a:off x="430113" y="883593"/>
+            <a:ext cx="0" cy="3745409"/>
+          </a:xfrm>
+          <a:prstGeom prst="line">
+            <a:avLst/>
+          </a:prstGeom>
+          <a:noFill/>
+          <a:ln w="47625">
+            <a:solidFill>
+              <a:srgbClr val="277884"/>
+            </a:solidFill>
+            <a:prstDash val="solid"/>
+          </a:ln>
+        </p:spPr>
+      </p:sp>
+      <p:sp>
+        <p:nvSpPr>
+          <p:cNvPr id="6" name="Text 4"/>
+          <p:cNvSpPr/>
+          <p:nvPr/>
+        </p:nvSpPr>
+        <p:spPr>
+          <a:xfrm>
+            <a:off x="631627" y="1010543"/>
+            <a:ext cx="8086939" cy="174575"/>
+          </a:xfrm>
+          <a:prstGeom prst="rect">
+            <a:avLst/>
+          </a:prstGeom>
+          <a:noFill/>
+          <a:ln/>
+        </p:spPr>
+        <p:txBody>
+          <a:bodyPr wrap="square" lIns="0" tIns="0" rIns="0" bIns="0" rtlCol="0" anchor="t"/>
+          <a:lstStyle/>
+          <a:p>
+            <a:pPr algn="l" indent="0" marL="0">
+              <a:lnSpc>
+                <a:spcPts val="1375"/>
+              </a:lnSpc>
+              <a:buNone/>
+            </a:pPr>
+            <a:r>
+              <a:rPr lang="en-US" sz="1100" dirty="0">
+                <a:solidFill>
+                  <a:srgbClr val="1C2833"/>
+                </a:solidFill>
+                <a:latin typeface="Courier New" pitchFamily="34" charset="0"/>
+                <a:ea typeface="Courier New" pitchFamily="34" charset="-122"/>
+                <a:cs typeface="Courier New" pitchFamily="34" charset="-120"/>
+              </a:rPr>
+              <a:t>97 × 96      → Nikhilam (both near 100)</a:t>
+            </a:r>
+            <a:endParaRPr lang="en-US" sz="1100" dirty="0"/>
+          </a:p>
+        </p:txBody>
+      </p:sp>
+      <p:sp>
+        <p:nvSpPr>
+          <p:cNvPr id="7" name="Text 5"/>
+          <p:cNvSpPr/>
+          <p:nvPr/>
+        </p:nvSpPr>
+        <p:spPr>
+          <a:xfrm>
+            <a:off x="631627" y="1185118"/>
+            <a:ext cx="8086939" cy="174575"/>
+          </a:xfrm>
+          <a:prstGeom prst="rect">
+            <a:avLst/>
+          </a:prstGeom>
+          <a:noFill/>
+          <a:ln/>
+        </p:spPr>
+        <p:txBody>
+          <a:bodyPr wrap="square" lIns="0" tIns="0" rIns="0" bIns="0" rtlCol="0" anchor="t"/>
+          <a:lstStyle/>
+          <a:p>
+            <a:pPr algn="l" indent="0" marL="0">
+              <a:lnSpc>
+                <a:spcPts val="1375"/>
+              </a:lnSpc>
+              <a:buNone/>
+            </a:pPr>
+            <a:r>
+              <a:rPr lang="en-US" sz="1100" dirty="0">
+                <a:solidFill>
+                  <a:srgbClr val="1C2833"/>
+                </a:solidFill>
+                <a:latin typeface="Courier New" pitchFamily="34" charset="0"/>
+                <a:ea typeface="Courier New" pitchFamily="34" charset="-122"/>
+                <a:cs typeface="Courier New" pitchFamily="34" charset="-120"/>
+              </a:rPr>
+              <a:t>47 × 53      → Long (no common base)</a:t>
+            </a:r>
+            <a:endParaRPr lang="en-US" sz="1100" dirty="0"/>
+          </a:p>
+        </p:txBody>
+      </p:sp>
+      <p:sp>
+        <p:nvSpPr>
+          <p:cNvPr id="8" name="Text 6"/>
+          <p:cNvSpPr/>
+          <p:nvPr/>
+        </p:nvSpPr>
+        <p:spPr>
+          <a:xfrm>
+            <a:off x="631627" y="1359694"/>
+            <a:ext cx="8086939" cy="174575"/>
+          </a:xfrm>
+          <a:prstGeom prst="rect">
+            <a:avLst/>
+          </a:prstGeom>
+          <a:noFill/>
+          <a:ln/>
+        </p:spPr>
+        <p:txBody>
+          <a:bodyPr wrap="square" lIns="0" tIns="0" rIns="0" bIns="0" rtlCol="0" anchor="t"/>
+          <a:lstStyle/>
+          <a:p>
+            <a:pPr algn="l" indent="0" marL="0">
+              <a:lnSpc>
+                <a:spcPts val="1375"/>
+              </a:lnSpc>
+              <a:buNone/>
+            </a:pPr>
+            <a:r>
+              <a:rPr lang="en-US" sz="1100" dirty="0">
+                <a:solidFill>
+                  <a:srgbClr val="1C2833"/>
+                </a:solidFill>
+                <a:latin typeface="Courier New" pitchFamily="34" charset="0"/>
+                <a:ea typeface="Courier New" pitchFamily="34" charset="-122"/>
+                <a:cs typeface="Courier New" pitchFamily="34" charset="-120"/>
+              </a:rPr>
+              <a:t>998 × 997    → Nikhilam (near 1000)</a:t>
+            </a:r>
+            <a:endParaRPr lang="en-US" sz="1100" dirty="0"/>
+          </a:p>
+        </p:txBody>
+      </p:sp>
+      <p:sp>
+        <p:nvSpPr>
+          <p:cNvPr id="9" name="Text 7"/>
+          <p:cNvSpPr/>
+          <p:nvPr/>
+        </p:nvSpPr>
+        <p:spPr>
+          <a:xfrm>
+            <a:off x="631627" y="1534269"/>
+            <a:ext cx="8086939" cy="174575"/>
+          </a:xfrm>
+          <a:prstGeom prst="rect">
+            <a:avLst/>
+          </a:prstGeom>
+          <a:noFill/>
+          <a:ln/>
+        </p:spPr>
+        <p:txBody>
+          <a:bodyPr wrap="square" lIns="0" tIns="0" rIns="0" bIns="0" rtlCol="0" anchor="t"/>
+          <a:lstStyle/>
+          <a:p>
+            <a:pPr algn="l" indent="0" marL="0">
+              <a:lnSpc>
+                <a:spcPts val="1375"/>
+              </a:lnSpc>
+              <a:buNone/>
+            </a:pPr>
+            <a:r>
+              <a:rPr lang="en-US" sz="1100" dirty="0">
+                <a:solidFill>
+                  <a:srgbClr val="1C2833"/>
+                </a:solidFill>
+                <a:latin typeface="Courier New" pitchFamily="34" charset="0"/>
+                <a:ea typeface="Courier New" pitchFamily="34" charset="-122"/>
+                <a:cs typeface="Courier New" pitchFamily="34" charset="-120"/>
+              </a:rPr>
+              <a:t>73 × 84      → Long</a:t>
+            </a:r>
+            <a:endParaRPr lang="en-US" sz="1100" dirty="0"/>
+          </a:p>
+        </p:txBody>
+      </p:sp>
+      <p:sp>
+        <p:nvSpPr>
+          <p:cNvPr id="10" name="Text 8"/>
+          <p:cNvSpPr/>
+          <p:nvPr/>
+        </p:nvSpPr>
+        <p:spPr>
+          <a:xfrm>
+            <a:off x="631627" y="1708845"/>
+            <a:ext cx="8086939" cy="174575"/>
+          </a:xfrm>
+          <a:prstGeom prst="rect">
+            <a:avLst/>
+          </a:prstGeom>
+          <a:noFill/>
+          <a:ln/>
+        </p:spPr>
+        <p:txBody>
+          <a:bodyPr wrap="square" lIns="0" tIns="0" rIns="0" bIns="0" rtlCol="0" anchor="t"/>
+          <a:lstStyle/>
+          <a:p>
+            <a:pPr algn="l" indent="0" marL="0">
+              <a:lnSpc>
+                <a:spcPts val="1375"/>
+              </a:lnSpc>
+              <a:buNone/>
+            </a:pPr>
+            <a:r>
+              <a:rPr lang="en-US" sz="1100" dirty="0">
+                <a:solidFill>
+                  <a:srgbClr val="1C2833"/>
+                </a:solidFill>
+                <a:latin typeface="Courier New" pitchFamily="34" charset="0"/>
+                <a:ea typeface="Courier New" pitchFamily="34" charset="-122"/>
+                <a:cs typeface="Courier New" pitchFamily="34" charset="-120"/>
+              </a:rPr>
+              <a:t>103 × 104    → Nikhilam</a:t>
+            </a:r>
+            <a:endParaRPr lang="en-US" sz="1100" dirty="0"/>
+          </a:p>
+        </p:txBody>
+      </p:sp>
+      <p:sp>
+        <p:nvSpPr>
+          <p:cNvPr id="11" name="Text 9"/>
+          <p:cNvSpPr/>
+          <p:nvPr/>
+        </p:nvSpPr>
+        <p:spPr>
+          <a:xfrm>
+            <a:off x="631627" y="1883420"/>
+            <a:ext cx="8086939" cy="174575"/>
+          </a:xfrm>
+          <a:prstGeom prst="rect">
+            <a:avLst/>
+          </a:prstGeom>
+          <a:noFill/>
+          <a:ln/>
+        </p:spPr>
+        <p:txBody>
+          <a:bodyPr wrap="square" lIns="0" tIns="0" rIns="0" bIns="0" rtlCol="0" anchor="t"/>
+          <a:lstStyle/>
+          <a:p>
+            <a:pPr algn="l" indent="0" marL="0">
+              <a:lnSpc>
+                <a:spcPts val="1375"/>
+              </a:lnSpc>
+              <a:buNone/>
+            </a:pPr>
+            <a:r>
+              <a:rPr lang="en-US" sz="1100" dirty="0">
+                <a:solidFill>
+                  <a:srgbClr val="1C2833"/>
+                </a:solidFill>
+                <a:latin typeface="Courier New" pitchFamily="34" charset="0"/>
+                <a:ea typeface="Courier New" pitchFamily="34" charset="-122"/>
+                <a:cs typeface="Courier New" pitchFamily="34" charset="-120"/>
+              </a:rPr>
+              <a:t>89 × 91      → Long-ish (near 90, but no nice base)</a:t>
+            </a:r>
+            <a:endParaRPr lang="en-US" sz="1100" dirty="0"/>
+          </a:p>
+        </p:txBody>
+      </p:sp>
+      <p:sp>
+        <p:nvSpPr>
+          <p:cNvPr id="12" name="Text 10"/>
+          <p:cNvSpPr/>
+          <p:nvPr/>
+        </p:nvSpPr>
+        <p:spPr>
+          <a:xfrm>
+            <a:off x="631627" y="2057995"/>
+            <a:ext cx="8086939" cy="174575"/>
+          </a:xfrm>
+          <a:prstGeom prst="rect">
+            <a:avLst/>
+          </a:prstGeom>
+          <a:noFill/>
+          <a:ln/>
+        </p:spPr>
+        <p:txBody>
+          <a:bodyPr wrap="square" lIns="0" tIns="0" rIns="0" bIns="0" rtlCol="0" anchor="t"/>
+          <a:lstStyle/>
+          <a:p>
+            <a:pPr algn="l" indent="0" marL="0">
+              <a:lnSpc>
+                <a:spcPts val="1375"/>
+              </a:lnSpc>
+              <a:buNone/>
+            </a:pPr>
+            <a:r>
+              <a:rPr lang="en-US" sz="1100" dirty="0">
+                <a:solidFill>
+                  <a:srgbClr val="1C2833"/>
+                </a:solidFill>
+                <a:latin typeface="Courier New" pitchFamily="34" charset="0"/>
+                <a:ea typeface="Courier New" pitchFamily="34" charset="-122"/>
+                <a:cs typeface="Courier New" pitchFamily="34" charset="-120"/>
+              </a:rPr>
+              <a:t>102 × 99     → Nikhilam (mixed)</a:t>
+            </a:r>
+            <a:endParaRPr lang="en-US" sz="1100" dirty="0"/>
+          </a:p>
+        </p:txBody>
+      </p:sp>
+      <p:sp>
+        <p:nvSpPr>
+          <p:cNvPr id="13" name="Text 11"/>
+          <p:cNvSpPr/>
+          <p:nvPr/>
+        </p:nvSpPr>
+        <p:spPr>
+          <a:xfrm>
+            <a:off x="631627" y="2232571"/>
+            <a:ext cx="8086939" cy="174575"/>
+          </a:xfrm>
+          <a:prstGeom prst="rect">
+            <a:avLst/>
+          </a:prstGeom>
+          <a:noFill/>
+          <a:ln/>
+        </p:spPr>
+        <p:txBody>
+          <a:bodyPr wrap="square" lIns="0" tIns="0" rIns="0" bIns="0" rtlCol="0" anchor="t"/>
+          <a:lstStyle/>
+          <a:p>
+            <a:pPr algn="l" indent="0" marL="0">
+              <a:lnSpc>
+                <a:spcPts val="1375"/>
+              </a:lnSpc>
+              <a:buNone/>
+            </a:pPr>
+            <a:r>
+              <a:rPr lang="en-US" sz="1100" dirty="0">
+                <a:solidFill>
+                  <a:srgbClr val="1C2833"/>
+                </a:solidFill>
+                <a:latin typeface="Courier New" pitchFamily="34" charset="0"/>
+                <a:ea typeface="Courier New" pitchFamily="34" charset="-122"/>
+                <a:cs typeface="Courier New" pitchFamily="34" charset="-120"/>
+              </a:rPr>
+              <a:t>347 × 28     → Long</a:t>
+            </a:r>
+            <a:endParaRPr lang="en-US" sz="1100" dirty="0"/>
+          </a:p>
+        </p:txBody>
+      </p:sp>
+      <p:sp>
+        <p:nvSpPr>
+          <p:cNvPr id="14" name="Text 12"/>
+          <p:cNvSpPr/>
+          <p:nvPr/>
+        </p:nvSpPr>
+        <p:spPr>
+          <a:xfrm>
+            <a:off x="631627" y="2407146"/>
+            <a:ext cx="8086939" cy="174575"/>
+          </a:xfrm>
+          <a:prstGeom prst="rect">
+            <a:avLst/>
+          </a:prstGeom>
+          <a:noFill/>
+          <a:ln/>
+        </p:spPr>
+        <p:txBody>
+          <a:bodyPr wrap="square" lIns="0" tIns="0" rIns="0" bIns="0" rtlCol="0" anchor="t"/>
+          <a:lstStyle/>
+          <a:p>
+            <a:pPr algn="l" indent="0" marL="0">
+              <a:lnSpc>
+                <a:spcPts val="1375"/>
+              </a:lnSpc>
+              <a:buNone/>
+            </a:pPr>
+            <a:r>
+              <a:rPr lang="en-US" sz="1100" dirty="0">
+                <a:solidFill>
+                  <a:srgbClr val="1C2833"/>
+                </a:solidFill>
+                <a:latin typeface="Courier New" pitchFamily="34" charset="0"/>
+                <a:ea typeface="Courier New" pitchFamily="34" charset="-122"/>
+                <a:cs typeface="Courier New" pitchFamily="34" charset="-120"/>
+              </a:rPr>
+              <a:t>988 × 994    → Nikhilam (near 1000, larger deficits but still works)</a:t>
+            </a:r>
+            <a:endParaRPr lang="en-US" sz="1100" dirty="0"/>
+          </a:p>
+        </p:txBody>
+      </p:sp>
+      <p:sp>
+        <p:nvSpPr>
+          <p:cNvPr id="15" name="Text 13"/>
+          <p:cNvSpPr/>
+          <p:nvPr/>
+        </p:nvSpPr>
+        <p:spPr>
+          <a:xfrm>
+            <a:off x="631627" y="2581721"/>
+            <a:ext cx="8086939" cy="174575"/>
+          </a:xfrm>
+          <a:prstGeom prst="rect">
+            <a:avLst/>
+          </a:prstGeom>
+          <a:noFill/>
+          <a:ln/>
+        </p:spPr>
+        <p:txBody>
+          <a:bodyPr wrap="square" lIns="0" tIns="0" rIns="0" bIns="0" rtlCol="0" anchor="t"/>
+          <a:lstStyle/>
+          <a:p>
+            <a:pPr algn="l" indent="0" marL="0">
+              <a:lnSpc>
+                <a:spcPts val="1375"/>
+              </a:lnSpc>
+              <a:buNone/>
+            </a:pPr>
+            <a:r>
+              <a:rPr lang="en-US" sz="1100" dirty="0">
+                <a:solidFill>
+                  <a:srgbClr val="1C2833"/>
+                </a:solidFill>
+                <a:latin typeface="Courier New" pitchFamily="34" charset="0"/>
+                <a:ea typeface="Courier New" pitchFamily="34" charset="-122"/>
+                <a:cs typeface="Courier New" pitchFamily="34" charset="-120"/>
+              </a:rPr>
+              <a:t>56 × 89      → Long</a:t>
+            </a:r>
+            <a:endParaRPr lang="en-US" sz="1100" dirty="0"/>
+          </a:p>
+        </p:txBody>
+      </p:sp>
+      <p:sp>
+        <p:nvSpPr>
+          <p:cNvPr id="16" name="Text 14"/>
+          <p:cNvSpPr/>
+          <p:nvPr/>
+        </p:nvSpPr>
+        <p:spPr>
+          <a:xfrm>
+            <a:off x="631627" y="2756297"/>
+            <a:ext cx="8086939" cy="174575"/>
+          </a:xfrm>
+          <a:prstGeom prst="rect">
+            <a:avLst/>
+          </a:prstGeom>
+          <a:noFill/>
+          <a:ln/>
+        </p:spPr>
+        <p:txBody>
+          <a:bodyPr wrap="square" lIns="0" tIns="0" rIns="0" bIns="0" rtlCol="0" anchor="t"/>
+          <a:lstStyle/>
+          <a:p>
+            <a:pPr algn="l" indent="0" marL="0">
+              <a:lnSpc>
+                <a:spcPts val="1375"/>
+              </a:lnSpc>
+              <a:buNone/>
+            </a:pPr>
+            <a:r>
+              <a:rPr lang="en-US" sz="1100" dirty="0">
+                <a:solidFill>
+                  <a:srgbClr val="1C2833"/>
+                </a:solidFill>
+                <a:latin typeface="Courier New" pitchFamily="34" charset="0"/>
+                <a:ea typeface="Courier New" pitchFamily="34" charset="-122"/>
+                <a:cs typeface="Courier New" pitchFamily="34" charset="-120"/>
+              </a:rPr>
+              <a:t>99 × 99      → Nikhilam (101 × 99 would also be nice)</a:t>
+            </a:r>
+            <a:endParaRPr lang="en-US" sz="1100" dirty="0"/>
+          </a:p>
+        </p:txBody>
+      </p:sp>
+      <p:sp>
+        <p:nvSpPr>
+          <p:cNvPr id="17" name="Text 15"/>
+          <p:cNvSpPr/>
+          <p:nvPr/>
+        </p:nvSpPr>
+        <p:spPr>
+          <a:xfrm>
+            <a:off x="631627" y="2930872"/>
+            <a:ext cx="8086939" cy="174575"/>
+          </a:xfrm>
+          <a:prstGeom prst="rect">
+            <a:avLst/>
+          </a:prstGeom>
+          <a:noFill/>
+          <a:ln/>
+        </p:spPr>
+        <p:txBody>
+          <a:bodyPr wrap="square" lIns="0" tIns="0" rIns="0" bIns="0" rtlCol="0" anchor="t"/>
+          <a:lstStyle/>
+          <a:p>
+            <a:pPr algn="l" indent="0" marL="0">
+              <a:lnSpc>
+                <a:spcPts val="1375"/>
+              </a:lnSpc>
+              <a:buNone/>
+            </a:pPr>
+            <a:r>
+              <a:rPr lang="en-US" sz="1100" dirty="0">
+                <a:solidFill>
+                  <a:srgbClr val="1C2833"/>
+                </a:solidFill>
+                <a:latin typeface="Courier New" pitchFamily="34" charset="0"/>
+                <a:ea typeface="Courier New" pitchFamily="34" charset="-122"/>
+                <a:cs typeface="Courier New" pitchFamily="34" charset="-120"/>
+              </a:rPr>
+              <a:t>1003 × 1004  → Nikhilam</a:t>
+            </a:r>
+            <a:endParaRPr lang="en-US" sz="1100" dirty="0"/>
+          </a:p>
+        </p:txBody>
+      </p:sp>
+      <p:sp>
+        <p:nvSpPr>
+          <p:cNvPr id="18" name="Text 16"/>
+          <p:cNvSpPr/>
+          <p:nvPr/>
+        </p:nvSpPr>
+        <p:spPr>
+          <a:xfrm>
+            <a:off x="631627" y="3105448"/>
+            <a:ext cx="8086939" cy="174575"/>
+          </a:xfrm>
+          <a:prstGeom prst="rect">
+            <a:avLst/>
+          </a:prstGeom>
+          <a:noFill/>
+          <a:ln/>
+        </p:spPr>
+        <p:txBody>
+          <a:bodyPr wrap="square" lIns="0" tIns="0" rIns="0" bIns="0" rtlCol="0" anchor="t"/>
+          <a:lstStyle/>
+          <a:p>
+            <a:pPr algn="l" indent="0" marL="0">
+              <a:lnSpc>
+                <a:spcPts val="1375"/>
+              </a:lnSpc>
+              <a:buNone/>
+            </a:pPr>
+            <a:r>
+              <a:rPr lang="en-US" sz="1100" dirty="0">
+                <a:solidFill>
+                  <a:srgbClr val="1C2833"/>
+                </a:solidFill>
+                <a:latin typeface="Courier New" pitchFamily="34" charset="0"/>
+                <a:ea typeface="Courier New" pitchFamily="34" charset="-122"/>
+                <a:cs typeface="Courier New" pitchFamily="34" charset="-120"/>
+              </a:rPr>
+              <a:t>65 × 75      → Long</a:t>
+            </a:r>
+            <a:endParaRPr lang="en-US" sz="1100" dirty="0"/>
+          </a:p>
+        </p:txBody>
+      </p:sp>
+      <p:sp>
+        <p:nvSpPr>
+          <p:cNvPr id="19" name="Text 17"/>
+          <p:cNvSpPr/>
+          <p:nvPr/>
+        </p:nvSpPr>
+        <p:spPr>
+          <a:xfrm>
+            <a:off x="631627" y="3280023"/>
+            <a:ext cx="8086939" cy="174575"/>
+          </a:xfrm>
+          <a:prstGeom prst="rect">
+            <a:avLst/>
+          </a:prstGeom>
+          <a:noFill/>
+          <a:ln/>
+        </p:spPr>
+        <p:txBody>
+          <a:bodyPr wrap="square" lIns="0" tIns="0" rIns="0" bIns="0" rtlCol="0" anchor="t"/>
+          <a:lstStyle/>
+          <a:p>
+            <a:pPr algn="l" indent="0" marL="0">
+              <a:lnSpc>
+                <a:spcPts val="1375"/>
+              </a:lnSpc>
+              <a:buNone/>
+            </a:pPr>
+            <a:r>
+              <a:rPr lang="en-US" sz="1100" dirty="0">
+                <a:solidFill>
+                  <a:srgbClr val="1C2833"/>
+                </a:solidFill>
+                <a:latin typeface="Courier New" pitchFamily="34" charset="0"/>
+                <a:ea typeface="Courier New" pitchFamily="34" charset="-122"/>
+                <a:cs typeface="Courier New" pitchFamily="34" charset="-120"/>
+              </a:rPr>
+              <a:t>107 × 108    → Nikhilam</a:t>
+            </a:r>
+            <a:endParaRPr lang="en-US" sz="1100" dirty="0"/>
+          </a:p>
+        </p:txBody>
+      </p:sp>
+      <p:sp>
+        <p:nvSpPr>
+          <p:cNvPr id="20" name="Text 18"/>
+          <p:cNvSpPr/>
+          <p:nvPr/>
+        </p:nvSpPr>
+        <p:spPr>
+          <a:xfrm>
+            <a:off x="631627" y="3454598"/>
+            <a:ext cx="8086939" cy="174575"/>
+          </a:xfrm>
+          <a:prstGeom prst="rect">
+            <a:avLst/>
+          </a:prstGeom>
+          <a:noFill/>
+          <a:ln/>
+        </p:spPr>
+        <p:txBody>
+          <a:bodyPr wrap="square" lIns="0" tIns="0" rIns="0" bIns="0" rtlCol="0" anchor="t"/>
+          <a:lstStyle/>
+          <a:p>
+            <a:pPr algn="l" indent="0" marL="0">
+              <a:lnSpc>
+                <a:spcPts val="1375"/>
+              </a:lnSpc>
+              <a:buNone/>
+            </a:pPr>
+            <a:r>
+              <a:rPr lang="en-US" sz="1100" dirty="0">
+                <a:solidFill>
+                  <a:srgbClr val="1C2833"/>
+                </a:solidFill>
+                <a:latin typeface="Courier New" pitchFamily="34" charset="0"/>
+                <a:ea typeface="Courier New" pitchFamily="34" charset="-122"/>
+                <a:cs typeface="Courier New" pitchFamily="34" charset="-120"/>
+              </a:rPr>
+              <a:t>1234 × 9876  → Long (too far apart, too random)</a:t>
+            </a:r>
+            <a:endParaRPr lang="en-US" sz="1100" dirty="0"/>
+          </a:p>
+        </p:txBody>
+      </p:sp>
+      <p:sp>
+        <p:nvSpPr>
+          <p:cNvPr id="21" name="Text 19"/>
+          <p:cNvSpPr/>
+          <p:nvPr/>
+        </p:nvSpPr>
+        <p:spPr>
+          <a:xfrm>
+            <a:off x="631627" y="3629174"/>
+            <a:ext cx="8086939" cy="174575"/>
+          </a:xfrm>
+          <a:prstGeom prst="rect">
+            <a:avLst/>
+          </a:prstGeom>
+          <a:noFill/>
+          <a:ln/>
+        </p:spPr>
+        <p:txBody>
+          <a:bodyPr wrap="square" lIns="0" tIns="0" rIns="0" bIns="0" rtlCol="0" anchor="t"/>
+          <a:lstStyle/>
+          <a:p>
+            <a:pPr algn="l" indent="0" marL="0">
+              <a:lnSpc>
+                <a:spcPts val="1375"/>
+              </a:lnSpc>
+              <a:buNone/>
+            </a:pPr>
+            <a:r>
+              <a:rPr lang="en-US" sz="1100" dirty="0">
+                <a:solidFill>
+                  <a:srgbClr val="1C2833"/>
+                </a:solidFill>
+                <a:latin typeface="Courier New" pitchFamily="34" charset="0"/>
+                <a:ea typeface="Courier New" pitchFamily="34" charset="-122"/>
+                <a:cs typeface="Courier New" pitchFamily="34" charset="-120"/>
+              </a:rPr>
+              <a:t>9999 × 9998  → Nikhilam (near 10000)</a:t>
+            </a:r>
+            <a:endParaRPr lang="en-US" sz="1100" dirty="0"/>
+          </a:p>
+        </p:txBody>
+      </p:sp>
+      <p:sp>
+        <p:nvSpPr>
+          <p:cNvPr id="22" name="Text 20"/>
+          <p:cNvSpPr/>
+          <p:nvPr/>
+        </p:nvSpPr>
+        <p:spPr>
+          <a:xfrm>
+            <a:off x="631627" y="3803749"/>
+            <a:ext cx="8086939" cy="174575"/>
+          </a:xfrm>
+          <a:prstGeom prst="rect">
+            <a:avLst/>
+          </a:prstGeom>
+          <a:noFill/>
+          <a:ln/>
+        </p:spPr>
+        <p:txBody>
+          <a:bodyPr wrap="square" lIns="0" tIns="0" rIns="0" bIns="0" rtlCol="0" anchor="t"/>
+          <a:lstStyle/>
+          <a:p>
+            <a:pPr algn="l" indent="0" marL="0">
+              <a:lnSpc>
+                <a:spcPts val="1375"/>
+              </a:lnSpc>
+              <a:buNone/>
+            </a:pPr>
+            <a:r>
+              <a:rPr lang="en-US" sz="1100" dirty="0">
+                <a:solidFill>
+                  <a:srgbClr val="1C2833"/>
+                </a:solidFill>
+                <a:latin typeface="Courier New" pitchFamily="34" charset="0"/>
+                <a:ea typeface="Courier New" pitchFamily="34" charset="-122"/>
+                <a:cs typeface="Courier New" pitchFamily="34" charset="-120"/>
+              </a:rPr>
+              <a:t>112 × 113    → Nikhilam (with carry)</a:t>
+            </a:r>
+            <a:endParaRPr lang="en-US" sz="1100" dirty="0"/>
+          </a:p>
+        </p:txBody>
+      </p:sp>
+      <p:sp>
+        <p:nvSpPr>
+          <p:cNvPr id="23" name="Text 21"/>
+          <p:cNvSpPr/>
+          <p:nvPr/>
+        </p:nvSpPr>
+        <p:spPr>
+          <a:xfrm>
+            <a:off x="631627" y="3978325"/>
+            <a:ext cx="8086939" cy="174575"/>
+          </a:xfrm>
+          <a:prstGeom prst="rect">
+            <a:avLst/>
+          </a:prstGeom>
+          <a:noFill/>
+          <a:ln/>
+        </p:spPr>
+        <p:txBody>
+          <a:bodyPr wrap="square" lIns="0" tIns="0" rIns="0" bIns="0" rtlCol="0" anchor="t"/>
+          <a:lstStyle/>
+          <a:p>
+            <a:pPr algn="l" indent="0" marL="0">
+              <a:lnSpc>
+                <a:spcPts val="1375"/>
+              </a:lnSpc>
+              <a:buNone/>
+            </a:pPr>
+            <a:r>
+              <a:rPr lang="en-US" sz="1100" dirty="0">
+                <a:solidFill>
+                  <a:srgbClr val="1C2833"/>
+                </a:solidFill>
+                <a:latin typeface="Courier New" pitchFamily="34" charset="0"/>
+                <a:ea typeface="Courier New" pitchFamily="34" charset="-122"/>
+                <a:cs typeface="Courier New" pitchFamily="34" charset="-120"/>
+              </a:rPr>
+              <a:t>156 × 178    → Long</a:t>
+            </a:r>
+            <a:endParaRPr lang="en-US" sz="1100" dirty="0"/>
+          </a:p>
+        </p:txBody>
+      </p:sp>
+      <p:sp>
+        <p:nvSpPr>
+          <p:cNvPr id="24" name="Text 22"/>
+          <p:cNvSpPr/>
+          <p:nvPr/>
+        </p:nvSpPr>
+        <p:spPr>
+          <a:xfrm>
+            <a:off x="631627" y="4152900"/>
+            <a:ext cx="8086939" cy="174575"/>
+          </a:xfrm>
+          <a:prstGeom prst="rect">
+            <a:avLst/>
+          </a:prstGeom>
+          <a:noFill/>
+          <a:ln/>
+        </p:spPr>
+        <p:txBody>
+          <a:bodyPr wrap="square" lIns="0" tIns="0" rIns="0" bIns="0" rtlCol="0" anchor="t"/>
+          <a:lstStyle/>
+          <a:p>
+            <a:pPr algn="l" indent="0" marL="0">
+              <a:lnSpc>
+                <a:spcPts val="1375"/>
+              </a:lnSpc>
+              <a:buNone/>
+            </a:pPr>
+            <a:r>
+              <a:rPr lang="en-US" sz="1100" dirty="0">
+                <a:solidFill>
+                  <a:srgbClr val="1C2833"/>
+                </a:solidFill>
+                <a:latin typeface="Courier New" pitchFamily="34" charset="0"/>
+                <a:ea typeface="Courier New" pitchFamily="34" charset="-122"/>
+                <a:cs typeface="Courier New" pitchFamily="34" charset="-120"/>
+              </a:rPr>
+              <a:t>49 × 51      → Nikhilam (both near 50 if comfortable; else long)</a:t>
+            </a:r>
+            <a:endParaRPr lang="en-US" sz="1100" dirty="0"/>
+          </a:p>
+        </p:txBody>
+      </p:sp>
+      <p:sp>
+        <p:nvSpPr>
+          <p:cNvPr id="25" name="Text 23"/>
+          <p:cNvSpPr/>
+          <p:nvPr/>
+        </p:nvSpPr>
+        <p:spPr>
+          <a:xfrm>
+            <a:off x="631627" y="4327475"/>
+            <a:ext cx="8086939" cy="174575"/>
+          </a:xfrm>
+          <a:prstGeom prst="rect">
+            <a:avLst/>
+          </a:prstGeom>
+          <a:noFill/>
+          <a:ln/>
+        </p:spPr>
+        <p:txBody>
+          <a:bodyPr wrap="square" lIns="0" tIns="0" rIns="0" bIns="0" rtlCol="0" anchor="t"/>
+          <a:lstStyle/>
+          <a:p>
+            <a:pPr algn="l" indent="0" marL="0">
+              <a:lnSpc>
+                <a:spcPts val="1375"/>
+              </a:lnSpc>
+              <a:buNone/>
+            </a:pPr>
+            <a:r>
+              <a:rPr lang="en-US" sz="1100" dirty="0">
+                <a:solidFill>
+                  <a:srgbClr val="1C2833"/>
+                </a:solidFill>
+                <a:latin typeface="Courier New" pitchFamily="34" charset="0"/>
+                <a:ea typeface="Courier New" pitchFamily="34" charset="-122"/>
+                <a:cs typeface="Courier New" pitchFamily="34" charset="-120"/>
+              </a:rPr>
+              <a:t>997 × 1003   → Nikhilam (mixed, near 1000)</a:t>
+            </a:r>
+            <a:endParaRPr lang="en-US" sz="1100" dirty="0"/>
+          </a:p>
+        </p:txBody>
+      </p:sp>
+      <p:sp>
+        <p:nvSpPr>
+          <p:cNvPr id="26" name="Text 24"/>
+          <p:cNvSpPr/>
+          <p:nvPr/>
+        </p:nvSpPr>
+        <p:spPr>
+          <a:xfrm>
+            <a:off x="406301" y="4794052"/>
+            <a:ext cx="8498026" cy="213271"/>
+          </a:xfrm>
+          <a:prstGeom prst="rect">
+            <a:avLst/>
+          </a:prstGeom>
+          <a:noFill/>
+          <a:ln/>
+        </p:spPr>
+        <p:txBody>
+          <a:bodyPr wrap="square" lIns="0" tIns="0" rIns="0" bIns="0" rtlCol="0" anchor="t"/>
+          <a:lstStyle/>
+          <a:p>
+            <a:pPr algn="l" indent="0" marL="0">
+              <a:lnSpc>
+                <a:spcPts val="1680"/>
+              </a:lnSpc>
+              <a:spcBef>
+                <a:spcPts val="300"/>
+              </a:spcBef>
+              <a:spcAft>
+                <a:spcPts val="300"/>
+              </a:spcAft>
+              <a:buNone/>
+            </a:pPr>
+            <a:r>
+              <a:rPr lang="en-US" sz="1200" dirty="0">
+                <a:solidFill>
+                  <a:srgbClr val="1C2833"/>
+                </a:solidFill>
+                <a:latin typeface="Arial" pitchFamily="34" charset="0"/>
+                <a:ea typeface="Arial" pitchFamily="34" charset="-122"/>
+                <a:cs typeface="Arial" pitchFamily="34" charset="-120"/>
+              </a:rPr>
+              <a:t>Middle ·  · IKS Curriculum</a:t>
+            </a:r>
+            <a:endParaRPr lang="en-US" sz="1200" dirty="0"/>
+          </a:p>
+        </p:txBody>
+      </p:sp>
+    </p:spTree>
+  </p:cSld>
+  <p:clrMapOvr>
+    <a:masterClrMapping/>
+  </p:clrMapOvr>
+</p:sld>
+</file>
+
+<file path=ppt/slides/slide15.xml><?xml version="1.0" encoding="utf-8"?>
+<p:sld xmlns:a="http://schemas.openxmlformats.org/drawingml/2006/main" xmlns:r="http://schemas.openxmlformats.org/officeDocument/2006/relationships" xmlns:p="http://schemas.openxmlformats.org/presentationml/2006/main">
+  <p:cSld name="Slide 15">
+    <p:bg>
+      <p:bgPr>
+        <a:solidFill>
+          <a:srgbClr val="FFFFFF"/>
+        </a:solidFill>
+      </p:bgPr>
+    </p:bg>
+    <p:spTree>
+      <p:nvGrpSpPr>
+        <p:cNvPr id="1" name=""/>
+        <p:cNvGrpSpPr/>
+        <p:nvPr/>
+      </p:nvGrpSpPr>
+      <p:grpSpPr>
+        <a:xfrm>
+          <a:off x="0" y="0"/>
+          <a:ext cx="0" cy="0"/>
+          <a:chOff x="0" y="0"/>
+          <a:chExt cx="0" cy="0"/>
+        </a:xfrm>
+      </p:grpSpPr>
+      <p:sp>
+        <p:nvSpPr>
+          <p:cNvPr id="2" name="Text 0"/>
+          <p:cNvSpPr/>
+          <p:nvPr/>
+        </p:nvSpPr>
+        <p:spPr>
+          <a:xfrm>
+            <a:off x="0" y="0"/>
+            <a:ext cx="9144000" cy="101501"/>
+          </a:xfrm>
+          <a:prstGeom prst="rect">
+            <a:avLst/>
+          </a:prstGeom>
+          <a:solidFill>
+            <a:srgbClr val="277884"/>
+          </a:solidFill>
+          <a:ln/>
+        </p:spPr>
+        <p:txBody>
+          <a:bodyPr wrap="square" rtlCol="0" anchor="ctr"/>
+          <a:lstStyle/>
+          <a:p>
+            <a:pPr indent="0" marL="0">
+              <a:buNone/>
+            </a:pPr>
+            <a:endParaRPr lang="en-US" dirty="0"/>
+          </a:p>
+        </p:txBody>
+      </p:sp>
+      <p:sp>
+        <p:nvSpPr>
+          <p:cNvPr id="3" name="Text 1"/>
+          <p:cNvSpPr/>
+          <p:nvPr/>
+        </p:nvSpPr>
+        <p:spPr>
+          <a:xfrm>
+            <a:off x="406301" y="457051"/>
+            <a:ext cx="8498026" cy="274290"/>
+          </a:xfrm>
+          <a:prstGeom prst="rect">
+            <a:avLst/>
+          </a:prstGeom>
+          <a:noFill/>
+          <a:ln/>
+        </p:spPr>
+        <p:txBody>
+          <a:bodyPr wrap="square" lIns="0" tIns="0" rIns="0" bIns="0" rtlCol="0" anchor="t"/>
+          <a:lstStyle/>
+          <a:p>
+            <a:pPr algn="l" indent="0" marL="0">
+              <a:lnSpc>
+                <a:spcPts val="2160"/>
+              </a:lnSpc>
+              <a:spcBef>
+                <a:spcPts val="600"/>
+              </a:spcBef>
+              <a:spcAft>
+                <a:spcPts val="800"/>
+              </a:spcAft>
+              <a:buNone/>
+            </a:pPr>
+            <a:r>
+              <a:rPr lang="en-US" sz="1800" b="1" dirty="0">
+                <a:solidFill>
+                  <a:srgbClr val="FE4447"/>
+                </a:solidFill>
+                <a:latin typeface="Georgia" pitchFamily="34" charset="0"/>
+                <a:ea typeface="Georgia" pitchFamily="34" charset="-122"/>
+                <a:cs typeface="Georgia" pitchFamily="34" charset="-120"/>
+              </a:rPr>
+              <a:t>Activity (20 min) — "Decide-or-don't" game (cont.)</a:t>
+            </a:r>
+            <a:endParaRPr lang="en-US" sz="1800" dirty="0"/>
+          </a:p>
+        </p:txBody>
+      </p:sp>
+      <p:sp>
+        <p:nvSpPr>
+          <p:cNvPr id="4" name="Text 2"/>
+          <p:cNvSpPr/>
+          <p:nvPr/>
+        </p:nvSpPr>
+        <p:spPr>
+          <a:xfrm>
+            <a:off x="634901" y="883593"/>
+            <a:ext cx="8102798" cy="281880"/>
+          </a:xfrm>
+          <a:prstGeom prst="rect">
+            <a:avLst/>
+          </a:prstGeom>
+          <a:noFill/>
+          <a:ln/>
+        </p:spPr>
+        <p:txBody>
+          <a:bodyPr wrap="square" lIns="0" tIns="0" rIns="0" bIns="0" rtlCol="0" anchor="t"/>
+          <a:lstStyle/>
+          <a:p>
+            <a:pPr algn="l" marL="342900" indent="-342900">
+              <a:lnSpc>
+                <a:spcPts val="1620"/>
+              </a:lnSpc>
+              <a:spcAft>
+                <a:spcPts val="300"/>
+              </a:spcAft>
+              <a:buSzPct val="100000"/>
+              <a:buChar char="•"/>
+            </a:pPr>
+            <a:r>
+              <a:rPr lang="en-US" sz="1200" dirty="0">
+                <a:solidFill>
+                  <a:srgbClr val="1C2833"/>
+                </a:solidFill>
+                <a:latin typeface="Arial" pitchFamily="34" charset="0"/>
+                <a:ea typeface="Arial" pitchFamily="34" charset="-122"/>
+                <a:cs typeface="Arial" pitchFamily="34" charset="-120"/>
+              </a:rPr>
+              <a:t>20 cards in 20 minutes. Pairs that finish early swap decks with another pair.</a:t>
+            </a:r>
+            <a:endParaRPr lang="en-US" sz="1200" dirty="0"/>
+          </a:p>
+        </p:txBody>
+      </p:sp>
+      <p:sp>
+        <p:nvSpPr>
+          <p:cNvPr id="5" name="Text 3"/>
+          <p:cNvSpPr/>
+          <p:nvPr/>
+        </p:nvSpPr>
+        <p:spPr>
+          <a:xfrm>
+            <a:off x="406301" y="4434929"/>
+            <a:ext cx="8498026" cy="213271"/>
+          </a:xfrm>
+          <a:prstGeom prst="rect">
+            <a:avLst/>
+          </a:prstGeom>
+          <a:noFill/>
+          <a:ln/>
+        </p:spPr>
+        <p:txBody>
+          <a:bodyPr wrap="square" lIns="0" tIns="0" rIns="0" bIns="0" rtlCol="0" anchor="t"/>
+          <a:lstStyle/>
+          <a:p>
+            <a:pPr algn="l" indent="0" marL="0">
+              <a:lnSpc>
+                <a:spcPts val="1680"/>
+              </a:lnSpc>
+              <a:spcBef>
+                <a:spcPts val="300"/>
+              </a:spcBef>
+              <a:spcAft>
+                <a:spcPts val="300"/>
+              </a:spcAft>
+              <a:buNone/>
+            </a:pPr>
+            <a:r>
+              <a:rPr lang="en-US" sz="1200" dirty="0">
+                <a:solidFill>
+                  <a:srgbClr val="1C2833"/>
+                </a:solidFill>
+                <a:latin typeface="Arial" pitchFamily="34" charset="0"/>
+                <a:ea typeface="Arial" pitchFamily="34" charset="-122"/>
+                <a:cs typeface="Arial" pitchFamily="34" charset="-120"/>
+              </a:rPr>
+              <a:t>Middle ·  · IKS Curriculum</a:t>
+            </a:r>
+            <a:endParaRPr lang="en-US" sz="1200" dirty="0"/>
+          </a:p>
+        </p:txBody>
+      </p:sp>
+    </p:spTree>
+  </p:cSld>
+  <p:clrMapOvr>
+    <a:masterClrMapping/>
+  </p:clrMapOvr>
+</p:sld>
+</file>
+
+<file path=ppt/slides/slide16.xml><?xml version="1.0" encoding="utf-8"?>
+<p:sld xmlns:a="http://schemas.openxmlformats.org/drawingml/2006/main" xmlns:r="http://schemas.openxmlformats.org/officeDocument/2006/relationships" xmlns:p="http://schemas.openxmlformats.org/presentationml/2006/main">
+  <p:cSld name="Slide 16">
+    <p:bg>
+      <p:bgPr>
+        <a:solidFill>
+          <a:srgbClr val="FFFFFF"/>
+        </a:solidFill>
+      </p:bgPr>
+    </p:bg>
+    <p:spTree>
+      <p:nvGrpSpPr>
+        <p:cNvPr id="1" name=""/>
+        <p:cNvGrpSpPr/>
+        <p:nvPr/>
+      </p:nvGrpSpPr>
+      <p:grpSpPr>
+        <a:xfrm>
+          <a:off x="0" y="0"/>
+          <a:ext cx="0" cy="0"/>
+          <a:chOff x="0" y="0"/>
+          <a:chExt cx="0" cy="0"/>
+        </a:xfrm>
+      </p:grpSpPr>
+      <p:sp>
+        <p:nvSpPr>
+          <p:cNvPr id="2" name="Text 0"/>
+          <p:cNvSpPr/>
+          <p:nvPr/>
+        </p:nvSpPr>
+        <p:spPr>
+          <a:xfrm>
+            <a:off x="0" y="0"/>
+            <a:ext cx="9144000" cy="101501"/>
+          </a:xfrm>
+          <a:prstGeom prst="rect">
+            <a:avLst/>
+          </a:prstGeom>
+          <a:solidFill>
+            <a:srgbClr val="277884"/>
+          </a:solidFill>
+          <a:ln/>
+        </p:spPr>
+        <p:txBody>
+          <a:bodyPr wrap="square" rtlCol="0" anchor="ctr"/>
+          <a:lstStyle/>
+          <a:p>
+            <a:pPr indent="0" marL="0">
+              <a:buNone/>
+            </a:pPr>
+            <a:endParaRPr lang="en-US" dirty="0"/>
+          </a:p>
+        </p:txBody>
+      </p:sp>
+      <p:sp>
+        <p:nvSpPr>
+          <p:cNvPr id="3" name="Text 1"/>
+          <p:cNvSpPr/>
+          <p:nvPr/>
+        </p:nvSpPr>
+        <p:spPr>
+          <a:xfrm>
+            <a:off x="406301" y="457051"/>
+            <a:ext cx="8498026" cy="274290"/>
+          </a:xfrm>
+          <a:prstGeom prst="rect">
+            <a:avLst/>
+          </a:prstGeom>
+          <a:noFill/>
+          <a:ln/>
+        </p:spPr>
+        <p:txBody>
+          <a:bodyPr wrap="square" lIns="0" tIns="0" rIns="0" bIns="0" rtlCol="0" anchor="t"/>
+          <a:lstStyle/>
+          <a:p>
+            <a:pPr algn="l" indent="0" marL="0">
+              <a:lnSpc>
+                <a:spcPts val="2160"/>
+              </a:lnSpc>
+              <a:spcBef>
+                <a:spcPts val="600"/>
+              </a:spcBef>
+              <a:spcAft>
+                <a:spcPts val="800"/>
+              </a:spcAft>
+              <a:buNone/>
+            </a:pPr>
+            <a:r>
+              <a:rPr lang="en-US" sz="1800" b="1" dirty="0">
+                <a:solidFill>
+                  <a:srgbClr val="FE4447"/>
+                </a:solidFill>
+                <a:latin typeface="Georgia" pitchFamily="34" charset="0"/>
+                <a:ea typeface="Georgia" pitchFamily="34" charset="-122"/>
+                <a:cs typeface="Georgia" pitchFamily="34" charset="-120"/>
+              </a:rPr>
+              <a:t>Wrap-up (5 min)</a:t>
+            </a:r>
+            <a:endParaRPr lang="en-US" sz="1800" dirty="0"/>
+          </a:p>
+        </p:txBody>
+      </p:sp>
+      <p:sp>
+        <p:nvSpPr>
+          <p:cNvPr id="4" name="Text 2"/>
+          <p:cNvSpPr/>
+          <p:nvPr/>
+        </p:nvSpPr>
+        <p:spPr>
+          <a:xfrm>
+            <a:off x="634901" y="883593"/>
+            <a:ext cx="8102798" cy="975122"/>
+          </a:xfrm>
+          <a:prstGeom prst="rect">
+            <a:avLst/>
+          </a:prstGeom>
+          <a:noFill/>
+          <a:ln/>
+        </p:spPr>
+        <p:txBody>
+          <a:bodyPr wrap="square" lIns="0" tIns="0" rIns="0" bIns="0" rtlCol="0" anchor="t"/>
+          <a:lstStyle/>
+          <a:p>
+            <a:pPr algn="l" marL="342900" indent="-342900">
+              <a:lnSpc>
+                <a:spcPts val="1620"/>
+              </a:lnSpc>
+              <a:spcAft>
+                <a:spcPts val="300"/>
+              </a:spcAft>
+              <a:buSzPct val="100000"/>
+              <a:buChar char="•"/>
+            </a:pPr>
+            <a:r>
+              <a:rPr lang="en-US" sz="1200" dirty="0">
+                <a:solidFill>
+                  <a:srgbClr val="1C2833"/>
+                </a:solidFill>
+                <a:latin typeface="Arial" pitchFamily="34" charset="0"/>
+                <a:ea typeface="Arial" pitchFamily="34" charset="-122"/>
+                <a:cs typeface="Arial" pitchFamily="34" charset="-120"/>
+              </a:rPr>
+              <a:t>Class discussion: which cards did pairs most often mis-categorise?</a:t>
+            </a:r>
+            <a:endParaRPr lang="en-US" sz="1200" dirty="0"/>
+          </a:p>
+          <a:p>
+            <a:pPr algn="l" marL="342900" indent="-342900">
+              <a:lnSpc>
+                <a:spcPts val="1620"/>
+              </a:lnSpc>
+              <a:spcAft>
+                <a:spcPts val="300"/>
+              </a:spcAft>
+              <a:buSzPct val="100000"/>
+              <a:buChar char="•"/>
+            </a:pPr>
+            <a:r>
+              <a:rPr lang="en-US" sz="1200" dirty="0">
+                <a:solidFill>
+                  <a:srgbClr val="1C2833"/>
+                </a:solidFill>
+                <a:latin typeface="Arial" pitchFamily="34" charset="0"/>
+                <a:ea typeface="Arial" pitchFamily="34" charset="-122"/>
+                <a:cs typeface="Arial" pitchFamily="34" charset="-120"/>
+              </a:rPr>
+              <a:t>Insight to leave with: </a:t>
+            </a:r>
+            <a:pPr algn="l" indent="0" marL="0">
+              <a:lnSpc>
+                <a:spcPts val="1620"/>
+              </a:lnSpc>
+              <a:spcAft>
+                <a:spcPts val="300"/>
+              </a:spcAft>
+              <a:buNone/>
+            </a:pPr>
+            <a:r>
+              <a:rPr lang="en-US" sz="1200" b="1" dirty="0">
+                <a:solidFill>
+                  <a:srgbClr val="1C2833"/>
+                </a:solidFill>
+                <a:latin typeface="Arial" pitchFamily="34" charset="0"/>
+                <a:ea typeface="Arial" pitchFamily="34" charset="-122"/>
+                <a:cs typeface="Arial" pitchFamily="34" charset="-120"/>
+              </a:rPr>
+              <a:t>the method is a tool, not a rule.</a:t>
+            </a:r>
+            <a:pPr algn="l" indent="0" marL="0">
+              <a:lnSpc>
+                <a:spcPts val="1620"/>
+              </a:lnSpc>
+              <a:spcAft>
+                <a:spcPts val="300"/>
+              </a:spcAft>
+              <a:buNone/>
+            </a:pPr>
+            <a:r>
+              <a:rPr lang="en-US" sz="1200" dirty="0">
+                <a:solidFill>
+                  <a:srgbClr val="1C2833"/>
+                </a:solidFill>
+                <a:latin typeface="Arial" pitchFamily="34" charset="0"/>
+                <a:ea typeface="Arial" pitchFamily="34" charset="-122"/>
+                <a:cs typeface="Arial" pitchFamily="34" charset="-120"/>
+              </a:rPr>
+              <a:t> Long multiplication is </a:t>
+            </a:r>
+            <a:pPr algn="l" indent="0" marL="0">
+              <a:lnSpc>
+                <a:spcPts val="1620"/>
+              </a:lnSpc>
+              <a:spcAft>
+                <a:spcPts val="300"/>
+              </a:spcAft>
+              <a:buNone/>
+            </a:pPr>
+            <a:r>
               <a:rPr lang="en-US" sz="1200" i="1" dirty="0">
                 <a:solidFill>
                   <a:srgbClr val="1C2833"/>
@@ -3036,7 +5699,7 @@
                 <a:ea typeface="Arial" pitchFamily="34" charset="-122"/>
                 <a:cs typeface="Arial" pitchFamily="34" charset="-120"/>
               </a:rPr>
-              <a:t>Microsoft Word - sutras1.pdf</a:t>
+              <a:t>not</a:t>
             </a:r>
             <a:pPr algn="l" indent="0" marL="0">
               <a:lnSpc>
@@ -3056,7 +5719,1385 @@
                 <a:ea typeface="Arial" pitchFamily="34" charset="-122"/>
                 <a:cs typeface="Arial" pitchFamily="34" charset="-120"/>
               </a:rPr>
-              <a:t> — sūtras #2 (Nikhilam) and #3 (Ūrdhva-tiryagbhyāṁ).</a:t>
+              <a:t> "the wrong way." Each tool fits a certain shape of problem.</a:t>
+            </a:r>
+            <a:endParaRPr lang="en-US" sz="1200" dirty="0"/>
+          </a:p>
+          <a:p>
+            <a:pPr algn="l" marL="342900" indent="-342900">
+              <a:lnSpc>
+                <a:spcPts val="1620"/>
+              </a:lnSpc>
+              <a:spcAft>
+                <a:spcPts val="300"/>
+              </a:spcAft>
+              <a:buSzPct val="100000"/>
+              <a:buChar char="•"/>
+            </a:pPr>
+            <a:r>
+              <a:rPr lang="en-US" sz="1200" dirty="0">
+                <a:solidFill>
+                  <a:srgbClr val="1C2833"/>
+                </a:solidFill>
+                <a:latin typeface="Arial" pitchFamily="34" charset="0"/>
+                <a:ea typeface="Arial" pitchFamily="34" charset="-122"/>
+                <a:cs typeface="Arial" pitchFamily="34" charset="-120"/>
+              </a:rPr>
+              <a:t>Preview Day 9: speed sprints + project start.</a:t>
+            </a:r>
+            <a:endParaRPr lang="en-US" sz="1200" dirty="0"/>
+          </a:p>
+        </p:txBody>
+      </p:sp>
+      <p:sp>
+        <p:nvSpPr>
+          <p:cNvPr id="5" name="Text 3"/>
+          <p:cNvSpPr/>
+          <p:nvPr/>
+        </p:nvSpPr>
+        <p:spPr>
+          <a:xfrm>
+            <a:off x="406301" y="4434929"/>
+            <a:ext cx="8498026" cy="213271"/>
+          </a:xfrm>
+          <a:prstGeom prst="rect">
+            <a:avLst/>
+          </a:prstGeom>
+          <a:noFill/>
+          <a:ln/>
+        </p:spPr>
+        <p:txBody>
+          <a:bodyPr wrap="square" lIns="0" tIns="0" rIns="0" bIns="0" rtlCol="0" anchor="t"/>
+          <a:lstStyle/>
+          <a:p>
+            <a:pPr algn="l" indent="0" marL="0">
+              <a:lnSpc>
+                <a:spcPts val="1680"/>
+              </a:lnSpc>
+              <a:spcBef>
+                <a:spcPts val="300"/>
+              </a:spcBef>
+              <a:spcAft>
+                <a:spcPts val="300"/>
+              </a:spcAft>
+              <a:buNone/>
+            </a:pPr>
+            <a:r>
+              <a:rPr lang="en-US" sz="1200" dirty="0">
+                <a:solidFill>
+                  <a:srgbClr val="1C2833"/>
+                </a:solidFill>
+                <a:latin typeface="Arial" pitchFamily="34" charset="0"/>
+                <a:ea typeface="Arial" pitchFamily="34" charset="-122"/>
+                <a:cs typeface="Arial" pitchFamily="34" charset="-120"/>
+              </a:rPr>
+              <a:t>Middle ·  · IKS Curriculum</a:t>
+            </a:r>
+            <a:endParaRPr lang="en-US" sz="1200" dirty="0"/>
+          </a:p>
+        </p:txBody>
+      </p:sp>
+    </p:spTree>
+  </p:cSld>
+  <p:clrMapOvr>
+    <a:masterClrMapping/>
+  </p:clrMapOvr>
+</p:sld>
+</file>
+
+<file path=ppt/slides/slide17.xml><?xml version="1.0" encoding="utf-8"?>
+<p:sld xmlns:a="http://schemas.openxmlformats.org/drawingml/2006/main" xmlns:r="http://schemas.openxmlformats.org/officeDocument/2006/relationships" xmlns:p="http://schemas.openxmlformats.org/presentationml/2006/main">
+  <p:cSld name="Slide 17">
+    <p:bg>
+      <p:bgPr>
+        <a:solidFill>
+          <a:srgbClr val="FFFFFF"/>
+        </a:solidFill>
+      </p:bgPr>
+    </p:bg>
+    <p:spTree>
+      <p:nvGrpSpPr>
+        <p:cNvPr id="1" name=""/>
+        <p:cNvGrpSpPr/>
+        <p:nvPr/>
+      </p:nvGrpSpPr>
+      <p:grpSpPr>
+        <a:xfrm>
+          <a:off x="0" y="0"/>
+          <a:ext cx="0" cy="0"/>
+          <a:chOff x="0" y="0"/>
+          <a:chExt cx="0" cy="0"/>
+        </a:xfrm>
+      </p:grpSpPr>
+      <p:sp>
+        <p:nvSpPr>
+          <p:cNvPr id="2" name="Text 0"/>
+          <p:cNvSpPr/>
+          <p:nvPr/>
+        </p:nvSpPr>
+        <p:spPr>
+          <a:xfrm>
+            <a:off x="0" y="0"/>
+            <a:ext cx="9144000" cy="101501"/>
+          </a:xfrm>
+          <a:prstGeom prst="rect">
+            <a:avLst/>
+          </a:prstGeom>
+          <a:solidFill>
+            <a:srgbClr val="277884"/>
+          </a:solidFill>
+          <a:ln/>
+        </p:spPr>
+        <p:txBody>
+          <a:bodyPr wrap="square" rtlCol="0" anchor="ctr"/>
+          <a:lstStyle/>
+          <a:p>
+            <a:pPr indent="0" marL="0">
+              <a:buNone/>
+            </a:pPr>
+            <a:endParaRPr lang="en-US" dirty="0"/>
+          </a:p>
+        </p:txBody>
+      </p:sp>
+      <p:sp>
+        <p:nvSpPr>
+          <p:cNvPr id="3" name="Text 1"/>
+          <p:cNvSpPr/>
+          <p:nvPr/>
+        </p:nvSpPr>
+        <p:spPr>
+          <a:xfrm>
+            <a:off x="406301" y="457051"/>
+            <a:ext cx="8498026" cy="274290"/>
+          </a:xfrm>
+          <a:prstGeom prst="rect">
+            <a:avLst/>
+          </a:prstGeom>
+          <a:noFill/>
+          <a:ln/>
+        </p:spPr>
+        <p:txBody>
+          <a:bodyPr wrap="square" lIns="0" tIns="0" rIns="0" bIns="0" rtlCol="0" anchor="t"/>
+          <a:lstStyle/>
+          <a:p>
+            <a:pPr algn="l" indent="0" marL="0">
+              <a:lnSpc>
+                <a:spcPts val="2160"/>
+              </a:lnSpc>
+              <a:spcBef>
+                <a:spcPts val="600"/>
+              </a:spcBef>
+              <a:spcAft>
+                <a:spcPts val="800"/>
+              </a:spcAft>
+              <a:buNone/>
+            </a:pPr>
+            <a:r>
+              <a:rPr lang="en-US" sz="1800" b="1" dirty="0">
+                <a:solidFill>
+                  <a:srgbClr val="FE4447"/>
+                </a:solidFill>
+                <a:latin typeface="Georgia" pitchFamily="34" charset="0"/>
+                <a:ea typeface="Georgia" pitchFamily="34" charset="-122"/>
+                <a:cs typeface="Georgia" pitchFamily="34" charset="-120"/>
+              </a:rPr>
+              <a:t>Student-facing content</a:t>
+            </a:r>
+            <a:endParaRPr lang="en-US" sz="1800" dirty="0"/>
+          </a:p>
+        </p:txBody>
+      </p:sp>
+      <p:sp>
+        <p:nvSpPr>
+          <p:cNvPr id="4" name="Text 2"/>
+          <p:cNvSpPr/>
+          <p:nvPr/>
+        </p:nvSpPr>
+        <p:spPr>
+          <a:xfrm>
+            <a:off x="406301" y="883593"/>
+            <a:ext cx="8331398" cy="2862263"/>
+          </a:xfrm>
+          <a:prstGeom prst="rect">
+            <a:avLst/>
+          </a:prstGeom>
+          <a:solidFill>
+            <a:srgbClr val="F4F8F9"/>
+          </a:solidFill>
+          <a:ln/>
+        </p:spPr>
+        <p:txBody>
+          <a:bodyPr wrap="square" rtlCol="0" anchor="ctr"/>
+          <a:lstStyle/>
+          <a:p>
+            <a:pPr indent="0" marL="0">
+              <a:buNone/>
+            </a:pPr>
+            <a:endParaRPr lang="en-US" dirty="0"/>
+          </a:p>
+        </p:txBody>
+      </p:sp>
+      <p:sp>
+        <p:nvSpPr>
+          <p:cNvPr id="5" name="Shape 3"/>
+          <p:cNvSpPr/>
+          <p:nvPr/>
+        </p:nvSpPr>
+        <p:spPr>
+          <a:xfrm>
+            <a:off x="434876" y="883593"/>
+            <a:ext cx="0" cy="2862263"/>
+          </a:xfrm>
+          <a:prstGeom prst="line">
+            <a:avLst/>
+          </a:prstGeom>
+          <a:noFill/>
+          <a:ln w="57150">
+            <a:solidFill>
+              <a:srgbClr val="FE4447"/>
+            </a:solidFill>
+            <a:prstDash val="solid"/>
+          </a:ln>
+        </p:spPr>
+      </p:sp>
+      <p:sp>
+        <p:nvSpPr>
+          <p:cNvPr id="6" name="Text 4"/>
+          <p:cNvSpPr/>
+          <p:nvPr/>
+        </p:nvSpPr>
+        <p:spPr>
+          <a:xfrm>
+            <a:off x="692051" y="1074093"/>
+            <a:ext cx="7973389" cy="230981"/>
+          </a:xfrm>
+          <a:prstGeom prst="rect">
+            <a:avLst/>
+          </a:prstGeom>
+          <a:noFill/>
+          <a:ln/>
+        </p:spPr>
+        <p:txBody>
+          <a:bodyPr wrap="square" lIns="0" tIns="0" rIns="0" bIns="0" rtlCol="0" anchor="t"/>
+          <a:lstStyle/>
+          <a:p>
+            <a:pPr algn="l" indent="0" marL="0">
+              <a:lnSpc>
+                <a:spcPts val="1820"/>
+              </a:lnSpc>
+              <a:spcBef>
+                <a:spcPts val="300"/>
+              </a:spcBef>
+              <a:spcAft>
+                <a:spcPts val="300"/>
+              </a:spcAft>
+              <a:buNone/>
+            </a:pPr>
+            <a:r>
+              <a:rPr lang="en-US" sz="1300" b="1" i="1" dirty="0">
+                <a:solidFill>
+                  <a:srgbClr val="1C2833"/>
+                </a:solidFill>
+                <a:latin typeface="Georgia" pitchFamily="34" charset="0"/>
+                <a:ea typeface="Georgia" pitchFamily="34" charset="-122"/>
+                <a:cs typeface="Georgia" pitchFamily="34" charset="-120"/>
+              </a:rPr>
+              <a:t>When to use Nikhilam — and when not to</a:t>
+            </a:r>
+            <a:endParaRPr lang="en-US" sz="1300" dirty="0"/>
+          </a:p>
+        </p:txBody>
+      </p:sp>
+      <p:sp>
+        <p:nvSpPr>
+          <p:cNvPr id="7" name="Text 5"/>
+          <p:cNvSpPr/>
+          <p:nvPr/>
+        </p:nvSpPr>
+        <p:spPr>
+          <a:xfrm>
+            <a:off x="692051" y="1343174"/>
+            <a:ext cx="7973389" cy="692944"/>
+          </a:xfrm>
+          <a:prstGeom prst="rect">
+            <a:avLst/>
+          </a:prstGeom>
+          <a:noFill/>
+          <a:ln/>
+        </p:spPr>
+        <p:txBody>
+          <a:bodyPr wrap="square" lIns="0" tIns="0" rIns="0" bIns="0" rtlCol="0" anchor="t"/>
+          <a:lstStyle/>
+          <a:p>
+            <a:pPr algn="l" indent="0" marL="0">
+              <a:lnSpc>
+                <a:spcPts val="1820"/>
+              </a:lnSpc>
+              <a:spcBef>
+                <a:spcPts val="300"/>
+              </a:spcBef>
+              <a:spcAft>
+                <a:spcPts val="300"/>
+              </a:spcAft>
+              <a:buNone/>
+            </a:pPr>
+            <a:r>
+              <a:rPr lang="en-US" sz="1300" dirty="0">
+                <a:solidFill>
+                  <a:srgbClr val="1C2833"/>
+                </a:solidFill>
+                <a:latin typeface="Georgia" pitchFamily="34" charset="0"/>
+                <a:ea typeface="Georgia" pitchFamily="34" charset="-122"/>
+                <a:cs typeface="Georgia" pitchFamily="34" charset="-120"/>
+              </a:rPr>
+              <a:t>| Use Nikhilam | Use long multiplication | |---|---| | Both factors within ~10 of 10, 100, 1000, 10000 | One factor "random" (not near a base) | | Mental math, no pencil | Pencil work, no time pressure | | Mixed below/above same base | Factors near </a:t>
+            </a:r>
+            <a:pPr algn="l" indent="0" marL="0">
+              <a:lnSpc>
+                <a:spcPts val="1820"/>
+              </a:lnSpc>
+              <a:spcBef>
+                <a:spcPts val="300"/>
+              </a:spcBef>
+              <a:spcAft>
+                <a:spcPts val="300"/>
+              </a:spcAft>
+              <a:buNone/>
+            </a:pPr>
+            <a:r>
+              <a:rPr lang="en-US" sz="1300" i="1" dirty="0">
+                <a:solidFill>
+                  <a:srgbClr val="1C2833"/>
+                </a:solidFill>
+                <a:latin typeface="Georgia" pitchFamily="34" charset="0"/>
+                <a:ea typeface="Georgia" pitchFamily="34" charset="-122"/>
+                <a:cs typeface="Georgia" pitchFamily="34" charset="-120"/>
+              </a:rPr>
+              <a:t>different</a:t>
+            </a:r>
+            <a:pPr algn="l" indent="0" marL="0">
+              <a:lnSpc>
+                <a:spcPts val="1820"/>
+              </a:lnSpc>
+              <a:spcBef>
+                <a:spcPts val="300"/>
+              </a:spcBef>
+              <a:spcAft>
+                <a:spcPts val="300"/>
+              </a:spcAft>
+              <a:buNone/>
+            </a:pPr>
+            <a:r>
+              <a:rPr lang="en-US" sz="1300" dirty="0">
+                <a:solidFill>
+                  <a:srgbClr val="1C2833"/>
+                </a:solidFill>
+                <a:latin typeface="Georgia" pitchFamily="34" charset="0"/>
+                <a:ea typeface="Georgia" pitchFamily="34" charset="-122"/>
+                <a:cs typeface="Georgia" pitchFamily="34" charset="-120"/>
+              </a:rPr>
+              <a:t> bases |</a:t>
+            </a:r>
+            <a:endParaRPr lang="en-US" sz="1300" dirty="0"/>
+          </a:p>
+        </p:txBody>
+      </p:sp>
+      <p:sp>
+        <p:nvSpPr>
+          <p:cNvPr id="8" name="Text 6"/>
+          <p:cNvSpPr/>
+          <p:nvPr/>
+        </p:nvSpPr>
+        <p:spPr>
+          <a:xfrm>
+            <a:off x="692051" y="2074218"/>
+            <a:ext cx="7973389" cy="461963"/>
+          </a:xfrm>
+          <a:prstGeom prst="rect">
+            <a:avLst/>
+          </a:prstGeom>
+          <a:noFill/>
+          <a:ln/>
+        </p:spPr>
+        <p:txBody>
+          <a:bodyPr wrap="square" lIns="0" tIns="0" rIns="0" bIns="0" rtlCol="0" anchor="t"/>
+          <a:lstStyle/>
+          <a:p>
+            <a:pPr algn="l" indent="0" marL="0">
+              <a:lnSpc>
+                <a:spcPts val="1820"/>
+              </a:lnSpc>
+              <a:spcBef>
+                <a:spcPts val="300"/>
+              </a:spcBef>
+              <a:spcAft>
+                <a:spcPts val="300"/>
+              </a:spcAft>
+              <a:buNone/>
+            </a:pPr>
+            <a:r>
+              <a:rPr lang="en-US" sz="1300" b="1" i="1" dirty="0">
+                <a:solidFill>
+                  <a:srgbClr val="1C2833"/>
+                </a:solidFill>
+                <a:latin typeface="Georgia" pitchFamily="34" charset="0"/>
+                <a:ea typeface="Georgia" pitchFamily="34" charset="-122"/>
+                <a:cs typeface="Georgia" pitchFamily="34" charset="-120"/>
+              </a:rPr>
+              <a:t>The honest truth:</a:t>
+            </a:r>
+            <a:pPr algn="l" indent="0" marL="0">
+              <a:lnSpc>
+                <a:spcPts val="1820"/>
+              </a:lnSpc>
+              <a:spcBef>
+                <a:spcPts val="300"/>
+              </a:spcBef>
+              <a:spcAft>
+                <a:spcPts val="300"/>
+              </a:spcAft>
+              <a:buNone/>
+            </a:pPr>
+            <a:r>
+              <a:rPr lang="en-US" sz="1300" dirty="0">
+                <a:solidFill>
+                  <a:srgbClr val="1C2833"/>
+                </a:solidFill>
+                <a:latin typeface="Georgia" pitchFamily="34" charset="0"/>
+                <a:ea typeface="Georgia" pitchFamily="34" charset="-122"/>
+                <a:cs typeface="Georgia" pitchFamily="34" charset="-120"/>
+              </a:rPr>
+              <a:t> Most multiplication problems in life are NOT Nikhilam-shaped. Long multiplication remains your everyday workhorse.</a:t>
+            </a:r>
+            <a:endParaRPr lang="en-US" sz="1300" dirty="0"/>
+          </a:p>
+        </p:txBody>
+      </p:sp>
+      <p:sp>
+        <p:nvSpPr>
+          <p:cNvPr id="9" name="Text 7"/>
+          <p:cNvSpPr/>
+          <p:nvPr/>
+        </p:nvSpPr>
+        <p:spPr>
+          <a:xfrm>
+            <a:off x="692051" y="2574280"/>
+            <a:ext cx="7973389" cy="250031"/>
+          </a:xfrm>
+          <a:prstGeom prst="rect">
+            <a:avLst/>
+          </a:prstGeom>
+          <a:noFill/>
+          <a:ln/>
+        </p:spPr>
+        <p:txBody>
+          <a:bodyPr wrap="square" lIns="0" tIns="0" rIns="0" bIns="0" rtlCol="0" anchor="t"/>
+          <a:lstStyle/>
+          <a:p>
+            <a:pPr algn="l" indent="0" marL="0">
+              <a:lnSpc>
+                <a:spcPts val="1820"/>
+              </a:lnSpc>
+              <a:spcBef>
+                <a:spcPts val="300"/>
+              </a:spcBef>
+              <a:spcAft>
+                <a:spcPts val="300"/>
+              </a:spcAft>
+              <a:buNone/>
+            </a:pPr>
+            <a:r>
+              <a:rPr lang="en-US" sz="1300" dirty="0">
+                <a:solidFill>
+                  <a:srgbClr val="1C2833"/>
+                </a:solidFill>
+                <a:latin typeface="Georgia" pitchFamily="34" charset="0"/>
+                <a:ea typeface="Georgia" pitchFamily="34" charset="-122"/>
+                <a:cs typeface="Georgia" pitchFamily="34" charset="-120"/>
+              </a:rPr>
+              <a:t>But when both factors </a:t>
+            </a:r>
+            <a:pPr algn="l" indent="0" marL="0">
+              <a:lnSpc>
+                <a:spcPts val="1820"/>
+              </a:lnSpc>
+              <a:spcBef>
+                <a:spcPts val="300"/>
+              </a:spcBef>
+              <a:spcAft>
+                <a:spcPts val="300"/>
+              </a:spcAft>
+              <a:buNone/>
+            </a:pPr>
+            <a:r>
+              <a:rPr lang="en-US" sz="1300" i="1" dirty="0">
+                <a:solidFill>
+                  <a:srgbClr val="1C2833"/>
+                </a:solidFill>
+                <a:latin typeface="Georgia" pitchFamily="34" charset="0"/>
+                <a:ea typeface="Georgia" pitchFamily="34" charset="-122"/>
+                <a:cs typeface="Georgia" pitchFamily="34" charset="-120"/>
+              </a:rPr>
+              <a:t>are</a:t>
+            </a:r>
+            <a:pPr algn="l" indent="0" marL="0">
+              <a:lnSpc>
+                <a:spcPts val="1820"/>
+              </a:lnSpc>
+              <a:spcBef>
+                <a:spcPts val="300"/>
+              </a:spcBef>
+              <a:spcAft>
+                <a:spcPts val="300"/>
+              </a:spcAft>
+              <a:buNone/>
+            </a:pPr>
+            <a:r>
+              <a:rPr lang="en-US" sz="1300" dirty="0">
+                <a:solidFill>
+                  <a:srgbClr val="1C2833"/>
+                </a:solidFill>
+                <a:latin typeface="Georgia" pitchFamily="34" charset="0"/>
+                <a:ea typeface="Georgia" pitchFamily="34" charset="-122"/>
+                <a:cs typeface="Georgia" pitchFamily="34" charset="-120"/>
+              </a:rPr>
+              <a:t> near a base — </a:t>
+            </a:r>
+            <a:pPr algn="l" indent="0" marL="0">
+              <a:lnSpc>
+                <a:spcPts val="1820"/>
+              </a:lnSpc>
+              <a:spcBef>
+                <a:spcPts val="300"/>
+              </a:spcBef>
+              <a:spcAft>
+                <a:spcPts val="300"/>
+              </a:spcAft>
+              <a:buNone/>
+            </a:pPr>
+            <a:r>
+              <a:rPr lang="en-US" sz="1300" i="1" dirty="0">
+                <a:solidFill>
+                  <a:srgbClr val="1C2833"/>
+                </a:solidFill>
+                <a:latin typeface="Georgia" pitchFamily="34" charset="0"/>
+                <a:ea typeface="Georgia" pitchFamily="34" charset="-122"/>
+                <a:cs typeface="Georgia" pitchFamily="34" charset="-120"/>
+              </a:rPr>
+              <a:t>97 × 96</a:t>
+            </a:r>
+            <a:pPr algn="l" indent="0" marL="0">
+              <a:lnSpc>
+                <a:spcPts val="1820"/>
+              </a:lnSpc>
+              <a:spcBef>
+                <a:spcPts val="300"/>
+              </a:spcBef>
+              <a:spcAft>
+                <a:spcPts val="300"/>
+              </a:spcAft>
+              <a:buNone/>
+            </a:pPr>
+            <a:r>
+              <a:rPr lang="en-US" sz="1300" dirty="0">
+                <a:solidFill>
+                  <a:srgbClr val="1C2833"/>
+                </a:solidFill>
+                <a:latin typeface="Georgia" pitchFamily="34" charset="0"/>
+                <a:ea typeface="Georgia" pitchFamily="34" charset="-122"/>
+                <a:cs typeface="Georgia" pitchFamily="34" charset="-120"/>
+              </a:rPr>
+              <a:t>, </a:t>
+            </a:r>
+            <a:pPr algn="l" indent="0" marL="0">
+              <a:lnSpc>
+                <a:spcPts val="1820"/>
+              </a:lnSpc>
+              <a:spcBef>
+                <a:spcPts val="300"/>
+              </a:spcBef>
+              <a:spcAft>
+                <a:spcPts val="300"/>
+              </a:spcAft>
+              <a:buNone/>
+            </a:pPr>
+            <a:r>
+              <a:rPr lang="en-US" sz="1300" i="1" dirty="0">
+                <a:solidFill>
+                  <a:srgbClr val="1C2833"/>
+                </a:solidFill>
+                <a:latin typeface="Georgia" pitchFamily="34" charset="0"/>
+                <a:ea typeface="Georgia" pitchFamily="34" charset="-122"/>
+                <a:cs typeface="Georgia" pitchFamily="34" charset="-120"/>
+              </a:rPr>
+              <a:t>1003 × 1004</a:t>
+            </a:r>
+            <a:pPr algn="l" indent="0" marL="0">
+              <a:lnSpc>
+                <a:spcPts val="1820"/>
+              </a:lnSpc>
+              <a:spcBef>
+                <a:spcPts val="300"/>
+              </a:spcBef>
+              <a:spcAft>
+                <a:spcPts val="300"/>
+              </a:spcAft>
+              <a:buNone/>
+            </a:pPr>
+            <a:r>
+              <a:rPr lang="en-US" sz="1300" dirty="0">
+                <a:solidFill>
+                  <a:srgbClr val="1C2833"/>
+                </a:solidFill>
+                <a:latin typeface="Georgia" pitchFamily="34" charset="0"/>
+                <a:ea typeface="Georgia" pitchFamily="34" charset="-122"/>
+                <a:cs typeface="Georgia" pitchFamily="34" charset="-120"/>
+              </a:rPr>
+              <a:t> — Nikhilam is 5–10× faster.</a:t>
+            </a:r>
+            <a:endParaRPr lang="en-US" sz="1300" dirty="0"/>
+          </a:p>
+        </p:txBody>
+      </p:sp>
+      <p:sp>
+        <p:nvSpPr>
+          <p:cNvPr id="10" name="Text 8"/>
+          <p:cNvSpPr/>
+          <p:nvPr/>
+        </p:nvSpPr>
+        <p:spPr>
+          <a:xfrm>
+            <a:off x="692051" y="2862411"/>
+            <a:ext cx="7973389" cy="692944"/>
+          </a:xfrm>
+          <a:prstGeom prst="rect">
+            <a:avLst/>
+          </a:prstGeom>
+          <a:noFill/>
+          <a:ln/>
+        </p:spPr>
+        <p:txBody>
+          <a:bodyPr wrap="square" lIns="0" tIns="0" rIns="0" bIns="0" rtlCol="0" anchor="t"/>
+          <a:lstStyle/>
+          <a:p>
+            <a:pPr algn="l" indent="0" marL="0">
+              <a:lnSpc>
+                <a:spcPts val="1820"/>
+              </a:lnSpc>
+              <a:spcBef>
+                <a:spcPts val="300"/>
+              </a:spcBef>
+              <a:spcAft>
+                <a:spcPts val="300"/>
+              </a:spcAft>
+              <a:buNone/>
+            </a:pPr>
+            <a:r>
+              <a:rPr lang="en-US" sz="1300" dirty="0">
+                <a:solidFill>
+                  <a:srgbClr val="1C2833"/>
+                </a:solidFill>
+                <a:latin typeface="Georgia" pitchFamily="34" charset="0"/>
+                <a:ea typeface="Georgia" pitchFamily="34" charset="-122"/>
+                <a:cs typeface="Georgia" pitchFamily="34" charset="-120"/>
+              </a:rPr>
+              <a:t>Tirthaji's other multiplication sūtra, </a:t>
+            </a:r>
+            <a:pPr algn="l" indent="0" marL="0">
+              <a:lnSpc>
+                <a:spcPts val="1820"/>
+              </a:lnSpc>
+              <a:spcBef>
+                <a:spcPts val="300"/>
+              </a:spcBef>
+              <a:spcAft>
+                <a:spcPts val="300"/>
+              </a:spcAft>
+              <a:buNone/>
+            </a:pPr>
+            <a:r>
+              <a:rPr lang="en-US" sz="1300" i="1" dirty="0">
+                <a:solidFill>
+                  <a:srgbClr val="1C2833"/>
+                </a:solidFill>
+                <a:latin typeface="Georgia" pitchFamily="34" charset="0"/>
+                <a:ea typeface="Georgia" pitchFamily="34" charset="-122"/>
+                <a:cs typeface="Georgia" pitchFamily="34" charset="-120"/>
+              </a:rPr>
+              <a:t>Ūrdhva-tiryagbhyāṁ</a:t>
+            </a:r>
+            <a:pPr algn="l" indent="0" marL="0">
+              <a:lnSpc>
+                <a:spcPts val="1820"/>
+              </a:lnSpc>
+              <a:spcBef>
+                <a:spcPts val="300"/>
+              </a:spcBef>
+              <a:spcAft>
+                <a:spcPts val="300"/>
+              </a:spcAft>
+              <a:buNone/>
+            </a:pPr>
+            <a:r>
+              <a:rPr lang="en-US" sz="1300" dirty="0">
+                <a:solidFill>
+                  <a:srgbClr val="1C2833"/>
+                </a:solidFill>
+                <a:latin typeface="Georgia" pitchFamily="34" charset="0"/>
+                <a:ea typeface="Georgia" pitchFamily="34" charset="-122"/>
+                <a:cs typeface="Georgia" pitchFamily="34" charset="-120"/>
+              </a:rPr>
+              <a:t> ("vertically and crosswise"), works for any pair of numbers and is taught in its own module. Nikhilam is the </a:t>
+            </a:r>
+            <a:pPr algn="l" indent="0" marL="0">
+              <a:lnSpc>
+                <a:spcPts val="1820"/>
+              </a:lnSpc>
+              <a:spcBef>
+                <a:spcPts val="300"/>
+              </a:spcBef>
+              <a:spcAft>
+                <a:spcPts val="300"/>
+              </a:spcAft>
+              <a:buNone/>
+            </a:pPr>
+            <a:r>
+              <a:rPr lang="en-US" sz="1300" i="1" dirty="0">
+                <a:solidFill>
+                  <a:srgbClr val="1C2833"/>
+                </a:solidFill>
+                <a:latin typeface="Georgia" pitchFamily="34" charset="0"/>
+                <a:ea typeface="Georgia" pitchFamily="34" charset="-122"/>
+                <a:cs typeface="Georgia" pitchFamily="34" charset="-120"/>
+              </a:rPr>
+              <a:t>near-base specialist</a:t>
+            </a:r>
+            <a:pPr algn="l" indent="0" marL="0">
+              <a:lnSpc>
+                <a:spcPts val="1820"/>
+              </a:lnSpc>
+              <a:spcBef>
+                <a:spcPts val="300"/>
+              </a:spcBef>
+              <a:spcAft>
+                <a:spcPts val="300"/>
+              </a:spcAft>
+              <a:buNone/>
+            </a:pPr>
+            <a:r>
+              <a:rPr lang="en-US" sz="1300" dirty="0">
+                <a:solidFill>
+                  <a:srgbClr val="1C2833"/>
+                </a:solidFill>
+                <a:latin typeface="Georgia" pitchFamily="34" charset="0"/>
+                <a:ea typeface="Georgia" pitchFamily="34" charset="-122"/>
+                <a:cs typeface="Georgia" pitchFamily="34" charset="-120"/>
+              </a:rPr>
+              <a:t>; </a:t>
+            </a:r>
+            <a:pPr algn="l" indent="0" marL="0">
+              <a:lnSpc>
+                <a:spcPts val="1820"/>
+              </a:lnSpc>
+              <a:spcBef>
+                <a:spcPts val="300"/>
+              </a:spcBef>
+              <a:spcAft>
+                <a:spcPts val="300"/>
+              </a:spcAft>
+              <a:buNone/>
+            </a:pPr>
+            <a:r>
+              <a:rPr lang="en-US" sz="1300" i="1" dirty="0">
+                <a:solidFill>
+                  <a:srgbClr val="1C2833"/>
+                </a:solidFill>
+                <a:latin typeface="Georgia" pitchFamily="34" charset="0"/>
+                <a:ea typeface="Georgia" pitchFamily="34" charset="-122"/>
+                <a:cs typeface="Georgia" pitchFamily="34" charset="-120"/>
+              </a:rPr>
+              <a:t>Ūrdhva</a:t>
+            </a:r>
+            <a:pPr algn="l" indent="0" marL="0">
+              <a:lnSpc>
+                <a:spcPts val="1820"/>
+              </a:lnSpc>
+              <a:spcBef>
+                <a:spcPts val="300"/>
+              </a:spcBef>
+              <a:spcAft>
+                <a:spcPts val="300"/>
+              </a:spcAft>
+              <a:buNone/>
+            </a:pPr>
+            <a:r>
+              <a:rPr lang="en-US" sz="1300" dirty="0">
+                <a:solidFill>
+                  <a:srgbClr val="1C2833"/>
+                </a:solidFill>
+                <a:latin typeface="Georgia" pitchFamily="34" charset="0"/>
+                <a:ea typeface="Georgia" pitchFamily="34" charset="-122"/>
+                <a:cs typeface="Georgia" pitchFamily="34" charset="-120"/>
+              </a:rPr>
+              <a:t> is the </a:t>
+            </a:r>
+            <a:pPr algn="l" indent="0" marL="0">
+              <a:lnSpc>
+                <a:spcPts val="1820"/>
+              </a:lnSpc>
+              <a:spcBef>
+                <a:spcPts val="300"/>
+              </a:spcBef>
+              <a:spcAft>
+                <a:spcPts val="300"/>
+              </a:spcAft>
+              <a:buNone/>
+            </a:pPr>
+            <a:r>
+              <a:rPr lang="en-US" sz="1300" i="1" dirty="0">
+                <a:solidFill>
+                  <a:srgbClr val="1C2833"/>
+                </a:solidFill>
+                <a:latin typeface="Georgia" pitchFamily="34" charset="0"/>
+                <a:ea typeface="Georgia" pitchFamily="34" charset="-122"/>
+                <a:cs typeface="Georgia" pitchFamily="34" charset="-120"/>
+              </a:rPr>
+              <a:t>generalist</a:t>
+            </a:r>
+            <a:pPr algn="l" indent="0" marL="0">
+              <a:lnSpc>
+                <a:spcPts val="1820"/>
+              </a:lnSpc>
+              <a:spcBef>
+                <a:spcPts val="300"/>
+              </a:spcBef>
+              <a:spcAft>
+                <a:spcPts val="300"/>
+              </a:spcAft>
+              <a:buNone/>
+            </a:pPr>
+            <a:r>
+              <a:rPr lang="en-US" sz="1300" dirty="0">
+                <a:solidFill>
+                  <a:srgbClr val="1C2833"/>
+                </a:solidFill>
+                <a:latin typeface="Georgia" pitchFamily="34" charset="0"/>
+                <a:ea typeface="Georgia" pitchFamily="34" charset="-122"/>
+                <a:cs typeface="Georgia" pitchFamily="34" charset="-120"/>
+              </a:rPr>
+              <a:t>.</a:t>
+            </a:r>
+            <a:endParaRPr lang="en-US" sz="1300" dirty="0"/>
+          </a:p>
+        </p:txBody>
+      </p:sp>
+      <p:sp>
+        <p:nvSpPr>
+          <p:cNvPr id="11" name="Text 9"/>
+          <p:cNvSpPr/>
+          <p:nvPr/>
+        </p:nvSpPr>
+        <p:spPr>
+          <a:xfrm>
+            <a:off x="406301" y="4434929"/>
+            <a:ext cx="8498026" cy="213271"/>
+          </a:xfrm>
+          <a:prstGeom prst="rect">
+            <a:avLst/>
+          </a:prstGeom>
+          <a:noFill/>
+          <a:ln/>
+        </p:spPr>
+        <p:txBody>
+          <a:bodyPr wrap="square" lIns="0" tIns="0" rIns="0" bIns="0" rtlCol="0" anchor="t"/>
+          <a:lstStyle/>
+          <a:p>
+            <a:pPr algn="l" indent="0" marL="0">
+              <a:lnSpc>
+                <a:spcPts val="1680"/>
+              </a:lnSpc>
+              <a:spcBef>
+                <a:spcPts val="300"/>
+              </a:spcBef>
+              <a:spcAft>
+                <a:spcPts val="300"/>
+              </a:spcAft>
+              <a:buNone/>
+            </a:pPr>
+            <a:r>
+              <a:rPr lang="en-US" sz="1200" dirty="0">
+                <a:solidFill>
+                  <a:srgbClr val="1C2833"/>
+                </a:solidFill>
+                <a:latin typeface="Arial" pitchFamily="34" charset="0"/>
+                <a:ea typeface="Arial" pitchFamily="34" charset="-122"/>
+                <a:cs typeface="Arial" pitchFamily="34" charset="-120"/>
+              </a:rPr>
+              <a:t>Middle ·  · IKS Curriculum</a:t>
+            </a:r>
+            <a:endParaRPr lang="en-US" sz="1200" dirty="0"/>
+          </a:p>
+        </p:txBody>
+      </p:sp>
+    </p:spTree>
+  </p:cSld>
+  <p:clrMapOvr>
+    <a:masterClrMapping/>
+  </p:clrMapOvr>
+</p:sld>
+</file>
+
+<file path=ppt/slides/slide18.xml><?xml version="1.0" encoding="utf-8"?>
+<p:sld xmlns:a="http://schemas.openxmlformats.org/drawingml/2006/main" xmlns:r="http://schemas.openxmlformats.org/officeDocument/2006/relationships" xmlns:p="http://schemas.openxmlformats.org/presentationml/2006/main">
+  <p:cSld name="Slide 18">
+    <p:bg>
+      <p:bgPr>
+        <a:solidFill>
+          <a:srgbClr val="FFFFFF"/>
+        </a:solidFill>
+      </p:bgPr>
+    </p:bg>
+    <p:spTree>
+      <p:nvGrpSpPr>
+        <p:cNvPr id="1" name=""/>
+        <p:cNvGrpSpPr/>
+        <p:nvPr/>
+      </p:nvGrpSpPr>
+      <p:grpSpPr>
+        <a:xfrm>
+          <a:off x="0" y="0"/>
+          <a:ext cx="0" cy="0"/>
+          <a:chOff x="0" y="0"/>
+          <a:chExt cx="0" cy="0"/>
+        </a:xfrm>
+      </p:grpSpPr>
+      <p:sp>
+        <p:nvSpPr>
+          <p:cNvPr id="2" name="Text 0"/>
+          <p:cNvSpPr/>
+          <p:nvPr/>
+        </p:nvSpPr>
+        <p:spPr>
+          <a:xfrm>
+            <a:off x="0" y="0"/>
+            <a:ext cx="9144000" cy="101501"/>
+          </a:xfrm>
+          <a:prstGeom prst="rect">
+            <a:avLst/>
+          </a:prstGeom>
+          <a:solidFill>
+            <a:srgbClr val="277884"/>
+          </a:solidFill>
+          <a:ln/>
+        </p:spPr>
+        <p:txBody>
+          <a:bodyPr wrap="square" rtlCol="0" anchor="ctr"/>
+          <a:lstStyle/>
+          <a:p>
+            <a:pPr indent="0" marL="0">
+              <a:buNone/>
+            </a:pPr>
+            <a:endParaRPr lang="en-US" dirty="0"/>
+          </a:p>
+        </p:txBody>
+      </p:sp>
+      <p:sp>
+        <p:nvSpPr>
+          <p:cNvPr id="3" name="Text 1"/>
+          <p:cNvSpPr/>
+          <p:nvPr/>
+        </p:nvSpPr>
+        <p:spPr>
+          <a:xfrm>
+            <a:off x="406301" y="457051"/>
+            <a:ext cx="8498026" cy="274290"/>
+          </a:xfrm>
+          <a:prstGeom prst="rect">
+            <a:avLst/>
+          </a:prstGeom>
+          <a:noFill/>
+          <a:ln/>
+        </p:spPr>
+        <p:txBody>
+          <a:bodyPr wrap="square" lIns="0" tIns="0" rIns="0" bIns="0" rtlCol="0" anchor="t"/>
+          <a:lstStyle/>
+          <a:p>
+            <a:pPr algn="l" indent="0" marL="0">
+              <a:lnSpc>
+                <a:spcPts val="2160"/>
+              </a:lnSpc>
+              <a:spcBef>
+                <a:spcPts val="600"/>
+              </a:spcBef>
+              <a:spcAft>
+                <a:spcPts val="800"/>
+              </a:spcAft>
+              <a:buNone/>
+            </a:pPr>
+            <a:r>
+              <a:rPr lang="en-US" sz="1800" b="1" dirty="0">
+                <a:solidFill>
+                  <a:srgbClr val="FE4447"/>
+                </a:solidFill>
+                <a:latin typeface="Georgia" pitchFamily="34" charset="0"/>
+                <a:ea typeface="Georgia" pitchFamily="34" charset="-122"/>
+                <a:cs typeface="Georgia" pitchFamily="34" charset="-120"/>
+              </a:rPr>
+              <a:t>Homework</a:t>
+            </a:r>
+            <a:endParaRPr lang="en-US" sz="1800" dirty="0"/>
+          </a:p>
+        </p:txBody>
+      </p:sp>
+      <p:sp>
+        <p:nvSpPr>
+          <p:cNvPr id="4" name="Text 2"/>
+          <p:cNvSpPr/>
+          <p:nvPr/>
+        </p:nvSpPr>
+        <p:spPr>
+          <a:xfrm>
+            <a:off x="634901" y="883593"/>
+            <a:ext cx="8102798" cy="487561"/>
+          </a:xfrm>
+          <a:prstGeom prst="rect">
+            <a:avLst/>
+          </a:prstGeom>
+          <a:noFill/>
+          <a:ln/>
+        </p:spPr>
+        <p:txBody>
+          <a:bodyPr wrap="square" lIns="0" tIns="0" rIns="0" bIns="0" rtlCol="0" anchor="t"/>
+          <a:lstStyle/>
+          <a:p>
+            <a:pPr algn="l" marL="342900" indent="-342900">
+              <a:lnSpc>
+                <a:spcPts val="1620"/>
+              </a:lnSpc>
+              <a:spcAft>
+                <a:spcPts val="300"/>
+              </a:spcAft>
+              <a:buSzPct val="100000"/>
+              <a:buChar char="•"/>
+            </a:pPr>
+            <a:r>
+              <a:rPr lang="en-US" sz="1200" dirty="0">
+                <a:solidFill>
+                  <a:srgbClr val="1C2833"/>
+                </a:solidFill>
+                <a:latin typeface="Arial" pitchFamily="34" charset="0"/>
+                <a:ea typeface="Arial" pitchFamily="34" charset="-122"/>
+                <a:cs typeface="Arial" pitchFamily="34" charset="-120"/>
+              </a:rPr>
+              <a:t>Find 5 multiplication problems in your school textbook (any subject). For each, decide: Nikhilam, long, or Ūrdhva. Write 1 sentence justifying your choice. Bring tomorrow.</a:t>
+            </a:r>
+            <a:endParaRPr lang="en-US" sz="1200" dirty="0"/>
+          </a:p>
+        </p:txBody>
+      </p:sp>
+      <p:sp>
+        <p:nvSpPr>
+          <p:cNvPr id="5" name="Text 3"/>
+          <p:cNvSpPr/>
+          <p:nvPr/>
+        </p:nvSpPr>
+        <p:spPr>
+          <a:xfrm>
+            <a:off x="406301" y="4434929"/>
+            <a:ext cx="8498026" cy="213271"/>
+          </a:xfrm>
+          <a:prstGeom prst="rect">
+            <a:avLst/>
+          </a:prstGeom>
+          <a:noFill/>
+          <a:ln/>
+        </p:spPr>
+        <p:txBody>
+          <a:bodyPr wrap="square" lIns="0" tIns="0" rIns="0" bIns="0" rtlCol="0" anchor="t"/>
+          <a:lstStyle/>
+          <a:p>
+            <a:pPr algn="l" indent="0" marL="0">
+              <a:lnSpc>
+                <a:spcPts val="1680"/>
+              </a:lnSpc>
+              <a:spcBef>
+                <a:spcPts val="300"/>
+              </a:spcBef>
+              <a:spcAft>
+                <a:spcPts val="300"/>
+              </a:spcAft>
+              <a:buNone/>
+            </a:pPr>
+            <a:r>
+              <a:rPr lang="en-US" sz="1200" dirty="0">
+                <a:solidFill>
+                  <a:srgbClr val="1C2833"/>
+                </a:solidFill>
+                <a:latin typeface="Arial" pitchFamily="34" charset="0"/>
+                <a:ea typeface="Arial" pitchFamily="34" charset="-122"/>
+                <a:cs typeface="Arial" pitchFamily="34" charset="-120"/>
+              </a:rPr>
+              <a:t>Middle ·  · IKS Curriculum</a:t>
+            </a:r>
+            <a:endParaRPr lang="en-US" sz="1200" dirty="0"/>
+          </a:p>
+        </p:txBody>
+      </p:sp>
+    </p:spTree>
+  </p:cSld>
+  <p:clrMapOvr>
+    <a:masterClrMapping/>
+  </p:clrMapOvr>
+</p:sld>
+</file>
+
+<file path=ppt/slides/slide19.xml><?xml version="1.0" encoding="utf-8"?>
+<p:sld xmlns:a="http://schemas.openxmlformats.org/drawingml/2006/main" xmlns:r="http://schemas.openxmlformats.org/officeDocument/2006/relationships" xmlns:p="http://schemas.openxmlformats.org/presentationml/2006/main">
+  <p:cSld name="Slide 19">
+    <p:bg>
+      <p:bgPr>
+        <a:solidFill>
+          <a:srgbClr val="FFFFFF"/>
+        </a:solidFill>
+      </p:bgPr>
+    </p:bg>
+    <p:spTree>
+      <p:nvGrpSpPr>
+        <p:cNvPr id="1" name=""/>
+        <p:cNvGrpSpPr/>
+        <p:nvPr/>
+      </p:nvGrpSpPr>
+      <p:grpSpPr>
+        <a:xfrm>
+          <a:off x="0" y="0"/>
+          <a:ext cx="0" cy="0"/>
+          <a:chOff x="0" y="0"/>
+          <a:chExt cx="0" cy="0"/>
+        </a:xfrm>
+      </p:grpSpPr>
+      <p:sp>
+        <p:nvSpPr>
+          <p:cNvPr id="2" name="Text 0"/>
+          <p:cNvSpPr/>
+          <p:nvPr/>
+        </p:nvSpPr>
+        <p:spPr>
+          <a:xfrm>
+            <a:off x="0" y="0"/>
+            <a:ext cx="9144000" cy="101501"/>
+          </a:xfrm>
+          <a:prstGeom prst="rect">
+            <a:avLst/>
+          </a:prstGeom>
+          <a:solidFill>
+            <a:srgbClr val="277884"/>
+          </a:solidFill>
+          <a:ln/>
+        </p:spPr>
+        <p:txBody>
+          <a:bodyPr wrap="square" rtlCol="0" anchor="ctr"/>
+          <a:lstStyle/>
+          <a:p>
+            <a:pPr indent="0" marL="0">
+              <a:buNone/>
+            </a:pPr>
+            <a:endParaRPr lang="en-US" dirty="0"/>
+          </a:p>
+        </p:txBody>
+      </p:sp>
+      <p:sp>
+        <p:nvSpPr>
+          <p:cNvPr id="3" name="Text 1"/>
+          <p:cNvSpPr/>
+          <p:nvPr/>
+        </p:nvSpPr>
+        <p:spPr>
+          <a:xfrm>
+            <a:off x="406301" y="457051"/>
+            <a:ext cx="8498026" cy="274290"/>
+          </a:xfrm>
+          <a:prstGeom prst="rect">
+            <a:avLst/>
+          </a:prstGeom>
+          <a:noFill/>
+          <a:ln/>
+        </p:spPr>
+        <p:txBody>
+          <a:bodyPr wrap="square" lIns="0" tIns="0" rIns="0" bIns="0" rtlCol="0" anchor="t"/>
+          <a:lstStyle/>
+          <a:p>
+            <a:pPr algn="l" indent="0" marL="0">
+              <a:lnSpc>
+                <a:spcPts val="2160"/>
+              </a:lnSpc>
+              <a:spcBef>
+                <a:spcPts val="600"/>
+              </a:spcBef>
+              <a:spcAft>
+                <a:spcPts val="800"/>
+              </a:spcAft>
+              <a:buNone/>
+            </a:pPr>
+            <a:r>
+              <a:rPr lang="en-US" sz="1800" b="1" dirty="0">
+                <a:solidFill>
+                  <a:srgbClr val="FE4447"/>
+                </a:solidFill>
+                <a:latin typeface="Georgia" pitchFamily="34" charset="0"/>
+                <a:ea typeface="Georgia" pitchFamily="34" charset="-122"/>
+                <a:cs typeface="Georgia" pitchFamily="34" charset="-120"/>
+              </a:rPr>
+              <a:t>Differentiation</a:t>
+            </a:r>
+            <a:endParaRPr lang="en-US" sz="1800" dirty="0"/>
+          </a:p>
+        </p:txBody>
+      </p:sp>
+      <p:sp>
+        <p:nvSpPr>
+          <p:cNvPr id="4" name="Text 2"/>
+          <p:cNvSpPr/>
+          <p:nvPr/>
+        </p:nvSpPr>
+        <p:spPr>
+          <a:xfrm>
+            <a:off x="634901" y="883593"/>
+            <a:ext cx="8102798" cy="750391"/>
+          </a:xfrm>
+          <a:prstGeom prst="rect">
+            <a:avLst/>
+          </a:prstGeom>
+          <a:noFill/>
+          <a:ln/>
+        </p:spPr>
+        <p:txBody>
+          <a:bodyPr wrap="square" lIns="0" tIns="0" rIns="0" bIns="0" rtlCol="0" anchor="t"/>
+          <a:lstStyle/>
+          <a:p>
+            <a:pPr algn="l" marL="342900" indent="-342900">
+              <a:lnSpc>
+                <a:spcPts val="1620"/>
+              </a:lnSpc>
+              <a:spcAft>
+                <a:spcPts val="300"/>
+              </a:spcAft>
+              <a:buSzPct val="100000"/>
+              <a:buChar char="•"/>
+            </a:pPr>
+            <a:r>
+              <a:rPr lang="en-US" sz="1200" b="1" dirty="0">
+                <a:solidFill>
+                  <a:srgbClr val="1C2833"/>
+                </a:solidFill>
+                <a:latin typeface="Arial" pitchFamily="34" charset="0"/>
+                <a:ea typeface="Arial" pitchFamily="34" charset="-122"/>
+                <a:cs typeface="Arial" pitchFamily="34" charset="-120"/>
+              </a:rPr>
+              <a:t>Tier up:</a:t>
+            </a:r>
+            <a:pPr algn="l" indent="0" marL="0">
+              <a:lnSpc>
+                <a:spcPts val="1620"/>
+              </a:lnSpc>
+              <a:spcAft>
+                <a:spcPts val="300"/>
+              </a:spcAft>
+              <a:buNone/>
+            </a:pPr>
+            <a:r>
+              <a:rPr lang="en-US" sz="1200" dirty="0">
+                <a:solidFill>
+                  <a:srgbClr val="1C2833"/>
+                </a:solidFill>
+                <a:latin typeface="Arial" pitchFamily="34" charset="0"/>
+                <a:ea typeface="Arial" pitchFamily="34" charset="-122"/>
+                <a:cs typeface="Arial" pitchFamily="34" charset="-120"/>
+              </a:rPr>
+              <a:t> Try a sub-base (base 50). Compute </a:t>
+            </a:r>
+            <a:pPr algn="l" indent="0" marL="0">
+              <a:lnSpc>
+                <a:spcPts val="1620"/>
+              </a:lnSpc>
+              <a:spcAft>
+                <a:spcPts val="300"/>
+              </a:spcAft>
+              <a:buNone/>
+            </a:pPr>
+            <a:r>
+              <a:rPr lang="en-US" sz="1200" dirty="0">
+                <a:solidFill>
+                  <a:srgbClr val="1C2833"/>
+                </a:solidFill>
+                <a:latin typeface="Arial" pitchFamily="34" charset="0"/>
+                <a:ea typeface="Arial" pitchFamily="34" charset="-122"/>
+                <a:cs typeface="Arial" pitchFamily="34" charset="-120"/>
+              </a:rPr>
+              <a:t>47 × 48</a:t>
+            </a:r>
+            <a:pPr algn="l" indent="0" marL="0">
+              <a:lnSpc>
+                <a:spcPts val="1620"/>
+              </a:lnSpc>
+              <a:spcAft>
+                <a:spcPts val="300"/>
+              </a:spcAft>
+              <a:buNone/>
+            </a:pPr>
+            <a:r>
+              <a:rPr lang="en-US" sz="1200" dirty="0">
+                <a:solidFill>
+                  <a:srgbClr val="1C2833"/>
+                </a:solidFill>
+                <a:latin typeface="Arial" pitchFamily="34" charset="0"/>
+                <a:ea typeface="Arial" pitchFamily="34" charset="-122"/>
+                <a:cs typeface="Arial" pitchFamily="34" charset="-120"/>
+              </a:rPr>
+              <a:t> via base 50: deficits 3, 2. Cross: 47 − 2 = 45. Multiply by 50: 2250. Add deficit product 6 → 2256. (Real: 47 × 48 = 2256. ✓) Compare with long multiplication. Which felt faster?</a:t>
+            </a:r>
+            <a:endParaRPr lang="en-US" sz="1200" dirty="0"/>
+          </a:p>
+          <a:p>
+            <a:pPr algn="l" marL="342900" indent="-342900">
+              <a:lnSpc>
+                <a:spcPts val="1620"/>
+              </a:lnSpc>
+              <a:spcAft>
+                <a:spcPts val="300"/>
+              </a:spcAft>
+              <a:buSzPct val="100000"/>
+              <a:buChar char="•"/>
+            </a:pPr>
+            <a:r>
+              <a:rPr lang="en-US" sz="1200" b="1" dirty="0">
+                <a:solidFill>
+                  <a:srgbClr val="1C2833"/>
+                </a:solidFill>
+                <a:latin typeface="Arial" pitchFamily="34" charset="0"/>
+                <a:ea typeface="Arial" pitchFamily="34" charset="-122"/>
+                <a:cs typeface="Arial" pitchFamily="34" charset="-120"/>
+              </a:rPr>
+              <a:t>Tier down:</a:t>
+            </a:r>
+            <a:pPr algn="l" indent="0" marL="0">
+              <a:lnSpc>
+                <a:spcPts val="1620"/>
+              </a:lnSpc>
+              <a:spcAft>
+                <a:spcPts val="300"/>
+              </a:spcAft>
+              <a:buNone/>
+            </a:pPr>
+            <a:r>
+              <a:rPr lang="en-US" sz="1200" dirty="0">
+                <a:solidFill>
+                  <a:srgbClr val="1C2833"/>
+                </a:solidFill>
+                <a:latin typeface="Arial" pitchFamily="34" charset="0"/>
+                <a:ea typeface="Arial" pitchFamily="34" charset="-122"/>
+                <a:cs typeface="Arial" pitchFamily="34" charset="-120"/>
+              </a:rPr>
+              <a:t> Stick to clear-cut cases. Distinguish: "is this near 100?" If yes, Nikhilam. If no, long.</a:t>
             </a:r>
             <a:endParaRPr lang="en-US" sz="1200" dirty="0"/>
           </a:p>
@@ -3214,7 +7255,7 @@
                 <a:ea typeface="Georgia" pitchFamily="34" charset="-122"/>
                 <a:cs typeface="Georgia" pitchFamily="34" charset="-120"/>
               </a:rPr>
-              <a:t>Materials</a:t>
+              <a:t>Learning objective</a:t>
             </a:r>
             <a:endParaRPr lang="en-US" sz="1800" dirty="0"/>
           </a:p>
@@ -3229,6 +7270,100 @@
         <p:spPr>
           <a:xfrm>
             <a:off x="406301" y="870942"/>
+            <a:ext cx="8498026" cy="639812"/>
+          </a:xfrm>
+          <a:prstGeom prst="rect">
+            <a:avLst/>
+          </a:prstGeom>
+          <a:noFill/>
+          <a:ln/>
+        </p:spPr>
+        <p:txBody>
+          <a:bodyPr wrap="square" lIns="0" tIns="0" rIns="0" bIns="0" rtlCol="0" anchor="t"/>
+          <a:lstStyle/>
+          <a:p>
+            <a:pPr algn="l" indent="0" marL="0">
+              <a:lnSpc>
+                <a:spcPts val="1680"/>
+              </a:lnSpc>
+              <a:spcBef>
+                <a:spcPts val="300"/>
+              </a:spcBef>
+              <a:spcAft>
+                <a:spcPts val="300"/>
+              </a:spcAft>
+              <a:buNone/>
+            </a:pPr>
+            <a:r>
+              <a:rPr lang="en-US" sz="1200" dirty="0">
+                <a:solidFill>
+                  <a:srgbClr val="1C2833"/>
+                </a:solidFill>
+                <a:latin typeface="Arial" pitchFamily="34" charset="0"/>
+                <a:ea typeface="Arial" pitchFamily="34" charset="-122"/>
+                <a:cs typeface="Arial" pitchFamily="34" charset="-120"/>
+              </a:rPr>
+              <a:t>By the end of this lesson, students will articulate the regime where Nikhilam is faster than long multiplication, AND will recognise problems where long multiplication (or </a:t>
+            </a:r>
+            <a:pPr algn="l" indent="0" marL="0">
+              <a:lnSpc>
+                <a:spcPts val="1680"/>
+              </a:lnSpc>
+              <a:spcBef>
+                <a:spcPts val="300"/>
+              </a:spcBef>
+              <a:spcAft>
+                <a:spcPts val="300"/>
+              </a:spcAft>
+              <a:buNone/>
+            </a:pPr>
+            <a:r>
+              <a:rPr lang="en-US" sz="1200" i="1" dirty="0">
+                <a:solidFill>
+                  <a:srgbClr val="1C2833"/>
+                </a:solidFill>
+                <a:latin typeface="Arial" pitchFamily="34" charset="0"/>
+                <a:ea typeface="Arial" pitchFamily="34" charset="-122"/>
+                <a:cs typeface="Arial" pitchFamily="34" charset="-120"/>
+              </a:rPr>
+              <a:t>Ūrdhva-tiryagbhyāṁ</a:t>
+            </a:r>
+            <a:pPr algn="l" indent="0" marL="0">
+              <a:lnSpc>
+                <a:spcPts val="1680"/>
+              </a:lnSpc>
+              <a:spcBef>
+                <a:spcPts val="300"/>
+              </a:spcBef>
+              <a:spcAft>
+                <a:spcPts val="300"/>
+              </a:spcAft>
+              <a:buNone/>
+            </a:pPr>
+            <a:r>
+              <a:rPr lang="en-US" sz="1200" dirty="0">
+                <a:solidFill>
+                  <a:srgbClr val="1C2833"/>
+                </a:solidFill>
+                <a:latin typeface="Arial" pitchFamily="34" charset="0"/>
+                <a:ea typeface="Arial" pitchFamily="34" charset="-122"/>
+                <a:cs typeface="Arial" pitchFamily="34" charset="-120"/>
+              </a:rPr>
+              <a:t>, the general "vertically and crosswise" method) is the better choice.</a:t>
+            </a:r>
+            <a:endParaRPr lang="en-US" sz="1200" dirty="0"/>
+          </a:p>
+        </p:txBody>
+      </p:sp>
+      <p:sp>
+        <p:nvSpPr>
+          <p:cNvPr id="5" name="Text 3"/>
+          <p:cNvSpPr/>
+          <p:nvPr/>
+        </p:nvSpPr>
+        <p:spPr>
+          <a:xfrm>
+            <a:off x="406301" y="4434929"/>
             <a:ext cx="8498026" cy="213271"/>
           </a:xfrm>
           <a:prstGeom prst="rect">
@@ -3262,22 +7397,132 @@
                 <a:ea typeface="Arial" pitchFamily="34" charset="-122"/>
                 <a:cs typeface="Arial" pitchFamily="34" charset="-120"/>
               </a:rPr>
-              <a:t>– Whiteboard, two columns labelled "Use Nikhilam" and "Use long / Ūrdhva."</a:t>
+              <a:t>Middle ·  · IKS Curriculum</a:t>
             </a:r>
             <a:endParaRPr lang="en-US" sz="1200" dirty="0"/>
           </a:p>
         </p:txBody>
       </p:sp>
-      <p:sp>
-        <p:nvSpPr>
-          <p:cNvPr id="5" name="Text 3"/>
-          <p:cNvSpPr/>
-          <p:nvPr/>
-        </p:nvSpPr>
-        <p:spPr>
-          <a:xfrm>
-            <a:off x="634901" y="1173063"/>
-            <a:ext cx="8102798" cy="281880"/>
+    </p:spTree>
+  </p:cSld>
+  <p:clrMapOvr>
+    <a:masterClrMapping/>
+  </p:clrMapOvr>
+</p:sld>
+</file>
+
+<file path=ppt/slides/slide20.xml><?xml version="1.0" encoding="utf-8"?>
+<p:sld xmlns:a="http://schemas.openxmlformats.org/drawingml/2006/main" xmlns:r="http://schemas.openxmlformats.org/officeDocument/2006/relationships" xmlns:p="http://schemas.openxmlformats.org/presentationml/2006/main">
+  <p:cSld name="Slide 20">
+    <p:bg>
+      <p:bgPr>
+        <a:solidFill>
+          <a:srgbClr val="FFFFFF"/>
+        </a:solidFill>
+      </p:bgPr>
+    </p:bg>
+    <p:spTree>
+      <p:nvGrpSpPr>
+        <p:cNvPr id="1" name=""/>
+        <p:cNvGrpSpPr/>
+        <p:nvPr/>
+      </p:nvGrpSpPr>
+      <p:grpSpPr>
+        <a:xfrm>
+          <a:off x="0" y="0"/>
+          <a:ext cx="0" cy="0"/>
+          <a:chOff x="0" y="0"/>
+          <a:chExt cx="0" cy="0"/>
+        </a:xfrm>
+      </p:grpSpPr>
+      <p:sp>
+        <p:nvSpPr>
+          <p:cNvPr id="2" name="Text 0"/>
+          <p:cNvSpPr/>
+          <p:nvPr/>
+        </p:nvSpPr>
+        <p:spPr>
+          <a:xfrm>
+            <a:off x="0" y="0"/>
+            <a:ext cx="9144000" cy="101501"/>
+          </a:xfrm>
+          <a:prstGeom prst="rect">
+            <a:avLst/>
+          </a:prstGeom>
+          <a:solidFill>
+            <a:srgbClr val="277884"/>
+          </a:solidFill>
+          <a:ln/>
+        </p:spPr>
+        <p:txBody>
+          <a:bodyPr wrap="square" rtlCol="0" anchor="ctr"/>
+          <a:lstStyle/>
+          <a:p>
+            <a:pPr indent="0" marL="0">
+              <a:buNone/>
+            </a:pPr>
+            <a:endParaRPr lang="en-US" dirty="0"/>
+          </a:p>
+        </p:txBody>
+      </p:sp>
+      <p:sp>
+        <p:nvSpPr>
+          <p:cNvPr id="3" name="Text 1"/>
+          <p:cNvSpPr/>
+          <p:nvPr/>
+        </p:nvSpPr>
+        <p:spPr>
+          <a:xfrm>
+            <a:off x="406301" y="457051"/>
+            <a:ext cx="8498026" cy="274290"/>
+          </a:xfrm>
+          <a:prstGeom prst="rect">
+            <a:avLst/>
+          </a:prstGeom>
+          <a:noFill/>
+          <a:ln/>
+        </p:spPr>
+        <p:txBody>
+          <a:bodyPr wrap="square" lIns="0" tIns="0" rIns="0" bIns="0" rtlCol="0" anchor="t"/>
+          <a:lstStyle/>
+          <a:p>
+            <a:pPr algn="l" indent="0" marL="0">
+              <a:lnSpc>
+                <a:spcPts val="2160"/>
+              </a:lnSpc>
+              <a:spcBef>
+                <a:spcPts val="600"/>
+              </a:spcBef>
+              <a:spcAft>
+                <a:spcPts val="800"/>
+              </a:spcAft>
+              <a:buNone/>
+            </a:pPr>
+            <a:r>
+              <a:rPr lang="en-US" sz="1800" b="1" dirty="0">
+                <a:solidFill>
+                  <a:srgbClr val="FE4447"/>
+                </a:solidFill>
+                <a:latin typeface="Georgia" pitchFamily="34" charset="0"/>
+                <a:ea typeface="Georgia" pitchFamily="34" charset="-122"/>
+                <a:cs typeface="Georgia" pitchFamily="34" charset="-120"/>
+              </a:rPr>
+              <a:t>Teacher notes</a:t>
+            </a:r>
+            <a:endParaRPr lang="en-US" sz="1800" dirty="0"/>
+          </a:p>
+        </p:txBody>
+      </p:sp>
+      <p:sp>
+        <p:nvSpPr>
+          <p:cNvPr id="4" name="Text 2"/>
+          <p:cNvSpPr/>
+          <p:nvPr/>
+        </p:nvSpPr>
+        <p:spPr>
+          <a:xfrm>
+            <a:off x="634901" y="883593"/>
+            <a:ext cx="8102798" cy="1592163"/>
           </a:xfrm>
           <a:prstGeom prst="rect">
             <a:avLst/>
@@ -3308,21 +7553,109 @@
                 <a:ea typeface="Arial" pitchFamily="34" charset="-122"/>
                 <a:cs typeface="Arial" pitchFamily="34" charset="-120"/>
               </a:rPr>
-              <a:t>"Decide-or-don't" card deck — 20 multiplication problems on cards. (Teacher prepares ahead.)</a:t>
+              <a:t>This is the honesty day. Some students will be disappointed that Nikhilam isn't universally faster. That's the point: claims about Vedic mathematics often overstate the universal advantage. The honest framing protects against later disillusionment.</a:t>
             </a:r>
             <a:endParaRPr lang="en-US" sz="1200" dirty="0"/>
           </a:p>
-        </p:txBody>
-      </p:sp>
-      <p:sp>
-        <p:nvSpPr>
-          <p:cNvPr id="6" name="Text 4"/>
-          <p:cNvSpPr/>
-          <p:nvPr/>
-        </p:nvSpPr>
-        <p:spPr>
-          <a:xfrm>
-            <a:off x="406301" y="1543794"/>
+          <a:p>
+            <a:pPr algn="l" marL="342900" indent="-342900">
+              <a:lnSpc>
+                <a:spcPts val="1620"/>
+              </a:lnSpc>
+              <a:spcAft>
+                <a:spcPts val="300"/>
+              </a:spcAft>
+              <a:buSzPct val="100000"/>
+              <a:buChar char="•"/>
+            </a:pPr>
+            <a:r>
+              <a:rPr lang="en-US" sz="1200" dirty="0">
+                <a:solidFill>
+                  <a:srgbClr val="1C2833"/>
+                </a:solidFill>
+                <a:latin typeface="Arial" pitchFamily="34" charset="0"/>
+                <a:ea typeface="Arial" pitchFamily="34" charset="-122"/>
+                <a:cs typeface="Arial" pitchFamily="34" charset="-120"/>
+              </a:rPr>
+              <a:t>The "decide" step before solving is the habit-of-mind worth building. Without it, students apply Nikhilam to inappropriate problems and get slower than the standard algorithm.</a:t>
+            </a:r>
+            <a:endParaRPr lang="en-US" sz="1200" dirty="0"/>
+          </a:p>
+          <a:p>
+            <a:pPr algn="l" marL="342900" indent="-342900">
+              <a:lnSpc>
+                <a:spcPts val="1620"/>
+              </a:lnSpc>
+              <a:spcAft>
+                <a:spcPts val="300"/>
+              </a:spcAft>
+              <a:buSzPct val="100000"/>
+              <a:buChar char="•"/>
+            </a:pPr>
+            <a:r>
+              <a:rPr lang="en-US" sz="1200" dirty="0">
+                <a:solidFill>
+                  <a:srgbClr val="1C2833"/>
+                </a:solidFill>
+                <a:latin typeface="Arial" pitchFamily="34" charset="0"/>
+                <a:ea typeface="Arial" pitchFamily="34" charset="-122"/>
+                <a:cs typeface="Arial" pitchFamily="34" charset="-120"/>
+              </a:rPr>
+              <a:t>The mention of </a:t>
+            </a:r>
+            <a:pPr algn="l" indent="0" marL="0">
+              <a:lnSpc>
+                <a:spcPts val="1620"/>
+              </a:lnSpc>
+              <a:spcAft>
+                <a:spcPts val="300"/>
+              </a:spcAft>
+              <a:buNone/>
+            </a:pPr>
+            <a:r>
+              <a:rPr lang="en-US" sz="1200" i="1" dirty="0">
+                <a:solidFill>
+                  <a:srgbClr val="1C2833"/>
+                </a:solidFill>
+                <a:latin typeface="Arial" pitchFamily="34" charset="0"/>
+                <a:ea typeface="Arial" pitchFamily="34" charset="-122"/>
+                <a:cs typeface="Arial" pitchFamily="34" charset="-120"/>
+              </a:rPr>
+              <a:t>Ūrdhva-tiryagbhyāṁ</a:t>
+            </a:r>
+            <a:pPr algn="l" indent="0" marL="0">
+              <a:lnSpc>
+                <a:spcPts val="1620"/>
+              </a:lnSpc>
+              <a:spcAft>
+                <a:spcPts val="300"/>
+              </a:spcAft>
+              <a:buNone/>
+            </a:pPr>
+            <a:r>
+              <a:rPr lang="en-US" sz="1200" dirty="0">
+                <a:solidFill>
+                  <a:srgbClr val="1C2833"/>
+                </a:solidFill>
+                <a:latin typeface="Arial" pitchFamily="34" charset="0"/>
+                <a:ea typeface="Arial" pitchFamily="34" charset="-122"/>
+                <a:cs typeface="Arial" pitchFamily="34" charset="-120"/>
+              </a:rPr>
+              <a:t> sets up future modules. Don't elaborate on the procedure today — it's a 2-week topic of its own.</a:t>
+            </a:r>
+            <a:endParaRPr lang="en-US" sz="1200" dirty="0"/>
+          </a:p>
+        </p:txBody>
+      </p:sp>
+      <p:sp>
+        <p:nvSpPr>
+          <p:cNvPr id="5" name="Text 3"/>
+          <p:cNvSpPr/>
+          <p:nvPr/>
+        </p:nvSpPr>
+        <p:spPr>
+          <a:xfrm>
+            <a:off x="406301" y="4434929"/>
             <a:ext cx="8498026" cy="213271"/>
           </a:xfrm>
           <a:prstGeom prst="rect">
@@ -3356,15 +7689,235 @@
                 <a:ea typeface="Arial" pitchFamily="34" charset="-122"/>
                 <a:cs typeface="Arial" pitchFamily="34" charset="-120"/>
               </a:rPr>
-              <a:t>– Reflection slip.</a:t>
+              <a:t>Middle ·  · IKS Curriculum</a:t>
             </a:r>
             <a:endParaRPr lang="en-US" sz="1200" dirty="0"/>
           </a:p>
         </p:txBody>
       </p:sp>
-      <p:sp>
-        <p:nvSpPr>
-          <p:cNvPr id="7" name="Text 5"/>
+    </p:spTree>
+  </p:cSld>
+  <p:clrMapOvr>
+    <a:masterClrMapping/>
+  </p:clrMapOvr>
+</p:sld>
+</file>
+
+<file path=ppt/slides/slide21.xml><?xml version="1.0" encoding="utf-8"?>
+<p:sld xmlns:a="http://schemas.openxmlformats.org/drawingml/2006/main" xmlns:r="http://schemas.openxmlformats.org/officeDocument/2006/relationships" xmlns:p="http://schemas.openxmlformats.org/presentationml/2006/main">
+  <p:cSld name="Slide 21">
+    <p:bg>
+      <p:bgPr>
+        <a:solidFill>
+          <a:srgbClr val="FFFFFF"/>
+        </a:solidFill>
+      </p:bgPr>
+    </p:bg>
+    <p:spTree>
+      <p:nvGrpSpPr>
+        <p:cNvPr id="1" name=""/>
+        <p:cNvGrpSpPr/>
+        <p:nvPr/>
+      </p:nvGrpSpPr>
+      <p:grpSpPr>
+        <a:xfrm>
+          <a:off x="0" y="0"/>
+          <a:ext cx="0" cy="0"/>
+          <a:chOff x="0" y="0"/>
+          <a:chExt cx="0" cy="0"/>
+        </a:xfrm>
+      </p:grpSpPr>
+      <p:sp>
+        <p:nvSpPr>
+          <p:cNvPr id="2" name="Text 0"/>
+          <p:cNvSpPr/>
+          <p:nvPr/>
+        </p:nvSpPr>
+        <p:spPr>
+          <a:xfrm>
+            <a:off x="0" y="0"/>
+            <a:ext cx="9144000" cy="101501"/>
+          </a:xfrm>
+          <a:prstGeom prst="rect">
+            <a:avLst/>
+          </a:prstGeom>
+          <a:solidFill>
+            <a:srgbClr val="277884"/>
+          </a:solidFill>
+          <a:ln/>
+        </p:spPr>
+        <p:txBody>
+          <a:bodyPr wrap="square" rtlCol="0" anchor="ctr"/>
+          <a:lstStyle/>
+          <a:p>
+            <a:pPr indent="0" marL="0">
+              <a:buNone/>
+            </a:pPr>
+            <a:endParaRPr lang="en-US" dirty="0"/>
+          </a:p>
+        </p:txBody>
+      </p:sp>
+      <p:sp>
+        <p:nvSpPr>
+          <p:cNvPr id="3" name="Text 1"/>
+          <p:cNvSpPr/>
+          <p:nvPr/>
+        </p:nvSpPr>
+        <p:spPr>
+          <a:xfrm>
+            <a:off x="406301" y="457051"/>
+            <a:ext cx="8498026" cy="274290"/>
+          </a:xfrm>
+          <a:prstGeom prst="rect">
+            <a:avLst/>
+          </a:prstGeom>
+          <a:noFill/>
+          <a:ln/>
+        </p:spPr>
+        <p:txBody>
+          <a:bodyPr wrap="square" lIns="0" tIns="0" rIns="0" bIns="0" rtlCol="0" anchor="t"/>
+          <a:lstStyle/>
+          <a:p>
+            <a:pPr algn="l" indent="0" marL="0">
+              <a:lnSpc>
+                <a:spcPts val="2160"/>
+              </a:lnSpc>
+              <a:spcBef>
+                <a:spcPts val="600"/>
+              </a:spcBef>
+              <a:spcAft>
+                <a:spcPts val="800"/>
+              </a:spcAft>
+              <a:buNone/>
+            </a:pPr>
+            <a:r>
+              <a:rPr lang="en-US" sz="1800" b="1" dirty="0">
+                <a:solidFill>
+                  <a:srgbClr val="FE4447"/>
+                </a:solidFill>
+                <a:latin typeface="Georgia" pitchFamily="34" charset="0"/>
+                <a:ea typeface="Georgia" pitchFamily="34" charset="-122"/>
+                <a:cs typeface="Georgia" pitchFamily="34" charset="-120"/>
+              </a:rPr>
+              <a:t>Citation(s) used in this lesson</a:t>
+            </a:r>
+            <a:endParaRPr lang="en-US" sz="1800" dirty="0"/>
+          </a:p>
+        </p:txBody>
+      </p:sp>
+      <p:sp>
+        <p:nvSpPr>
+          <p:cNvPr id="4" name="Text 2"/>
+          <p:cNvSpPr/>
+          <p:nvPr/>
+        </p:nvSpPr>
+        <p:spPr>
+          <a:xfrm>
+            <a:off x="634901" y="883593"/>
+            <a:ext cx="8102798" cy="525661"/>
+          </a:xfrm>
+          <a:prstGeom prst="rect">
+            <a:avLst/>
+          </a:prstGeom>
+          <a:noFill/>
+          <a:ln/>
+        </p:spPr>
+        <p:txBody>
+          <a:bodyPr wrap="square" lIns="0" tIns="0" rIns="0" bIns="0" rtlCol="0" anchor="t"/>
+          <a:lstStyle/>
+          <a:p>
+            <a:pPr algn="l" marL="342900" indent="-342900">
+              <a:lnSpc>
+                <a:spcPts val="1620"/>
+              </a:lnSpc>
+              <a:spcAft>
+                <a:spcPts val="300"/>
+              </a:spcAft>
+              <a:buSzPct val="100000"/>
+              <a:buChar char="•"/>
+            </a:pPr>
+            <a:r>
+              <a:rPr lang="en-US" sz="1200" i="1" dirty="0">
+                <a:solidFill>
+                  <a:srgbClr val="1C2833"/>
+                </a:solidFill>
+                <a:latin typeface="Arial" pitchFamily="34" charset="0"/>
+                <a:ea typeface="Arial" pitchFamily="34" charset="-122"/>
+                <a:cs typeface="Arial" pitchFamily="34" charset="-120"/>
+              </a:rPr>
+              <a:t>Vedic Mathematics Batch1.pdf</a:t>
+            </a:r>
+            <a:pPr algn="l" indent="0" marL="0">
+              <a:lnSpc>
+                <a:spcPts val="1620"/>
+              </a:lnSpc>
+              <a:spcAft>
+                <a:spcPts val="300"/>
+              </a:spcAft>
+              <a:buNone/>
+            </a:pPr>
+            <a:r>
+              <a:rPr lang="en-US" sz="1200" dirty="0">
+                <a:solidFill>
+                  <a:srgbClr val="1C2833"/>
+                </a:solidFill>
+                <a:latin typeface="Arial" pitchFamily="34" charset="0"/>
+                <a:ea typeface="Arial" pitchFamily="34" charset="-122"/>
+                <a:cs typeface="Arial" pitchFamily="34" charset="-120"/>
+              </a:rPr>
+              <a:t> (Vedic Cultural Center, Sammamish WA) — Nikhilam scope and limits.</a:t>
+            </a:r>
+            <a:endParaRPr lang="en-US" sz="1200" dirty="0"/>
+          </a:p>
+          <a:p>
+            <a:pPr algn="l" marL="342900" indent="-342900">
+              <a:lnSpc>
+                <a:spcPts val="1620"/>
+              </a:lnSpc>
+              <a:spcAft>
+                <a:spcPts val="300"/>
+              </a:spcAft>
+              <a:buSzPct val="100000"/>
+              <a:buChar char="•"/>
+            </a:pPr>
+            <a:r>
+              <a:rPr lang="en-US" sz="1200" i="1" dirty="0">
+                <a:solidFill>
+                  <a:srgbClr val="1C2833"/>
+                </a:solidFill>
+                <a:latin typeface="Arial" pitchFamily="34" charset="0"/>
+                <a:ea typeface="Arial" pitchFamily="34" charset="-122"/>
+                <a:cs typeface="Arial" pitchFamily="34" charset="-120"/>
+              </a:rPr>
+              <a:t>Microsoft Word - sutras1.pdf</a:t>
+            </a:r>
+            <a:pPr algn="l" indent="0" marL="0">
+              <a:lnSpc>
+                <a:spcPts val="1620"/>
+              </a:lnSpc>
+              <a:spcAft>
+                <a:spcPts val="300"/>
+              </a:spcAft>
+              <a:buNone/>
+            </a:pPr>
+            <a:r>
+              <a:rPr lang="en-US" sz="1200" dirty="0">
+                <a:solidFill>
+                  <a:srgbClr val="1C2833"/>
+                </a:solidFill>
+                <a:latin typeface="Arial" pitchFamily="34" charset="0"/>
+                <a:ea typeface="Arial" pitchFamily="34" charset="-122"/>
+                <a:cs typeface="Arial" pitchFamily="34" charset="-120"/>
+              </a:rPr>
+              <a:t> — sūtras #2 (Nikhilam) and #3 (Ūrdhva-tiryagbhyāṁ).</a:t>
+            </a:r>
+            <a:endParaRPr lang="en-US" sz="1200" dirty="0"/>
+          </a:p>
+        </p:txBody>
+      </p:sp>
+      <p:sp>
+        <p:nvSpPr>
+          <p:cNvPr id="5" name="Text 3"/>
           <p:cNvSpPr/>
           <p:nvPr/>
         </p:nvSpPr>
@@ -3514,7 +8067,7 @@
                 <a:ea typeface="Georgia" pitchFamily="34" charset="-122"/>
                 <a:cs typeface="Georgia" pitchFamily="34" charset="-120"/>
               </a:rPr>
-              <a:t>Lesson flow</a:t>
+              <a:t>Materials</a:t>
             </a:r>
             <a:endParaRPr lang="en-US" sz="1800" dirty="0"/>
           </a:p>
@@ -3523,6 +8076,100 @@
       <p:sp>
         <p:nvSpPr>
           <p:cNvPr id="4" name="Text 2"/>
+          <p:cNvSpPr/>
+          <p:nvPr/>
+        </p:nvSpPr>
+        <p:spPr>
+          <a:xfrm>
+            <a:off x="634901" y="883593"/>
+            <a:ext cx="8102798" cy="769441"/>
+          </a:xfrm>
+          <a:prstGeom prst="rect">
+            <a:avLst/>
+          </a:prstGeom>
+          <a:noFill/>
+          <a:ln/>
+        </p:spPr>
+        <p:txBody>
+          <a:bodyPr wrap="square" lIns="0" tIns="0" rIns="0" bIns="0" rtlCol="0" anchor="t"/>
+          <a:lstStyle/>
+          <a:p>
+            <a:pPr algn="l" marL="342900" indent="-342900">
+              <a:lnSpc>
+                <a:spcPts val="1620"/>
+              </a:lnSpc>
+              <a:spcAft>
+                <a:spcPts val="300"/>
+              </a:spcAft>
+              <a:buSzPct val="100000"/>
+              <a:buChar char="•"/>
+            </a:pPr>
+            <a:r>
+              <a:rPr lang="en-US" sz="1200" dirty="0">
+                <a:solidFill>
+                  <a:srgbClr val="1C2833"/>
+                </a:solidFill>
+                <a:latin typeface="Arial" pitchFamily="34" charset="0"/>
+                <a:ea typeface="Arial" pitchFamily="34" charset="-122"/>
+                <a:cs typeface="Arial" pitchFamily="34" charset="-120"/>
+              </a:rPr>
+              <a:t>Whiteboard, two columns labelled "Use Nikhilam" and "Use long / Ūrdhva."</a:t>
+            </a:r>
+            <a:endParaRPr lang="en-US" sz="1200" dirty="0"/>
+          </a:p>
+          <a:p>
+            <a:pPr algn="l" marL="342900" indent="-342900">
+              <a:lnSpc>
+                <a:spcPts val="1620"/>
+              </a:lnSpc>
+              <a:spcAft>
+                <a:spcPts val="300"/>
+              </a:spcAft>
+              <a:buSzPct val="100000"/>
+              <a:buChar char="•"/>
+            </a:pPr>
+            <a:r>
+              <a:rPr lang="en-US" sz="1200" dirty="0">
+                <a:solidFill>
+                  <a:srgbClr val="1C2833"/>
+                </a:solidFill>
+                <a:latin typeface="Arial" pitchFamily="34" charset="0"/>
+                <a:ea typeface="Arial" pitchFamily="34" charset="-122"/>
+                <a:cs typeface="Arial" pitchFamily="34" charset="-120"/>
+              </a:rPr>
+              <a:t>"Decide-or-don't" card deck — 20 multiplication problems on cards. (Teacher prepares ahead.)</a:t>
+            </a:r>
+            <a:endParaRPr lang="en-US" sz="1200" dirty="0"/>
+          </a:p>
+          <a:p>
+            <a:pPr algn="l" marL="342900" indent="-342900">
+              <a:lnSpc>
+                <a:spcPts val="1620"/>
+              </a:lnSpc>
+              <a:spcAft>
+                <a:spcPts val="300"/>
+              </a:spcAft>
+              <a:buSzPct val="100000"/>
+              <a:buChar char="•"/>
+            </a:pPr>
+            <a:r>
+              <a:rPr lang="en-US" sz="1200" dirty="0">
+                <a:solidFill>
+                  <a:srgbClr val="1C2833"/>
+                </a:solidFill>
+                <a:latin typeface="Arial" pitchFamily="34" charset="0"/>
+                <a:ea typeface="Arial" pitchFamily="34" charset="-122"/>
+                <a:cs typeface="Arial" pitchFamily="34" charset="-120"/>
+              </a:rPr>
+              <a:t>Reflection slip.</a:t>
+            </a:r>
+            <a:endParaRPr lang="en-US" sz="1200" dirty="0"/>
+          </a:p>
+        </p:txBody>
+      </p:sp>
+      <p:sp>
+        <p:nvSpPr>
+          <p:cNvPr id="5" name="Text 3"/>
           <p:cNvSpPr/>
           <p:nvPr/>
         </p:nvSpPr>
@@ -3672,7 +8319,7 @@
                 <a:ea typeface="Georgia" pitchFamily="34" charset="-122"/>
                 <a:cs typeface="Georgia" pitchFamily="34" charset="-120"/>
               </a:rPr>
-              <a:t>Warm-up (5 min)</a:t>
+              <a:t>Lesson flow</a:t>
             </a:r>
             <a:endParaRPr lang="en-US" sz="1800" dirty="0"/>
           </a:p>
@@ -3681,278 +8328,6 @@
       <p:sp>
         <p:nvSpPr>
           <p:cNvPr id="4" name="Text 2"/>
-          <p:cNvSpPr/>
-          <p:nvPr/>
-        </p:nvSpPr>
-        <p:spPr>
-          <a:xfrm>
-            <a:off x="406301" y="870942"/>
-            <a:ext cx="8498026" cy="222796"/>
-          </a:xfrm>
-          <a:prstGeom prst="rect">
-            <a:avLst/>
-          </a:prstGeom>
-          <a:noFill/>
-          <a:ln/>
-        </p:spPr>
-        <p:txBody>
-          <a:bodyPr wrap="square" lIns="0" tIns="0" rIns="0" bIns="0" rtlCol="0" anchor="t"/>
-          <a:lstStyle/>
-          <a:p>
-            <a:pPr algn="l" indent="0" marL="0">
-              <a:lnSpc>
-                <a:spcPts val="1680"/>
-              </a:lnSpc>
-              <a:spcBef>
-                <a:spcPts val="300"/>
-              </a:spcBef>
-              <a:spcAft>
-                <a:spcPts val="300"/>
-              </a:spcAft>
-              <a:buNone/>
-            </a:pPr>
-            <a:r>
-              <a:rPr lang="en-US" sz="1200" dirty="0">
-                <a:solidFill>
-                  <a:srgbClr val="1C2833"/>
-                </a:solidFill>
-                <a:latin typeface="Arial" pitchFamily="34" charset="0"/>
-                <a:ea typeface="Arial" pitchFamily="34" charset="-122"/>
-                <a:cs typeface="Arial" pitchFamily="34" charset="-120"/>
-              </a:rPr>
-              <a:t>– Quick Nikhilam: </a:t>
-            </a:r>
-            <a:pPr algn="l" indent="0" marL="0">
-              <a:lnSpc>
-                <a:spcPts val="1680"/>
-              </a:lnSpc>
-              <a:spcBef>
-                <a:spcPts val="300"/>
-              </a:spcBef>
-              <a:spcAft>
-                <a:spcPts val="300"/>
-              </a:spcAft>
-              <a:buNone/>
-            </a:pPr>
-            <a:r>
-              <a:rPr lang="en-US" sz="1200" dirty="0">
-                <a:solidFill>
-                  <a:srgbClr val="1C2833"/>
-                </a:solidFill>
-                <a:latin typeface="Arial" pitchFamily="34" charset="0"/>
-                <a:ea typeface="Arial" pitchFamily="34" charset="-122"/>
-                <a:cs typeface="Arial" pitchFamily="34" charset="-120"/>
-              </a:rPr>
-              <a:t>97 × 96</a:t>
-            </a:r>
-            <a:pPr algn="l" indent="0" marL="0">
-              <a:lnSpc>
-                <a:spcPts val="1680"/>
-              </a:lnSpc>
-              <a:spcBef>
-                <a:spcPts val="300"/>
-              </a:spcBef>
-              <a:spcAft>
-                <a:spcPts val="300"/>
-              </a:spcAft>
-              <a:buNone/>
-            </a:pPr>
-            <a:r>
-              <a:rPr lang="en-US" sz="1200" dirty="0">
-                <a:solidFill>
-                  <a:srgbClr val="1C2833"/>
-                </a:solidFill>
-                <a:latin typeface="Arial" pitchFamily="34" charset="0"/>
-                <a:ea typeface="Arial" pitchFamily="34" charset="-122"/>
-                <a:cs typeface="Arial" pitchFamily="34" charset="-120"/>
-              </a:rPr>
-              <a:t> (9312), </a:t>
-            </a:r>
-            <a:pPr algn="l" indent="0" marL="0">
-              <a:lnSpc>
-                <a:spcPts val="1680"/>
-              </a:lnSpc>
-              <a:spcBef>
-                <a:spcPts val="300"/>
-              </a:spcBef>
-              <a:spcAft>
-                <a:spcPts val="300"/>
-              </a:spcAft>
-              <a:buNone/>
-            </a:pPr>
-            <a:r>
-              <a:rPr lang="en-US" sz="1200" dirty="0">
-                <a:solidFill>
-                  <a:srgbClr val="1C2833"/>
-                </a:solidFill>
-                <a:latin typeface="Arial" pitchFamily="34" charset="0"/>
-                <a:ea typeface="Arial" pitchFamily="34" charset="-122"/>
-                <a:cs typeface="Arial" pitchFamily="34" charset="-120"/>
-              </a:rPr>
-              <a:t>104 × 103</a:t>
-            </a:r>
-            <a:pPr algn="l" indent="0" marL="0">
-              <a:lnSpc>
-                <a:spcPts val="1680"/>
-              </a:lnSpc>
-              <a:spcBef>
-                <a:spcPts val="300"/>
-              </a:spcBef>
-              <a:spcAft>
-                <a:spcPts val="300"/>
-              </a:spcAft>
-              <a:buNone/>
-            </a:pPr>
-            <a:r>
-              <a:rPr lang="en-US" sz="1200" dirty="0">
-                <a:solidFill>
-                  <a:srgbClr val="1C2833"/>
-                </a:solidFill>
-                <a:latin typeface="Arial" pitchFamily="34" charset="0"/>
-                <a:ea typeface="Arial" pitchFamily="34" charset="-122"/>
-                <a:cs typeface="Arial" pitchFamily="34" charset="-120"/>
-              </a:rPr>
-              <a:t> (10712), </a:t>
-            </a:r>
-            <a:pPr algn="l" indent="0" marL="0">
-              <a:lnSpc>
-                <a:spcPts val="1680"/>
-              </a:lnSpc>
-              <a:spcBef>
-                <a:spcPts val="300"/>
-              </a:spcBef>
-              <a:spcAft>
-                <a:spcPts val="300"/>
-              </a:spcAft>
-              <a:buNone/>
-            </a:pPr>
-            <a:r>
-              <a:rPr lang="en-US" sz="1200" dirty="0">
-                <a:solidFill>
-                  <a:srgbClr val="1C2833"/>
-                </a:solidFill>
-                <a:latin typeface="Arial" pitchFamily="34" charset="0"/>
-                <a:ea typeface="Arial" pitchFamily="34" charset="-122"/>
-                <a:cs typeface="Arial" pitchFamily="34" charset="-120"/>
-              </a:rPr>
-              <a:t>102 × 98</a:t>
-            </a:r>
-            <a:pPr algn="l" indent="0" marL="0">
-              <a:lnSpc>
-                <a:spcPts val="1680"/>
-              </a:lnSpc>
-              <a:spcBef>
-                <a:spcPts val="300"/>
-              </a:spcBef>
-              <a:spcAft>
-                <a:spcPts val="300"/>
-              </a:spcAft>
-              <a:buNone/>
-            </a:pPr>
-            <a:r>
-              <a:rPr lang="en-US" sz="1200" dirty="0">
-                <a:solidFill>
-                  <a:srgbClr val="1C2833"/>
-                </a:solidFill>
-                <a:latin typeface="Arial" pitchFamily="34" charset="0"/>
-                <a:ea typeface="Arial" pitchFamily="34" charset="-122"/>
-                <a:cs typeface="Arial" pitchFamily="34" charset="-120"/>
-              </a:rPr>
-              <a:t> (9996).</a:t>
-            </a:r>
-            <a:endParaRPr lang="en-US" sz="1200" dirty="0"/>
-          </a:p>
-        </p:txBody>
-      </p:sp>
-      <p:sp>
-        <p:nvSpPr>
-          <p:cNvPr id="5" name="Text 3"/>
-          <p:cNvSpPr/>
-          <p:nvPr/>
-        </p:nvSpPr>
-        <p:spPr>
-          <a:xfrm>
-            <a:off x="634901" y="1182588"/>
-            <a:ext cx="8102798" cy="300930"/>
-          </a:xfrm>
-          <a:prstGeom prst="rect">
-            <a:avLst/>
-          </a:prstGeom>
-          <a:noFill/>
-          <a:ln/>
-        </p:spPr>
-        <p:txBody>
-          <a:bodyPr wrap="square" lIns="0" tIns="0" rIns="0" bIns="0" rtlCol="0" anchor="t"/>
-          <a:lstStyle/>
-          <a:p>
-            <a:pPr algn="l" marL="342900" indent="-342900">
-              <a:lnSpc>
-                <a:spcPts val="1620"/>
-              </a:lnSpc>
-              <a:spcAft>
-                <a:spcPts val="300"/>
-              </a:spcAft>
-              <a:buSzPct val="100000"/>
-              <a:buChar char="•"/>
-            </a:pPr>
-            <a:r>
-              <a:rPr lang="en-US" sz="1200" i="1" dirty="0">
-                <a:solidFill>
-                  <a:srgbClr val="1C2833"/>
-                </a:solidFill>
-                <a:latin typeface="Arial" pitchFamily="34" charset="0"/>
-                <a:ea typeface="Arial" pitchFamily="34" charset="-122"/>
-                <a:cs typeface="Arial" pitchFamily="34" charset="-120"/>
-              </a:rPr>
-              <a:t>"Now — would Nikhilam work for </a:t>
-            </a:r>
-            <a:pPr algn="l" indent="0" marL="0">
-              <a:lnSpc>
-                <a:spcPts val="1620"/>
-              </a:lnSpc>
-              <a:spcAft>
-                <a:spcPts val="300"/>
-              </a:spcAft>
-              <a:buNone/>
-            </a:pPr>
-            <a:r>
-              <a:rPr lang="en-US" sz="1200" i="1" dirty="0">
-                <a:solidFill>
-                  <a:srgbClr val="1C2833"/>
-                </a:solidFill>
-                <a:latin typeface="Arial" pitchFamily="34" charset="0"/>
-                <a:ea typeface="Arial" pitchFamily="34" charset="-122"/>
-                <a:cs typeface="Arial" pitchFamily="34" charset="-120"/>
-              </a:rPr>
-              <a:t>47 × 53</a:t>
-            </a:r>
-            <a:pPr algn="l" indent="0" marL="0">
-              <a:lnSpc>
-                <a:spcPts val="1620"/>
-              </a:lnSpc>
-              <a:spcAft>
-                <a:spcPts val="300"/>
-              </a:spcAft>
-              <a:buNone/>
-            </a:pPr>
-            <a:r>
-              <a:rPr lang="en-US" sz="1200" i="1" dirty="0">
-                <a:solidFill>
-                  <a:srgbClr val="1C2833"/>
-                </a:solidFill>
-                <a:latin typeface="Arial" pitchFamily="34" charset="0"/>
-                <a:ea typeface="Arial" pitchFamily="34" charset="-122"/>
-                <a:cs typeface="Arial" pitchFamily="34" charset="-120"/>
-              </a:rPr>
-              <a:t>? Let's see."</a:t>
-            </a:r>
-            <a:endParaRPr lang="en-US" sz="1200" dirty="0"/>
-          </a:p>
-        </p:txBody>
-      </p:sp>
-      <p:sp>
-        <p:nvSpPr>
-          <p:cNvPr id="6" name="Text 4"/>
           <p:cNvSpPr/>
           <p:nvPr/>
         </p:nvSpPr>
@@ -4102,7 +8477,7 @@
                 <a:ea typeface="Georgia" pitchFamily="34" charset="-122"/>
                 <a:cs typeface="Georgia" pitchFamily="34" charset="-120"/>
               </a:rPr>
-              <a:t>Core (15 min) — When it works, when it doesn't</a:t>
+              <a:t>Warm-up (5 min)</a:t>
             </a:r>
             <a:endParaRPr lang="en-US" sz="1800" dirty="0"/>
           </a:p>
@@ -4117,7 +8492,7 @@
         <p:spPr>
           <a:xfrm>
             <a:off x="634901" y="883593"/>
-            <a:ext cx="8102798" cy="281880"/>
+            <a:ext cx="8102798" cy="563761"/>
           </a:xfrm>
           <a:prstGeom prst="rect">
             <a:avLst/>
@@ -4140,15 +8515,15 @@
               <a:buChar char="•"/>
             </a:pPr>
             <a:r>
-              <a:rPr lang="en-US" sz="1200" b="1" dirty="0">
-                <a:solidFill>
-                  <a:srgbClr val="1C2833"/>
-                </a:solidFill>
-                <a:latin typeface="Arial" pitchFamily="34" charset="0"/>
-                <a:ea typeface="Arial" pitchFamily="34" charset="-122"/>
-                <a:cs typeface="Arial" pitchFamily="34" charset="-120"/>
-              </a:rPr>
-              <a:t>The honest claim.</a:t>
+              <a:rPr lang="en-US" sz="1200" dirty="0">
+                <a:solidFill>
+                  <a:srgbClr val="1C2833"/>
+                </a:solidFill>
+                <a:latin typeface="Arial" pitchFamily="34" charset="0"/>
+                <a:ea typeface="Arial" pitchFamily="34" charset="-122"/>
+                <a:cs typeface="Arial" pitchFamily="34" charset="-120"/>
+              </a:rPr>
+              <a:t>Quick Nikhilam: </a:t>
             </a:r>
             <a:pPr algn="l" indent="0" marL="0">
               <a:lnSpc>
@@ -4168,7 +8543,7 @@
                 <a:ea typeface="Arial" pitchFamily="34" charset="-122"/>
                 <a:cs typeface="Arial" pitchFamily="34" charset="-120"/>
               </a:rPr>
-              <a:t> Nikhilam multiplication is fast </a:t>
+              <a:t>97 × 96</a:t>
             </a:r>
             <a:pPr algn="l" indent="0" marL="0">
               <a:lnSpc>
@@ -4180,15 +8555,15 @@
               <a:buNone/>
             </a:pPr>
             <a:r>
-              <a:rPr lang="en-US" sz="1200" i="1" dirty="0">
-                <a:solidFill>
-                  <a:srgbClr val="1C2833"/>
-                </a:solidFill>
-                <a:latin typeface="Arial" pitchFamily="34" charset="0"/>
-                <a:ea typeface="Arial" pitchFamily="34" charset="-122"/>
-                <a:cs typeface="Arial" pitchFamily="34" charset="-120"/>
-              </a:rPr>
-              <a:t>only</a:t>
+              <a:rPr lang="en-US" sz="1200" dirty="0">
+                <a:solidFill>
+                  <a:srgbClr val="1C2833"/>
+                </a:solidFill>
+                <a:latin typeface="Arial" pitchFamily="34" charset="0"/>
+                <a:ea typeface="Arial" pitchFamily="34" charset="-122"/>
+                <a:cs typeface="Arial" pitchFamily="34" charset="-120"/>
+              </a:rPr>
+              <a:t> (9312), </a:t>
             </a:r>
             <a:pPr algn="l" indent="0" marL="0">
               <a:lnSpc>
@@ -4208,32 +8583,70 @@
                 <a:ea typeface="Arial" pitchFamily="34" charset="-122"/>
                 <a:cs typeface="Arial" pitchFamily="34" charset="-120"/>
               </a:rPr>
-              <a:t> when both factors are close to the same power of 10.</a:t>
+              <a:t>104 × 103</a:t>
+            </a:r>
+            <a:pPr algn="l" indent="0" marL="0">
+              <a:lnSpc>
+                <a:spcPts val="1620"/>
+              </a:lnSpc>
+              <a:spcAft>
+                <a:spcPts val="300"/>
+              </a:spcAft>
+              <a:buNone/>
+            </a:pPr>
+            <a:r>
+              <a:rPr lang="en-US" sz="1200" dirty="0">
+                <a:solidFill>
+                  <a:srgbClr val="1C2833"/>
+                </a:solidFill>
+                <a:latin typeface="Arial" pitchFamily="34" charset="0"/>
+                <a:ea typeface="Arial" pitchFamily="34" charset="-122"/>
+                <a:cs typeface="Arial" pitchFamily="34" charset="-120"/>
+              </a:rPr>
+              <a:t> (10712), </a:t>
+            </a:r>
+            <a:pPr algn="l" indent="0" marL="0">
+              <a:lnSpc>
+                <a:spcPts val="1620"/>
+              </a:lnSpc>
+              <a:spcAft>
+                <a:spcPts val="300"/>
+              </a:spcAft>
+              <a:buNone/>
+            </a:pPr>
+            <a:r>
+              <a:rPr lang="en-US" sz="1200" dirty="0">
+                <a:solidFill>
+                  <a:srgbClr val="1C2833"/>
+                </a:solidFill>
+                <a:latin typeface="Arial" pitchFamily="34" charset="0"/>
+                <a:ea typeface="Arial" pitchFamily="34" charset="-122"/>
+                <a:cs typeface="Arial" pitchFamily="34" charset="-120"/>
+              </a:rPr>
+              <a:t>102 × 98</a:t>
+            </a:r>
+            <a:pPr algn="l" indent="0" marL="0">
+              <a:lnSpc>
+                <a:spcPts val="1620"/>
+              </a:lnSpc>
+              <a:spcAft>
+                <a:spcPts val="300"/>
+              </a:spcAft>
+              <a:buNone/>
+            </a:pPr>
+            <a:r>
+              <a:rPr lang="en-US" sz="1200" dirty="0">
+                <a:solidFill>
+                  <a:srgbClr val="1C2833"/>
+                </a:solidFill>
+                <a:latin typeface="Arial" pitchFamily="34" charset="0"/>
+                <a:ea typeface="Arial" pitchFamily="34" charset="-122"/>
+                <a:cs typeface="Arial" pitchFamily="34" charset="-120"/>
+              </a:rPr>
+              <a:t> (9996).</a:t>
             </a:r>
             <a:endParaRPr lang="en-US" sz="1200" dirty="0"/>
           </a:p>
-        </p:txBody>
-      </p:sp>
-      <p:sp>
-        <p:nvSpPr>
-          <p:cNvPr id="5" name="Text 3"/>
-          <p:cNvSpPr/>
-          <p:nvPr/>
-        </p:nvSpPr>
-        <p:spPr>
-          <a:xfrm>
-            <a:off x="634901" y="1266974"/>
-            <a:ext cx="8102798" cy="300930"/>
-          </a:xfrm>
-          <a:prstGeom prst="rect">
-            <a:avLst/>
-          </a:prstGeom>
-          <a:noFill/>
-          <a:ln/>
-        </p:spPr>
-        <p:txBody>
-          <a:bodyPr wrap="square" lIns="0" tIns="0" rIns="0" bIns="0" rtlCol="0" anchor="t"/>
-          <a:lstStyle/>
           <a:p>
             <a:pPr algn="l" marL="342900" indent="-342900">
               <a:lnSpc>
@@ -4246,15 +8659,15 @@
               <a:buChar char="•"/>
             </a:pPr>
             <a:r>
-              <a:rPr lang="en-US" sz="1200" b="1" dirty="0">
-                <a:solidFill>
-                  <a:srgbClr val="1C2833"/>
-                </a:solidFill>
-                <a:latin typeface="Arial" pitchFamily="34" charset="0"/>
-                <a:ea typeface="Arial" pitchFamily="34" charset="-122"/>
-                <a:cs typeface="Arial" pitchFamily="34" charset="-120"/>
-              </a:rPr>
-              <a:t>Try a "bad" example: </a:t>
+              <a:rPr lang="en-US" sz="1200" i="1" dirty="0">
+                <a:solidFill>
+                  <a:srgbClr val="1C2833"/>
+                </a:solidFill>
+                <a:latin typeface="Arial" pitchFamily="34" charset="0"/>
+                <a:ea typeface="Arial" pitchFamily="34" charset="-122"/>
+                <a:cs typeface="Arial" pitchFamily="34" charset="-120"/>
+              </a:rPr>
+              <a:t>"Now — would Nikhilam work for </a:t>
             </a:r>
             <a:pPr algn="l" indent="0" marL="0">
               <a:lnSpc>
@@ -4266,7 +8679,7 @@
               <a:buNone/>
             </a:pPr>
             <a:r>
-              <a:rPr lang="en-US" sz="1200" b="1" dirty="0">
+              <a:rPr lang="en-US" sz="1200" i="1" dirty="0">
                 <a:solidFill>
                   <a:srgbClr val="1C2833"/>
                 </a:solidFill>
@@ -4286,15 +8699,15 @@
               <a:buNone/>
             </a:pPr>
             <a:r>
-              <a:rPr lang="en-US" sz="1200" b="1" dirty="0">
-                <a:solidFill>
-                  <a:srgbClr val="1C2833"/>
-                </a:solidFill>
-                <a:latin typeface="Arial" pitchFamily="34" charset="0"/>
-                <a:ea typeface="Arial" pitchFamily="34" charset="-122"/>
-                <a:cs typeface="Arial" pitchFamily="34" charset="-120"/>
-              </a:rPr>
-              <a:t>:</a:t>
+              <a:rPr lang="en-US" sz="1200" i="1" dirty="0">
+                <a:solidFill>
+                  <a:srgbClr val="1C2833"/>
+                </a:solidFill>
+                <a:latin typeface="Arial" pitchFamily="34" charset="0"/>
+                <a:ea typeface="Arial" pitchFamily="34" charset="-122"/>
+                <a:cs typeface="Arial" pitchFamily="34" charset="-120"/>
+              </a:rPr>
+              <a:t>? Let's see."</a:t>
             </a:r>
             <a:endParaRPr lang="en-US" sz="1200" dirty="0"/>
           </a:p>
@@ -4302,883 +8715,13 @@
       </p:sp>
       <p:sp>
         <p:nvSpPr>
-          <p:cNvPr id="6" name="Text 4"/>
-          <p:cNvSpPr/>
-          <p:nvPr/>
-        </p:nvSpPr>
-        <p:spPr>
-          <a:xfrm>
-            <a:off x="406301" y="1656755"/>
-            <a:ext cx="8498026" cy="853083"/>
-          </a:xfrm>
-          <a:prstGeom prst="rect">
-            <a:avLst/>
-          </a:prstGeom>
-          <a:noFill/>
-          <a:ln/>
-        </p:spPr>
-        <p:txBody>
-          <a:bodyPr wrap="square" lIns="0" tIns="0" rIns="0" bIns="0" rtlCol="0" anchor="t"/>
-          <a:lstStyle/>
-          <a:p>
-            <a:pPr algn="l" indent="0" marL="0">
-              <a:lnSpc>
-                <a:spcPts val="1680"/>
-              </a:lnSpc>
-              <a:spcBef>
-                <a:spcPts val="300"/>
-              </a:spcBef>
-              <a:spcAft>
-                <a:spcPts val="300"/>
-              </a:spcAft>
-              <a:buNone/>
-            </a:pPr>
-            <a:r>
-              <a:rPr lang="en-US" sz="1200" dirty="0">
-                <a:solidFill>
-                  <a:srgbClr val="1C2833"/>
-                </a:solidFill>
-                <a:latin typeface="Arial" pitchFamily="34" charset="0"/>
-                <a:ea typeface="Arial" pitchFamily="34" charset="-122"/>
-                <a:cs typeface="Arial" pitchFamily="34" charset="-120"/>
-              </a:rPr>
-              <a:t>– Base = ? Neither factor is near 10 (too big), near 100 (too far below), or near 50 (a </a:t>
-            </a:r>
-            <a:pPr algn="l" indent="0" marL="0">
-              <a:lnSpc>
-                <a:spcPts val="1680"/>
-              </a:lnSpc>
-              <a:spcBef>
-                <a:spcPts val="300"/>
-              </a:spcBef>
-              <a:spcAft>
-                <a:spcPts val="300"/>
-              </a:spcAft>
-              <a:buNone/>
-            </a:pPr>
-            <a:r>
-              <a:rPr lang="en-US" sz="1200" i="1" dirty="0">
-                <a:solidFill>
-                  <a:srgbClr val="1C2833"/>
-                </a:solidFill>
-                <a:latin typeface="Arial" pitchFamily="34" charset="0"/>
-                <a:ea typeface="Arial" pitchFamily="34" charset="-122"/>
-                <a:cs typeface="Arial" pitchFamily="34" charset="-120"/>
-              </a:rPr>
-              <a:t>sub-base</a:t>
-            </a:r>
-            <a:pPr algn="l" indent="0" marL="0">
-              <a:lnSpc>
-                <a:spcPts val="1680"/>
-              </a:lnSpc>
-              <a:spcBef>
-                <a:spcPts val="300"/>
-              </a:spcBef>
-              <a:spcAft>
-                <a:spcPts val="300"/>
-              </a:spcAft>
-              <a:buNone/>
-            </a:pPr>
-            <a:r>
-              <a:rPr lang="en-US" sz="1200" dirty="0">
-                <a:solidFill>
-                  <a:srgbClr val="1C2833"/>
-                </a:solidFill>
-                <a:latin typeface="Arial" pitchFamily="34" charset="0"/>
-                <a:ea typeface="Arial" pitchFamily="34" charset="-122"/>
-                <a:cs typeface="Arial" pitchFamily="34" charset="-120"/>
-              </a:rPr>
-              <a:t>; advanced). – If you force base 50: deficits +(−3), +3. Left = 47 + 3 = 50. Right = (−3)(+3) = −9. Answer = 50 × 50 − 9 = 2491. ✓ Slow because you have to compute 50 × 50 = 2500 = a </a:t>
-            </a:r>
-            <a:pPr algn="l" indent="0" marL="0">
-              <a:lnSpc>
-                <a:spcPts val="1680"/>
-              </a:lnSpc>
-              <a:spcBef>
-                <a:spcPts val="300"/>
-              </a:spcBef>
-              <a:spcAft>
-                <a:spcPts val="300"/>
-              </a:spcAft>
-              <a:buNone/>
-            </a:pPr>
-            <a:r>
-              <a:rPr lang="en-US" sz="1200" i="1" dirty="0">
-                <a:solidFill>
-                  <a:srgbClr val="1C2833"/>
-                </a:solidFill>
-                <a:latin typeface="Arial" pitchFamily="34" charset="0"/>
-                <a:ea typeface="Arial" pitchFamily="34" charset="-122"/>
-                <a:cs typeface="Arial" pitchFamily="34" charset="-120"/>
-              </a:rPr>
-              <a:t>multiplication</a:t>
-            </a:r>
-            <a:pPr algn="l" indent="0" marL="0">
-              <a:lnSpc>
-                <a:spcPts val="1680"/>
-              </a:lnSpc>
-              <a:spcBef>
-                <a:spcPts val="300"/>
-              </a:spcBef>
-              <a:spcAft>
-                <a:spcPts val="300"/>
-              </a:spcAft>
-              <a:buNone/>
-            </a:pPr>
-            <a:r>
-              <a:rPr lang="en-US" sz="1200" dirty="0">
-                <a:solidFill>
-                  <a:srgbClr val="1C2833"/>
-                </a:solidFill>
-                <a:latin typeface="Arial" pitchFamily="34" charset="0"/>
-                <a:ea typeface="Arial" pitchFamily="34" charset="-122"/>
-                <a:cs typeface="Arial" pitchFamily="34" charset="-120"/>
-              </a:rPr>
-              <a:t>. - </a:t>
-            </a:r>
-            <a:pPr algn="l" indent="0" marL="0">
-              <a:lnSpc>
-                <a:spcPts val="1680"/>
-              </a:lnSpc>
-              <a:spcBef>
-                <a:spcPts val="300"/>
-              </a:spcBef>
-              <a:spcAft>
-                <a:spcPts val="300"/>
-              </a:spcAft>
-              <a:buNone/>
-            </a:pPr>
-            <a:r>
-              <a:rPr lang="en-US" sz="1200" b="1" dirty="0">
-                <a:solidFill>
-                  <a:srgbClr val="1C2833"/>
-                </a:solidFill>
-                <a:latin typeface="Arial" pitchFamily="34" charset="0"/>
-                <a:ea typeface="Arial" pitchFamily="34" charset="-122"/>
-                <a:cs typeface="Arial" pitchFamily="34" charset="-120"/>
-              </a:rPr>
-              <a:t>Sub-bases work</a:t>
-            </a:r>
-            <a:pPr algn="l" indent="0" marL="0">
-              <a:lnSpc>
-                <a:spcPts val="1680"/>
-              </a:lnSpc>
-              <a:spcBef>
-                <a:spcPts val="300"/>
-              </a:spcBef>
-              <a:spcAft>
-                <a:spcPts val="300"/>
-              </a:spcAft>
-              <a:buNone/>
-            </a:pPr>
-            <a:r>
-              <a:rPr lang="en-US" sz="1200" dirty="0">
-                <a:solidFill>
-                  <a:srgbClr val="1C2833"/>
-                </a:solidFill>
-                <a:latin typeface="Arial" pitchFamily="34" charset="0"/>
-                <a:ea typeface="Arial" pitchFamily="34" charset="-122"/>
-                <a:cs typeface="Arial" pitchFamily="34" charset="-120"/>
-              </a:rPr>
-              <a:t> (Day 8 tier-up), but they're not faster than long multiplication for casual users.</a:t>
-            </a:r>
-            <a:endParaRPr lang="en-US" sz="1200" dirty="0"/>
-          </a:p>
-        </p:txBody>
-      </p:sp>
-      <p:sp>
-        <p:nvSpPr>
-          <p:cNvPr id="7" name="Text 5"/>
-          <p:cNvSpPr/>
-          <p:nvPr/>
-        </p:nvSpPr>
-        <p:spPr>
-          <a:xfrm>
-            <a:off x="634901" y="2598688"/>
-            <a:ext cx="8102798" cy="300930"/>
-          </a:xfrm>
-          <a:prstGeom prst="rect">
-            <a:avLst/>
-          </a:prstGeom>
-          <a:noFill/>
-          <a:ln/>
-        </p:spPr>
-        <p:txBody>
-          <a:bodyPr wrap="square" lIns="0" tIns="0" rIns="0" bIns="0" rtlCol="0" anchor="t"/>
-          <a:lstStyle/>
-          <a:p>
-            <a:pPr algn="l" marL="342900" indent="-342900">
-              <a:lnSpc>
-                <a:spcPts val="1620"/>
-              </a:lnSpc>
-              <a:spcAft>
-                <a:spcPts val="300"/>
-              </a:spcAft>
-              <a:buSzPct val="100000"/>
-              <a:buChar char="•"/>
-            </a:pPr>
-            <a:r>
-              <a:rPr lang="en-US" sz="1200" b="1" dirty="0">
-                <a:solidFill>
-                  <a:srgbClr val="1C2833"/>
-                </a:solidFill>
-                <a:latin typeface="Arial" pitchFamily="34" charset="0"/>
-                <a:ea typeface="Arial" pitchFamily="34" charset="-122"/>
-                <a:cs typeface="Arial" pitchFamily="34" charset="-120"/>
-              </a:rPr>
-              <a:t>A genuinely bad case: </a:t>
-            </a:r>
-            <a:pPr algn="l" indent="0" marL="0">
-              <a:lnSpc>
-                <a:spcPts val="1620"/>
-              </a:lnSpc>
-              <a:spcAft>
-                <a:spcPts val="300"/>
-              </a:spcAft>
-              <a:buNone/>
-            </a:pPr>
-            <a:r>
-              <a:rPr lang="en-US" sz="1200" b="1" dirty="0">
-                <a:solidFill>
-                  <a:srgbClr val="1C2833"/>
-                </a:solidFill>
-                <a:latin typeface="Arial" pitchFamily="34" charset="0"/>
-                <a:ea typeface="Arial" pitchFamily="34" charset="-122"/>
-                <a:cs typeface="Arial" pitchFamily="34" charset="-120"/>
-              </a:rPr>
-              <a:t>47 × 89</a:t>
-            </a:r>
-            <a:pPr algn="l" indent="0" marL="0">
-              <a:lnSpc>
-                <a:spcPts val="1620"/>
-              </a:lnSpc>
-              <a:spcAft>
-                <a:spcPts val="300"/>
-              </a:spcAft>
-              <a:buNone/>
-            </a:pPr>
-            <a:r>
-              <a:rPr lang="en-US" sz="1200" b="1" dirty="0">
-                <a:solidFill>
-                  <a:srgbClr val="1C2833"/>
-                </a:solidFill>
-                <a:latin typeface="Arial" pitchFamily="34" charset="0"/>
-                <a:ea typeface="Arial" pitchFamily="34" charset="-122"/>
-                <a:cs typeface="Arial" pitchFamily="34" charset="-120"/>
-              </a:rPr>
-              <a:t>:</a:t>
-            </a:r>
-            <a:endParaRPr lang="en-US" sz="1200" dirty="0"/>
-          </a:p>
-        </p:txBody>
-      </p:sp>
-      <p:sp>
-        <p:nvSpPr>
-          <p:cNvPr id="8" name="Text 6"/>
-          <p:cNvSpPr/>
-          <p:nvPr/>
-        </p:nvSpPr>
-        <p:spPr>
-          <a:xfrm>
-            <a:off x="406301" y="2988469"/>
-            <a:ext cx="8498026" cy="213271"/>
-          </a:xfrm>
-          <a:prstGeom prst="rect">
-            <a:avLst/>
-          </a:prstGeom>
-          <a:noFill/>
-          <a:ln/>
-        </p:spPr>
-        <p:txBody>
-          <a:bodyPr wrap="square" lIns="0" tIns="0" rIns="0" bIns="0" rtlCol="0" anchor="t"/>
-          <a:lstStyle/>
-          <a:p>
-            <a:pPr algn="l" indent="0" marL="0">
-              <a:lnSpc>
-                <a:spcPts val="1680"/>
-              </a:lnSpc>
-              <a:spcBef>
-                <a:spcPts val="300"/>
-              </a:spcBef>
-              <a:spcAft>
-                <a:spcPts val="300"/>
-              </a:spcAft>
-              <a:buNone/>
-            </a:pPr>
-            <a:r>
-              <a:rPr lang="en-US" sz="1200" dirty="0">
-                <a:solidFill>
-                  <a:srgbClr val="1C2833"/>
-                </a:solidFill>
-                <a:latin typeface="Arial" pitchFamily="34" charset="0"/>
-                <a:ea typeface="Arial" pitchFamily="34" charset="-122"/>
-                <a:cs typeface="Arial" pitchFamily="34" charset="-120"/>
-              </a:rPr>
-              <a:t>– Not near any common base. – Use long multiplication. </a:t>
-            </a:r>
-            <a:pPr algn="l" indent="0" marL="0">
-              <a:lnSpc>
-                <a:spcPts val="1680"/>
-              </a:lnSpc>
-              <a:spcBef>
-                <a:spcPts val="300"/>
-              </a:spcBef>
-              <a:spcAft>
-                <a:spcPts val="300"/>
-              </a:spcAft>
-              <a:buNone/>
-            </a:pPr>
-            <a:r>
-              <a:rPr lang="en-US" sz="1200" b="1" dirty="0">
-                <a:solidFill>
-                  <a:srgbClr val="1C2833"/>
-                </a:solidFill>
-                <a:latin typeface="Arial" pitchFamily="34" charset="0"/>
-                <a:ea typeface="Arial" pitchFamily="34" charset="-122"/>
-                <a:cs typeface="Arial" pitchFamily="34" charset="-120"/>
-              </a:rPr>
-              <a:t>It's faster.</a:t>
-            </a:r>
-            <a:endParaRPr lang="en-US" sz="1200" dirty="0"/>
-          </a:p>
-        </p:txBody>
-      </p:sp>
-      <p:sp>
-        <p:nvSpPr>
-          <p:cNvPr id="9" name="Text 7"/>
-          <p:cNvSpPr/>
-          <p:nvPr/>
-        </p:nvSpPr>
-        <p:spPr>
-          <a:xfrm>
-            <a:off x="634901" y="3290590"/>
-            <a:ext cx="8102798" cy="281880"/>
-          </a:xfrm>
-          <a:prstGeom prst="rect">
-            <a:avLst/>
-          </a:prstGeom>
-          <a:noFill/>
-          <a:ln/>
-        </p:spPr>
-        <p:txBody>
-          <a:bodyPr wrap="square" lIns="0" tIns="0" rIns="0" bIns="0" rtlCol="0" anchor="t"/>
-          <a:lstStyle/>
-          <a:p>
-            <a:pPr algn="l" marL="342900" indent="-342900">
-              <a:lnSpc>
-                <a:spcPts val="1620"/>
-              </a:lnSpc>
-              <a:spcAft>
-                <a:spcPts val="300"/>
-              </a:spcAft>
-              <a:buSzPct val="100000"/>
-              <a:buChar char="•"/>
-            </a:pPr>
-            <a:r>
-              <a:rPr lang="en-US" sz="1200" b="1" dirty="0">
-                <a:solidFill>
-                  <a:srgbClr val="1C2833"/>
-                </a:solidFill>
-                <a:latin typeface="Arial" pitchFamily="34" charset="0"/>
-                <a:ea typeface="Arial" pitchFamily="34" charset="-122"/>
-                <a:cs typeface="Arial" pitchFamily="34" charset="-120"/>
-              </a:rPr>
-              <a:t>The decision rule (write on board, boxed):</a:t>
-            </a:r>
-            <a:endParaRPr lang="en-US" sz="1200" dirty="0"/>
-          </a:p>
-        </p:txBody>
-      </p:sp>
-      <p:sp>
-        <p:nvSpPr>
-          <p:cNvPr id="10" name="Text 8"/>
-          <p:cNvSpPr/>
-          <p:nvPr/>
-        </p:nvSpPr>
-        <p:spPr>
-          <a:xfrm>
-            <a:off x="406301" y="3661321"/>
-            <a:ext cx="8498026" cy="853083"/>
-          </a:xfrm>
-          <a:prstGeom prst="rect">
-            <a:avLst/>
-          </a:prstGeom>
-          <a:noFill/>
-          <a:ln/>
-        </p:spPr>
-        <p:txBody>
-          <a:bodyPr wrap="square" lIns="0" tIns="0" rIns="0" bIns="0" rtlCol="0" anchor="t"/>
-          <a:lstStyle/>
-          <a:p>
-            <a:pPr algn="l" indent="0" marL="0">
-              <a:lnSpc>
-                <a:spcPts val="1680"/>
-              </a:lnSpc>
-              <a:spcBef>
-                <a:spcPts val="300"/>
-              </a:spcBef>
-              <a:spcAft>
-                <a:spcPts val="300"/>
-              </a:spcAft>
-              <a:buNone/>
-            </a:pPr>
-            <a:r>
-              <a:rPr lang="en-US" sz="1200" dirty="0">
-                <a:solidFill>
-                  <a:srgbClr val="1C2833"/>
-                </a:solidFill>
-                <a:latin typeface="Arial" pitchFamily="34" charset="0"/>
-                <a:ea typeface="Arial" pitchFamily="34" charset="-122"/>
-                <a:cs typeface="Arial" pitchFamily="34" charset="-120"/>
-              </a:rPr>
-              <a:t>&gt; </a:t>
-            </a:r>
-            <a:pPr algn="l" indent="0" marL="0">
-              <a:lnSpc>
-                <a:spcPts val="1680"/>
-              </a:lnSpc>
-              <a:spcBef>
-                <a:spcPts val="300"/>
-              </a:spcBef>
-              <a:spcAft>
-                <a:spcPts val="300"/>
-              </a:spcAft>
-              <a:buNone/>
-            </a:pPr>
-            <a:r>
-              <a:rPr lang="en-US" sz="1200" b="1" dirty="0">
-                <a:solidFill>
-                  <a:srgbClr val="1C2833"/>
-                </a:solidFill>
-                <a:latin typeface="Arial" pitchFamily="34" charset="0"/>
-                <a:ea typeface="Arial" pitchFamily="34" charset="-122"/>
-                <a:cs typeface="Arial" pitchFamily="34" charset="-120"/>
-              </a:rPr>
-              <a:t>Use Nikhilam when:</a:t>
-            </a:r>
-            <a:pPr algn="l" indent="0" marL="0">
-              <a:lnSpc>
-                <a:spcPts val="1680"/>
-              </a:lnSpc>
-              <a:spcBef>
-                <a:spcPts val="300"/>
-              </a:spcBef>
-              <a:spcAft>
-                <a:spcPts val="300"/>
-              </a:spcAft>
-              <a:buNone/>
-            </a:pPr>
-            <a:r>
-              <a:rPr lang="en-US" sz="1200" dirty="0">
-                <a:solidFill>
-                  <a:srgbClr val="1C2833"/>
-                </a:solidFill>
-                <a:latin typeface="Arial" pitchFamily="34" charset="0"/>
-                <a:ea typeface="Arial" pitchFamily="34" charset="-122"/>
-                <a:cs typeface="Arial" pitchFamily="34" charset="-120"/>
-              </a:rPr>
-              <a:t> &gt; - Both factors are within ~5 of a power of 10 (10, 100, 1000): trivially fast. &gt; - Both within ~10–15 of a power of 10: still faster than long multiplication for most students. &gt; &gt; *</a:t>
-            </a:r>
-            <a:pPr algn="l" indent="0" marL="0">
-              <a:lnSpc>
-                <a:spcPts val="1680"/>
-              </a:lnSpc>
-              <a:spcBef>
-                <a:spcPts val="300"/>
-              </a:spcBef>
-              <a:spcAft>
-                <a:spcPts val="300"/>
-              </a:spcAft>
-              <a:buNone/>
-            </a:pPr>
-            <a:r>
-              <a:rPr lang="en-US" sz="1200" i="1" dirty="0">
-                <a:solidFill>
-                  <a:srgbClr val="1C2833"/>
-                </a:solidFill>
-                <a:latin typeface="Arial" pitchFamily="34" charset="0"/>
-                <a:ea typeface="Arial" pitchFamily="34" charset="-122"/>
-                <a:cs typeface="Arial" pitchFamily="34" charset="-120"/>
-              </a:rPr>
-              <a:t>Use long multiplication (or</a:t>
-            </a:r>
-            <a:pPr algn="l" indent="0" marL="0">
-              <a:lnSpc>
-                <a:spcPts val="1680"/>
-              </a:lnSpc>
-              <a:spcBef>
-                <a:spcPts val="300"/>
-              </a:spcBef>
-              <a:spcAft>
-                <a:spcPts val="300"/>
-              </a:spcAft>
-              <a:buNone/>
-            </a:pPr>
-            <a:r>
-              <a:rPr lang="en-US" sz="1200" dirty="0">
-                <a:solidFill>
-                  <a:srgbClr val="1C2833"/>
-                </a:solidFill>
-                <a:latin typeface="Arial" pitchFamily="34" charset="0"/>
-                <a:ea typeface="Arial" pitchFamily="34" charset="-122"/>
-                <a:cs typeface="Arial" pitchFamily="34" charset="-120"/>
-              </a:rPr>
-              <a:t>Ūrdhva</a:t>
-            </a:r>
-            <a:pPr algn="l" indent="0" marL="0">
-              <a:lnSpc>
-                <a:spcPts val="1680"/>
-              </a:lnSpc>
-              <a:spcBef>
-                <a:spcPts val="300"/>
-              </a:spcBef>
-              <a:spcAft>
-                <a:spcPts val="300"/>
-              </a:spcAft>
-              <a:buNone/>
-            </a:pPr>
-            <a:r>
-              <a:rPr lang="en-US" sz="1200" i="1" dirty="0">
-                <a:solidFill>
-                  <a:srgbClr val="1C2833"/>
-                </a:solidFill>
-                <a:latin typeface="Arial" pitchFamily="34" charset="0"/>
-                <a:ea typeface="Arial" pitchFamily="34" charset="-122"/>
-                <a:cs typeface="Arial" pitchFamily="34" charset="-120"/>
-              </a:rPr>
-              <a:t>) when:</a:t>
-            </a:r>
-            <a:pPr algn="l" indent="0" marL="0">
-              <a:lnSpc>
-                <a:spcPts val="1680"/>
-              </a:lnSpc>
-              <a:spcBef>
-                <a:spcPts val="300"/>
-              </a:spcBef>
-              <a:spcAft>
-                <a:spcPts val="300"/>
-              </a:spcAft>
-              <a:buNone/>
-            </a:pPr>
-            <a:r>
-              <a:rPr lang="en-US" sz="1200" dirty="0">
-                <a:solidFill>
-                  <a:srgbClr val="1C2833"/>
-                </a:solidFill>
-                <a:latin typeface="Arial" pitchFamily="34" charset="0"/>
-                <a:ea typeface="Arial" pitchFamily="34" charset="-122"/>
-                <a:cs typeface="Arial" pitchFamily="34" charset="-120"/>
-              </a:rPr>
-              <a:t>* &gt; - One factor is "random" (not near a base). &gt; - The factors are near different bases. &gt; - Speed doesn't matter (writing out long multiplication is more error-resistant).</a:t>
-            </a:r>
-            <a:endParaRPr lang="en-US" sz="1200" dirty="0"/>
-          </a:p>
-        </p:txBody>
-      </p:sp>
-      <p:sp>
-        <p:nvSpPr>
-          <p:cNvPr id="11" name="Text 9"/>
-          <p:cNvSpPr/>
-          <p:nvPr/>
-        </p:nvSpPr>
-        <p:spPr>
-          <a:xfrm>
-            <a:off x="634901" y="4603254"/>
-            <a:ext cx="8102798" cy="281880"/>
-          </a:xfrm>
-          <a:prstGeom prst="rect">
-            <a:avLst/>
-          </a:prstGeom>
-          <a:noFill/>
-          <a:ln/>
-        </p:spPr>
-        <p:txBody>
-          <a:bodyPr wrap="square" lIns="0" tIns="0" rIns="0" bIns="0" rtlCol="0" anchor="t"/>
-          <a:lstStyle/>
-          <a:p>
-            <a:pPr algn="l" marL="342900" indent="-342900">
-              <a:lnSpc>
-                <a:spcPts val="1620"/>
-              </a:lnSpc>
-              <a:spcAft>
-                <a:spcPts val="300"/>
-              </a:spcAft>
-              <a:buSzPct val="100000"/>
-              <a:buChar char="•"/>
-            </a:pPr>
-            <a:r>
-              <a:rPr lang="en-US" sz="1200" b="1" dirty="0">
-                <a:solidFill>
-                  <a:srgbClr val="1C2833"/>
-                </a:solidFill>
-                <a:latin typeface="Arial" pitchFamily="34" charset="0"/>
-                <a:ea typeface="Arial" pitchFamily="34" charset="-122"/>
-                <a:cs typeface="Arial" pitchFamily="34" charset="-120"/>
-              </a:rPr>
-              <a:t>The contrast with Module 7 (×11) and Module 9 (subtraction).</a:t>
-            </a:r>
-            <a:endParaRPr lang="en-US" sz="1200" dirty="0"/>
-          </a:p>
-        </p:txBody>
-      </p:sp>
-      <p:sp>
-        <p:nvSpPr>
-          <p:cNvPr id="12" name="Text 10"/>
-          <p:cNvSpPr/>
-          <p:nvPr/>
-        </p:nvSpPr>
-        <p:spPr>
-          <a:xfrm>
-            <a:off x="406301" y="4973985"/>
-            <a:ext cx="8498026" cy="639812"/>
-          </a:xfrm>
-          <a:prstGeom prst="rect">
-            <a:avLst/>
-          </a:prstGeom>
-          <a:noFill/>
-          <a:ln/>
-        </p:spPr>
-        <p:txBody>
-          <a:bodyPr wrap="square" lIns="0" tIns="0" rIns="0" bIns="0" rtlCol="0" anchor="t"/>
-          <a:lstStyle/>
-          <a:p>
-            <a:pPr algn="l" indent="0" marL="0">
-              <a:lnSpc>
-                <a:spcPts val="1680"/>
-              </a:lnSpc>
-              <a:spcBef>
-                <a:spcPts val="300"/>
-              </a:spcBef>
-              <a:spcAft>
-                <a:spcPts val="300"/>
-              </a:spcAft>
-              <a:buNone/>
-            </a:pPr>
-            <a:r>
-              <a:rPr lang="en-US" sz="1200" dirty="0">
-                <a:solidFill>
-                  <a:srgbClr val="1C2833"/>
-                </a:solidFill>
-                <a:latin typeface="Arial" pitchFamily="34" charset="0"/>
-                <a:ea typeface="Arial" pitchFamily="34" charset="-122"/>
-                <a:cs typeface="Arial" pitchFamily="34" charset="-120"/>
-              </a:rPr>
-              <a:t>– Module 7's ×11 trick works </a:t>
-            </a:r>
-            <a:pPr algn="l" indent="0" marL="0">
-              <a:lnSpc>
-                <a:spcPts val="1680"/>
-              </a:lnSpc>
-              <a:spcBef>
-                <a:spcPts val="300"/>
-              </a:spcBef>
-              <a:spcAft>
-                <a:spcPts val="300"/>
-              </a:spcAft>
-              <a:buNone/>
-            </a:pPr>
-            <a:r>
-              <a:rPr lang="en-US" sz="1200" i="1" dirty="0">
-                <a:solidFill>
-                  <a:srgbClr val="1C2833"/>
-                </a:solidFill>
-                <a:latin typeface="Arial" pitchFamily="34" charset="0"/>
-                <a:ea typeface="Arial" pitchFamily="34" charset="-122"/>
-                <a:cs typeface="Arial" pitchFamily="34" charset="-120"/>
-              </a:rPr>
-              <a:t>always</a:t>
-            </a:r>
-            <a:pPr algn="l" indent="0" marL="0">
-              <a:lnSpc>
-                <a:spcPts val="1680"/>
-              </a:lnSpc>
-              <a:spcBef>
-                <a:spcPts val="300"/>
-              </a:spcBef>
-              <a:spcAft>
-                <a:spcPts val="300"/>
-              </a:spcAft>
-              <a:buNone/>
-            </a:pPr>
-            <a:r>
-              <a:rPr lang="en-US" sz="1200" dirty="0">
-                <a:solidFill>
-                  <a:srgbClr val="1C2833"/>
-                </a:solidFill>
-                <a:latin typeface="Arial" pitchFamily="34" charset="0"/>
-                <a:ea typeface="Arial" pitchFamily="34" charset="-122"/>
-                <a:cs typeface="Arial" pitchFamily="34" charset="-120"/>
-              </a:rPr>
-              <a:t> when one factor is 11. It's a different niche. – Module 9's subtraction-by-complement (Nikhilam again) works when subtracting from a power of 10. – Nikhilam multiplication is just one shortcut in a toolkit. Long multiplication remains the workhorse.</a:t>
-            </a:r>
-            <a:endParaRPr lang="en-US" sz="1200" dirty="0"/>
-          </a:p>
-        </p:txBody>
-      </p:sp>
-      <p:sp>
-        <p:nvSpPr>
-          <p:cNvPr id="13" name="Text 11"/>
-          <p:cNvSpPr/>
-          <p:nvPr/>
-        </p:nvSpPr>
-        <p:spPr>
-          <a:xfrm>
-            <a:off x="634901" y="5702647"/>
-            <a:ext cx="8102798" cy="693241"/>
-          </a:xfrm>
-          <a:prstGeom prst="rect">
-            <a:avLst/>
-          </a:prstGeom>
-          <a:noFill/>
-          <a:ln/>
-        </p:spPr>
-        <p:txBody>
-          <a:bodyPr wrap="square" lIns="0" tIns="0" rIns="0" bIns="0" rtlCol="0" anchor="t"/>
-          <a:lstStyle/>
-          <a:p>
-            <a:pPr algn="l" marL="342900" indent="-342900">
-              <a:lnSpc>
-                <a:spcPts val="1620"/>
-              </a:lnSpc>
-              <a:spcAft>
-                <a:spcPts val="300"/>
-              </a:spcAft>
-              <a:buSzPct val="100000"/>
-              <a:buChar char="•"/>
-            </a:pPr>
-            <a:pPr algn="l" indent="0" marL="0">
-              <a:lnSpc>
-                <a:spcPts val="1620"/>
-              </a:lnSpc>
-              <a:spcAft>
-                <a:spcPts val="300"/>
-              </a:spcAft>
-              <a:buNone/>
-            </a:pPr>
-            <a:r>
-              <a:rPr lang="en-US" sz="1200" i="1" dirty="0">
-                <a:solidFill>
-                  <a:srgbClr val="1C2833"/>
-                </a:solidFill>
-                <a:latin typeface="Arial" pitchFamily="34" charset="0"/>
-                <a:ea typeface="Arial" pitchFamily="34" charset="-122"/>
-                <a:cs typeface="Arial" pitchFamily="34" charset="-120"/>
-              </a:rPr>
-              <a:t>The other Tirthaji sūtra mentioned today:</a:t>
-            </a:r>
-            <a:pPr algn="l" indent="0" marL="0">
-              <a:lnSpc>
-                <a:spcPts val="1620"/>
-              </a:lnSpc>
-              <a:spcAft>
-                <a:spcPts val="300"/>
-              </a:spcAft>
-              <a:buNone/>
-            </a:pPr>
-            <a:r>
-              <a:rPr lang="en-US" sz="1200" dirty="0">
-                <a:solidFill>
-                  <a:srgbClr val="1C2833"/>
-                </a:solidFill>
-                <a:latin typeface="Arial" pitchFamily="34" charset="0"/>
-                <a:ea typeface="Arial" pitchFamily="34" charset="-122"/>
-                <a:cs typeface="Arial" pitchFamily="34" charset="-120"/>
-              </a:rPr>
-              <a:t>Ūrdhva-tiryagbhyāṁ</a:t>
-            </a:r>
-            <a:pPr algn="l" indent="0" marL="0">
-              <a:lnSpc>
-                <a:spcPts val="1620"/>
-              </a:lnSpc>
-              <a:spcAft>
-                <a:spcPts val="300"/>
-              </a:spcAft>
-              <a:buNone/>
-            </a:pPr>
-            <a:r>
-              <a:rPr lang="en-US" sz="1200" b="1" i="1" dirty="0">
-                <a:solidFill>
-                  <a:srgbClr val="1C2833"/>
-                </a:solidFill>
-                <a:latin typeface="Arial" pitchFamily="34" charset="0"/>
-                <a:ea typeface="Arial" pitchFamily="34" charset="-122"/>
-                <a:cs typeface="Arial" pitchFamily="34" charset="-120"/>
-              </a:rPr>
-              <a:t> ("vertically and crosswise") is Tirthaji's sūtra #3 — the</a:t>
-            </a:r>
-            <a:pPr algn="l" indent="0" marL="0">
-              <a:lnSpc>
-                <a:spcPts val="1620"/>
-              </a:lnSpc>
-              <a:spcAft>
-                <a:spcPts val="300"/>
-              </a:spcAft>
-              <a:buNone/>
-            </a:pPr>
-            <a:r>
-              <a:rPr lang="en-US" sz="1200" i="1" dirty="0">
-                <a:solidFill>
-                  <a:srgbClr val="1C2833"/>
-                </a:solidFill>
-                <a:latin typeface="Arial" pitchFamily="34" charset="0"/>
-                <a:ea typeface="Arial" pitchFamily="34" charset="-122"/>
-                <a:cs typeface="Arial" pitchFamily="34" charset="-120"/>
-              </a:rPr>
-              <a:t>general</a:t>
-            </a:r>
-            <a:pPr algn="l" indent="0" marL="0">
-              <a:lnSpc>
-                <a:spcPts val="1620"/>
-              </a:lnSpc>
-              <a:spcAft>
-                <a:spcPts val="300"/>
-              </a:spcAft>
-              <a:buNone/>
-            </a:pPr>
-            <a:r>
-              <a:rPr lang="en-US" sz="1200" i="1" dirty="0">
-                <a:solidFill>
-                  <a:srgbClr val="1C2833"/>
-                </a:solidFill>
-                <a:latin typeface="Arial" pitchFamily="34" charset="0"/>
-                <a:ea typeface="Arial" pitchFamily="34" charset="-122"/>
-                <a:cs typeface="Arial" pitchFamily="34" charset="-120"/>
-              </a:rPr>
-              <a:t> multiplication procedure. It works for any pair of numbers. We won't drill it in this module; it's a topic of its own. Just notice:</a:t>
-            </a:r>
-            <a:pPr algn="l" indent="0" marL="0">
-              <a:lnSpc>
-                <a:spcPts val="1620"/>
-              </a:lnSpc>
-              <a:spcAft>
-                <a:spcPts val="300"/>
-              </a:spcAft>
-              <a:buNone/>
-            </a:pPr>
-            <a:r>
-              <a:rPr lang="en-US" sz="1200" dirty="0">
-                <a:solidFill>
-                  <a:srgbClr val="1C2833"/>
-                </a:solidFill>
-                <a:latin typeface="Arial" pitchFamily="34" charset="0"/>
-                <a:ea typeface="Arial" pitchFamily="34" charset="-122"/>
-                <a:cs typeface="Arial" pitchFamily="34" charset="-120"/>
-              </a:rPr>
-              <a:t>Ūrdhva* covers what Nikhilam can't.</a:t>
-            </a:r>
-            <a:endParaRPr lang="en-US" sz="1200" dirty="0"/>
-          </a:p>
-        </p:txBody>
-      </p:sp>
-      <p:sp>
-        <p:nvSpPr>
-          <p:cNvPr id="14" name="Text 12"/>
-          <p:cNvSpPr/>
-          <p:nvPr/>
-        </p:nvSpPr>
-        <p:spPr>
-          <a:xfrm>
-            <a:off x="406301" y="6560939"/>
+          <p:cNvPr id="5" name="Text 3"/>
+          <p:cNvSpPr/>
+          <p:nvPr/>
+        </p:nvSpPr>
+        <p:spPr>
+          <a:xfrm>
+            <a:off x="406301" y="4434929"/>
             <a:ext cx="8498026" cy="213271"/>
           </a:xfrm>
           <a:prstGeom prst="rect">
@@ -5322,7 +8865,7 @@
                 <a:ea typeface="Georgia" pitchFamily="34" charset="-122"/>
                 <a:cs typeface="Georgia" pitchFamily="34" charset="-120"/>
               </a:rPr>
-              <a:t>Activity (20 min) — "Decide-or-don't" game</a:t>
+              <a:t>Core (15 min) — When it works, when it doesn't</a:t>
             </a:r>
             <a:endParaRPr lang="en-US" sz="1800" dirty="0"/>
           </a:p>
@@ -5336,8 +8879,8 @@
         </p:nvSpPr>
         <p:spPr>
           <a:xfrm>
-            <a:off x="406301" y="870942"/>
-            <a:ext cx="8498026" cy="853083"/>
+            <a:off x="634901" y="883593"/>
+            <a:ext cx="8102798" cy="281880"/>
           </a:xfrm>
           <a:prstGeom prst="rect">
             <a:avLst/>
@@ -5349,13 +8892,31 @@
           <a:bodyPr wrap="square" lIns="0" tIns="0" rIns="0" bIns="0" rtlCol="0" anchor="t"/>
           <a:lstStyle/>
           <a:p>
-            <a:pPr algn="l" indent="0" marL="0">
-              <a:lnSpc>
-                <a:spcPts val="1680"/>
-              </a:lnSpc>
-              <a:spcBef>
-                <a:spcPts val="300"/>
-              </a:spcBef>
+            <a:pPr algn="l" marL="342900" indent="-342900">
+              <a:lnSpc>
+                <a:spcPts val="1620"/>
+              </a:lnSpc>
+              <a:spcAft>
+                <a:spcPts val="300"/>
+              </a:spcAft>
+              <a:buSzPct val="100000"/>
+              <a:buChar char="•"/>
+            </a:pPr>
+            <a:r>
+              <a:rPr lang="en-US" sz="1200" b="1" dirty="0">
+                <a:solidFill>
+                  <a:srgbClr val="1C2833"/>
+                </a:solidFill>
+                <a:latin typeface="Arial" pitchFamily="34" charset="0"/>
+                <a:ea typeface="Arial" pitchFamily="34" charset="-122"/>
+                <a:cs typeface="Arial" pitchFamily="34" charset="-120"/>
+              </a:rPr>
+              <a:t>The honest claim.</a:t>
+            </a:r>
+            <a:pPr algn="l" indent="0" marL="0">
+              <a:lnSpc>
+                <a:spcPts val="1620"/>
+              </a:lnSpc>
               <a:spcAft>
                 <a:spcPts val="300"/>
               </a:spcAft>
@@ -5370,38 +8931,32 @@
                 <a:ea typeface="Arial" pitchFamily="34" charset="-122"/>
                 <a:cs typeface="Arial" pitchFamily="34" charset="-120"/>
               </a:rPr>
-              <a:t>Rules: – Pairs receive a deck of 20 cards. Each card has one multiplication problem. – For each card, the pair must </a:t>
-            </a:r>
-            <a:pPr algn="l" indent="0" marL="0">
-              <a:lnSpc>
-                <a:spcPts val="1680"/>
-              </a:lnSpc>
-              <a:spcBef>
-                <a:spcPts val="300"/>
-              </a:spcBef>
-              <a:spcAft>
-                <a:spcPts val="300"/>
-              </a:spcAft>
-              <a:buNone/>
-            </a:pPr>
-            <a:r>
-              <a:rPr lang="en-US" sz="1200" b="1" dirty="0">
-                <a:solidFill>
-                  <a:srgbClr val="1C2833"/>
-                </a:solidFill>
-                <a:latin typeface="Arial" pitchFamily="34" charset="0"/>
-                <a:ea typeface="Arial" pitchFamily="34" charset="-122"/>
-                <a:cs typeface="Arial" pitchFamily="34" charset="-120"/>
-              </a:rPr>
-              <a:t>first decide</a:t>
-            </a:r>
-            <a:pPr algn="l" indent="0" marL="0">
-              <a:lnSpc>
-                <a:spcPts val="1680"/>
-              </a:lnSpc>
-              <a:spcBef>
-                <a:spcPts val="300"/>
-              </a:spcBef>
+              <a:t> Nikhilam multiplication is fast </a:t>
+            </a:r>
+            <a:pPr algn="l" indent="0" marL="0">
+              <a:lnSpc>
+                <a:spcPts val="1620"/>
+              </a:lnSpc>
+              <a:spcAft>
+                <a:spcPts val="300"/>
+              </a:spcAft>
+              <a:buNone/>
+            </a:pPr>
+            <a:r>
+              <a:rPr lang="en-US" sz="1200" i="1" dirty="0">
+                <a:solidFill>
+                  <a:srgbClr val="1C2833"/>
+                </a:solidFill>
+                <a:latin typeface="Arial" pitchFamily="34" charset="0"/>
+                <a:ea typeface="Arial" pitchFamily="34" charset="-122"/>
+                <a:cs typeface="Arial" pitchFamily="34" charset="-120"/>
+              </a:rPr>
+              <a:t>only</a:t>
+            </a:r>
+            <a:pPr algn="l" indent="0" marL="0">
+              <a:lnSpc>
+                <a:spcPts val="1620"/>
+              </a:lnSpc>
               <a:spcAft>
                 <a:spcPts val="300"/>
               </a:spcAft>
@@ -5416,7 +8971,7 @@
                 <a:ea typeface="Arial" pitchFamily="34" charset="-122"/>
                 <a:cs typeface="Arial" pitchFamily="34" charset="-120"/>
               </a:rPr>
-              <a:t> in 5 seconds: Nikhilam or long? – Then they solve it. – If they used Nikhilam and the method actually applies: full marks. – If they used long multiplication and Nikhilam would have been visibly faster: half marks. – If they used Nikhilam where it wasn't suitable and got stuck: zero marks (but learning is the lesson).</a:t>
+              <a:t> when both factors are close to the same power of 10.</a:t>
             </a:r>
             <a:endParaRPr lang="en-US" sz="1200" dirty="0"/>
           </a:p>
@@ -5430,996 +8985,7 @@
         </p:nvSpPr>
         <p:spPr>
           <a:xfrm>
-            <a:off x="406301" y="1800225"/>
-            <a:ext cx="8498026" cy="213271"/>
-          </a:xfrm>
-          <a:prstGeom prst="rect">
-            <a:avLst/>
-          </a:prstGeom>
-          <a:noFill/>
-          <a:ln/>
-        </p:spPr>
-        <p:txBody>
-          <a:bodyPr wrap="square" lIns="0" tIns="0" rIns="0" bIns="0" rtlCol="0" anchor="t"/>
-          <a:lstStyle/>
-          <a:p>
-            <a:pPr algn="l" indent="0" marL="0">
-              <a:lnSpc>
-                <a:spcPts val="1680"/>
-              </a:lnSpc>
-              <a:spcBef>
-                <a:spcPts val="300"/>
-              </a:spcBef>
-              <a:spcAft>
-                <a:spcPts val="300"/>
-              </a:spcAft>
-              <a:buNone/>
-            </a:pPr>
-            <a:r>
-              <a:rPr lang="en-US" sz="1200" dirty="0">
-                <a:solidFill>
-                  <a:srgbClr val="1C2833"/>
-                </a:solidFill>
-                <a:latin typeface="Arial" pitchFamily="34" charset="0"/>
-                <a:ea typeface="Arial" pitchFamily="34" charset="-122"/>
-                <a:cs typeface="Arial" pitchFamily="34" charset="-120"/>
-              </a:rPr>
-              <a:t>Sample cards:</a:t>
-            </a:r>
-            <a:endParaRPr lang="en-US" sz="1200" dirty="0"/>
-          </a:p>
-        </p:txBody>
-      </p:sp>
-      <p:sp>
-        <p:nvSpPr>
-          <p:cNvPr id="6" name="Text 4"/>
-          <p:cNvSpPr/>
-          <p:nvPr/>
-        </p:nvSpPr>
-        <p:spPr>
-          <a:xfrm>
-            <a:off x="406301" y="2102346"/>
-            <a:ext cx="8331398" cy="3745409"/>
-          </a:xfrm>
-          <a:prstGeom prst="rect">
-            <a:avLst/>
-          </a:prstGeom>
-          <a:solidFill>
-            <a:srgbClr val="F4F8F9"/>
-          </a:solidFill>
-          <a:ln/>
-        </p:spPr>
-        <p:txBody>
-          <a:bodyPr wrap="square" rtlCol="0" anchor="ctr"/>
-          <a:lstStyle/>
-          <a:p>
-            <a:pPr indent="0" marL="0">
-              <a:buNone/>
-            </a:pPr>
-            <a:endParaRPr lang="en-US" dirty="0"/>
-          </a:p>
-        </p:txBody>
-      </p:sp>
-      <p:sp>
-        <p:nvSpPr>
-          <p:cNvPr id="7" name="Shape 5"/>
-          <p:cNvSpPr/>
-          <p:nvPr/>
-        </p:nvSpPr>
-        <p:spPr>
-          <a:xfrm>
-            <a:off x="430113" y="2102346"/>
-            <a:ext cx="0" cy="3745409"/>
-          </a:xfrm>
-          <a:prstGeom prst="line">
-            <a:avLst/>
-          </a:prstGeom>
-          <a:noFill/>
-          <a:ln w="47625">
-            <a:solidFill>
-              <a:srgbClr val="277884"/>
-            </a:solidFill>
-            <a:prstDash val="solid"/>
-          </a:ln>
-        </p:spPr>
-      </p:sp>
-      <p:sp>
-        <p:nvSpPr>
-          <p:cNvPr id="8" name="Text 6"/>
-          <p:cNvSpPr/>
-          <p:nvPr/>
-        </p:nvSpPr>
-        <p:spPr>
-          <a:xfrm>
-            <a:off x="631627" y="2229296"/>
-            <a:ext cx="8086939" cy="174575"/>
-          </a:xfrm>
-          <a:prstGeom prst="rect">
-            <a:avLst/>
-          </a:prstGeom>
-          <a:noFill/>
-          <a:ln/>
-        </p:spPr>
-        <p:txBody>
-          <a:bodyPr wrap="square" lIns="0" tIns="0" rIns="0" bIns="0" rtlCol="0" anchor="t"/>
-          <a:lstStyle/>
-          <a:p>
-            <a:pPr algn="l" indent="0" marL="0">
-              <a:lnSpc>
-                <a:spcPts val="1375"/>
-              </a:lnSpc>
-              <a:buNone/>
-            </a:pPr>
-            <a:r>
-              <a:rPr lang="en-US" sz="1100" dirty="0">
-                <a:solidFill>
-                  <a:srgbClr val="1C2833"/>
-                </a:solidFill>
-                <a:latin typeface="Courier New" pitchFamily="34" charset="0"/>
-                <a:ea typeface="Courier New" pitchFamily="34" charset="-122"/>
-                <a:cs typeface="Courier New" pitchFamily="34" charset="-120"/>
-              </a:rPr>
-              <a:t>97 × 96      → Nikhilam (both near 100)</a:t>
-            </a:r>
-            <a:endParaRPr lang="en-US" sz="1100" dirty="0"/>
-          </a:p>
-        </p:txBody>
-      </p:sp>
-      <p:sp>
-        <p:nvSpPr>
-          <p:cNvPr id="9" name="Text 7"/>
-          <p:cNvSpPr/>
-          <p:nvPr/>
-        </p:nvSpPr>
-        <p:spPr>
-          <a:xfrm>
-            <a:off x="631627" y="2403872"/>
-            <a:ext cx="8086939" cy="174575"/>
-          </a:xfrm>
-          <a:prstGeom prst="rect">
-            <a:avLst/>
-          </a:prstGeom>
-          <a:noFill/>
-          <a:ln/>
-        </p:spPr>
-        <p:txBody>
-          <a:bodyPr wrap="square" lIns="0" tIns="0" rIns="0" bIns="0" rtlCol="0" anchor="t"/>
-          <a:lstStyle/>
-          <a:p>
-            <a:pPr algn="l" indent="0" marL="0">
-              <a:lnSpc>
-                <a:spcPts val="1375"/>
-              </a:lnSpc>
-              <a:buNone/>
-            </a:pPr>
-            <a:r>
-              <a:rPr lang="en-US" sz="1100" dirty="0">
-                <a:solidFill>
-                  <a:srgbClr val="1C2833"/>
-                </a:solidFill>
-                <a:latin typeface="Courier New" pitchFamily="34" charset="0"/>
-                <a:ea typeface="Courier New" pitchFamily="34" charset="-122"/>
-                <a:cs typeface="Courier New" pitchFamily="34" charset="-120"/>
-              </a:rPr>
-              <a:t>47 × 53      → Long (no common base)</a:t>
-            </a:r>
-            <a:endParaRPr lang="en-US" sz="1100" dirty="0"/>
-          </a:p>
-        </p:txBody>
-      </p:sp>
-      <p:sp>
-        <p:nvSpPr>
-          <p:cNvPr id="10" name="Text 8"/>
-          <p:cNvSpPr/>
-          <p:nvPr/>
-        </p:nvSpPr>
-        <p:spPr>
-          <a:xfrm>
-            <a:off x="631627" y="2578447"/>
-            <a:ext cx="8086939" cy="174575"/>
-          </a:xfrm>
-          <a:prstGeom prst="rect">
-            <a:avLst/>
-          </a:prstGeom>
-          <a:noFill/>
-          <a:ln/>
-        </p:spPr>
-        <p:txBody>
-          <a:bodyPr wrap="square" lIns="0" tIns="0" rIns="0" bIns="0" rtlCol="0" anchor="t"/>
-          <a:lstStyle/>
-          <a:p>
-            <a:pPr algn="l" indent="0" marL="0">
-              <a:lnSpc>
-                <a:spcPts val="1375"/>
-              </a:lnSpc>
-              <a:buNone/>
-            </a:pPr>
-            <a:r>
-              <a:rPr lang="en-US" sz="1100" dirty="0">
-                <a:solidFill>
-                  <a:srgbClr val="1C2833"/>
-                </a:solidFill>
-                <a:latin typeface="Courier New" pitchFamily="34" charset="0"/>
-                <a:ea typeface="Courier New" pitchFamily="34" charset="-122"/>
-                <a:cs typeface="Courier New" pitchFamily="34" charset="-120"/>
-              </a:rPr>
-              <a:t>998 × 997    → Nikhilam (near 1000)</a:t>
-            </a:r>
-            <a:endParaRPr lang="en-US" sz="1100" dirty="0"/>
-          </a:p>
-        </p:txBody>
-      </p:sp>
-      <p:sp>
-        <p:nvSpPr>
-          <p:cNvPr id="11" name="Text 9"/>
-          <p:cNvSpPr/>
-          <p:nvPr/>
-        </p:nvSpPr>
-        <p:spPr>
-          <a:xfrm>
-            <a:off x="631627" y="2753023"/>
-            <a:ext cx="8086939" cy="174575"/>
-          </a:xfrm>
-          <a:prstGeom prst="rect">
-            <a:avLst/>
-          </a:prstGeom>
-          <a:noFill/>
-          <a:ln/>
-        </p:spPr>
-        <p:txBody>
-          <a:bodyPr wrap="square" lIns="0" tIns="0" rIns="0" bIns="0" rtlCol="0" anchor="t"/>
-          <a:lstStyle/>
-          <a:p>
-            <a:pPr algn="l" indent="0" marL="0">
-              <a:lnSpc>
-                <a:spcPts val="1375"/>
-              </a:lnSpc>
-              <a:buNone/>
-            </a:pPr>
-            <a:r>
-              <a:rPr lang="en-US" sz="1100" dirty="0">
-                <a:solidFill>
-                  <a:srgbClr val="1C2833"/>
-                </a:solidFill>
-                <a:latin typeface="Courier New" pitchFamily="34" charset="0"/>
-                <a:ea typeface="Courier New" pitchFamily="34" charset="-122"/>
-                <a:cs typeface="Courier New" pitchFamily="34" charset="-120"/>
-              </a:rPr>
-              <a:t>73 × 84      → Long</a:t>
-            </a:r>
-            <a:endParaRPr lang="en-US" sz="1100" dirty="0"/>
-          </a:p>
-        </p:txBody>
-      </p:sp>
-      <p:sp>
-        <p:nvSpPr>
-          <p:cNvPr id="12" name="Text 10"/>
-          <p:cNvSpPr/>
-          <p:nvPr/>
-        </p:nvSpPr>
-        <p:spPr>
-          <a:xfrm>
-            <a:off x="631627" y="2927598"/>
-            <a:ext cx="8086939" cy="174575"/>
-          </a:xfrm>
-          <a:prstGeom prst="rect">
-            <a:avLst/>
-          </a:prstGeom>
-          <a:noFill/>
-          <a:ln/>
-        </p:spPr>
-        <p:txBody>
-          <a:bodyPr wrap="square" lIns="0" tIns="0" rIns="0" bIns="0" rtlCol="0" anchor="t"/>
-          <a:lstStyle/>
-          <a:p>
-            <a:pPr algn="l" indent="0" marL="0">
-              <a:lnSpc>
-                <a:spcPts val="1375"/>
-              </a:lnSpc>
-              <a:buNone/>
-            </a:pPr>
-            <a:r>
-              <a:rPr lang="en-US" sz="1100" dirty="0">
-                <a:solidFill>
-                  <a:srgbClr val="1C2833"/>
-                </a:solidFill>
-                <a:latin typeface="Courier New" pitchFamily="34" charset="0"/>
-                <a:ea typeface="Courier New" pitchFamily="34" charset="-122"/>
-                <a:cs typeface="Courier New" pitchFamily="34" charset="-120"/>
-              </a:rPr>
-              <a:t>103 × 104    → Nikhilam</a:t>
-            </a:r>
-            <a:endParaRPr lang="en-US" sz="1100" dirty="0"/>
-          </a:p>
-        </p:txBody>
-      </p:sp>
-      <p:sp>
-        <p:nvSpPr>
-          <p:cNvPr id="13" name="Text 11"/>
-          <p:cNvSpPr/>
-          <p:nvPr/>
-        </p:nvSpPr>
-        <p:spPr>
-          <a:xfrm>
-            <a:off x="631627" y="3102173"/>
-            <a:ext cx="8086939" cy="174575"/>
-          </a:xfrm>
-          <a:prstGeom prst="rect">
-            <a:avLst/>
-          </a:prstGeom>
-          <a:noFill/>
-          <a:ln/>
-        </p:spPr>
-        <p:txBody>
-          <a:bodyPr wrap="square" lIns="0" tIns="0" rIns="0" bIns="0" rtlCol="0" anchor="t"/>
-          <a:lstStyle/>
-          <a:p>
-            <a:pPr algn="l" indent="0" marL="0">
-              <a:lnSpc>
-                <a:spcPts val="1375"/>
-              </a:lnSpc>
-              <a:buNone/>
-            </a:pPr>
-            <a:r>
-              <a:rPr lang="en-US" sz="1100" dirty="0">
-                <a:solidFill>
-                  <a:srgbClr val="1C2833"/>
-                </a:solidFill>
-                <a:latin typeface="Courier New" pitchFamily="34" charset="0"/>
-                <a:ea typeface="Courier New" pitchFamily="34" charset="-122"/>
-                <a:cs typeface="Courier New" pitchFamily="34" charset="-120"/>
-              </a:rPr>
-              <a:t>89 × 91      → Long-ish (near 90, but no nice base)</a:t>
-            </a:r>
-            <a:endParaRPr lang="en-US" sz="1100" dirty="0"/>
-          </a:p>
-        </p:txBody>
-      </p:sp>
-      <p:sp>
-        <p:nvSpPr>
-          <p:cNvPr id="14" name="Text 12"/>
-          <p:cNvSpPr/>
-          <p:nvPr/>
-        </p:nvSpPr>
-        <p:spPr>
-          <a:xfrm>
-            <a:off x="631627" y="3276749"/>
-            <a:ext cx="8086939" cy="174575"/>
-          </a:xfrm>
-          <a:prstGeom prst="rect">
-            <a:avLst/>
-          </a:prstGeom>
-          <a:noFill/>
-          <a:ln/>
-        </p:spPr>
-        <p:txBody>
-          <a:bodyPr wrap="square" lIns="0" tIns="0" rIns="0" bIns="0" rtlCol="0" anchor="t"/>
-          <a:lstStyle/>
-          <a:p>
-            <a:pPr algn="l" indent="0" marL="0">
-              <a:lnSpc>
-                <a:spcPts val="1375"/>
-              </a:lnSpc>
-              <a:buNone/>
-            </a:pPr>
-            <a:r>
-              <a:rPr lang="en-US" sz="1100" dirty="0">
-                <a:solidFill>
-                  <a:srgbClr val="1C2833"/>
-                </a:solidFill>
-                <a:latin typeface="Courier New" pitchFamily="34" charset="0"/>
-                <a:ea typeface="Courier New" pitchFamily="34" charset="-122"/>
-                <a:cs typeface="Courier New" pitchFamily="34" charset="-120"/>
-              </a:rPr>
-              <a:t>102 × 99     → Nikhilam (mixed)</a:t>
-            </a:r>
-            <a:endParaRPr lang="en-US" sz="1100" dirty="0"/>
-          </a:p>
-        </p:txBody>
-      </p:sp>
-      <p:sp>
-        <p:nvSpPr>
-          <p:cNvPr id="15" name="Text 13"/>
-          <p:cNvSpPr/>
-          <p:nvPr/>
-        </p:nvSpPr>
-        <p:spPr>
-          <a:xfrm>
-            <a:off x="631627" y="3451324"/>
-            <a:ext cx="8086939" cy="174575"/>
-          </a:xfrm>
-          <a:prstGeom prst="rect">
-            <a:avLst/>
-          </a:prstGeom>
-          <a:noFill/>
-          <a:ln/>
-        </p:spPr>
-        <p:txBody>
-          <a:bodyPr wrap="square" lIns="0" tIns="0" rIns="0" bIns="0" rtlCol="0" anchor="t"/>
-          <a:lstStyle/>
-          <a:p>
-            <a:pPr algn="l" indent="0" marL="0">
-              <a:lnSpc>
-                <a:spcPts val="1375"/>
-              </a:lnSpc>
-              <a:buNone/>
-            </a:pPr>
-            <a:r>
-              <a:rPr lang="en-US" sz="1100" dirty="0">
-                <a:solidFill>
-                  <a:srgbClr val="1C2833"/>
-                </a:solidFill>
-                <a:latin typeface="Courier New" pitchFamily="34" charset="0"/>
-                <a:ea typeface="Courier New" pitchFamily="34" charset="-122"/>
-                <a:cs typeface="Courier New" pitchFamily="34" charset="-120"/>
-              </a:rPr>
-              <a:t>347 × 28     → Long</a:t>
-            </a:r>
-            <a:endParaRPr lang="en-US" sz="1100" dirty="0"/>
-          </a:p>
-        </p:txBody>
-      </p:sp>
-      <p:sp>
-        <p:nvSpPr>
-          <p:cNvPr id="16" name="Text 14"/>
-          <p:cNvSpPr/>
-          <p:nvPr/>
-        </p:nvSpPr>
-        <p:spPr>
-          <a:xfrm>
-            <a:off x="631627" y="3625900"/>
-            <a:ext cx="8086939" cy="174575"/>
-          </a:xfrm>
-          <a:prstGeom prst="rect">
-            <a:avLst/>
-          </a:prstGeom>
-          <a:noFill/>
-          <a:ln/>
-        </p:spPr>
-        <p:txBody>
-          <a:bodyPr wrap="square" lIns="0" tIns="0" rIns="0" bIns="0" rtlCol="0" anchor="t"/>
-          <a:lstStyle/>
-          <a:p>
-            <a:pPr algn="l" indent="0" marL="0">
-              <a:lnSpc>
-                <a:spcPts val="1375"/>
-              </a:lnSpc>
-              <a:buNone/>
-            </a:pPr>
-            <a:r>
-              <a:rPr lang="en-US" sz="1100" dirty="0">
-                <a:solidFill>
-                  <a:srgbClr val="1C2833"/>
-                </a:solidFill>
-                <a:latin typeface="Courier New" pitchFamily="34" charset="0"/>
-                <a:ea typeface="Courier New" pitchFamily="34" charset="-122"/>
-                <a:cs typeface="Courier New" pitchFamily="34" charset="-120"/>
-              </a:rPr>
-              <a:t>988 × 994    → Nikhilam (near 1000, larger deficits but still works)</a:t>
-            </a:r>
-            <a:endParaRPr lang="en-US" sz="1100" dirty="0"/>
-          </a:p>
-        </p:txBody>
-      </p:sp>
-      <p:sp>
-        <p:nvSpPr>
-          <p:cNvPr id="17" name="Text 15"/>
-          <p:cNvSpPr/>
-          <p:nvPr/>
-        </p:nvSpPr>
-        <p:spPr>
-          <a:xfrm>
-            <a:off x="631627" y="3800475"/>
-            <a:ext cx="8086939" cy="174575"/>
-          </a:xfrm>
-          <a:prstGeom prst="rect">
-            <a:avLst/>
-          </a:prstGeom>
-          <a:noFill/>
-          <a:ln/>
-        </p:spPr>
-        <p:txBody>
-          <a:bodyPr wrap="square" lIns="0" tIns="0" rIns="0" bIns="0" rtlCol="0" anchor="t"/>
-          <a:lstStyle/>
-          <a:p>
-            <a:pPr algn="l" indent="0" marL="0">
-              <a:lnSpc>
-                <a:spcPts val="1375"/>
-              </a:lnSpc>
-              <a:buNone/>
-            </a:pPr>
-            <a:r>
-              <a:rPr lang="en-US" sz="1100" dirty="0">
-                <a:solidFill>
-                  <a:srgbClr val="1C2833"/>
-                </a:solidFill>
-                <a:latin typeface="Courier New" pitchFamily="34" charset="0"/>
-                <a:ea typeface="Courier New" pitchFamily="34" charset="-122"/>
-                <a:cs typeface="Courier New" pitchFamily="34" charset="-120"/>
-              </a:rPr>
-              <a:t>56 × 89      → Long</a:t>
-            </a:r>
-            <a:endParaRPr lang="en-US" sz="1100" dirty="0"/>
-          </a:p>
-        </p:txBody>
-      </p:sp>
-      <p:sp>
-        <p:nvSpPr>
-          <p:cNvPr id="18" name="Text 16"/>
-          <p:cNvSpPr/>
-          <p:nvPr/>
-        </p:nvSpPr>
-        <p:spPr>
-          <a:xfrm>
-            <a:off x="631627" y="3975050"/>
-            <a:ext cx="8086939" cy="174575"/>
-          </a:xfrm>
-          <a:prstGeom prst="rect">
-            <a:avLst/>
-          </a:prstGeom>
-          <a:noFill/>
-          <a:ln/>
-        </p:spPr>
-        <p:txBody>
-          <a:bodyPr wrap="square" lIns="0" tIns="0" rIns="0" bIns="0" rtlCol="0" anchor="t"/>
-          <a:lstStyle/>
-          <a:p>
-            <a:pPr algn="l" indent="0" marL="0">
-              <a:lnSpc>
-                <a:spcPts val="1375"/>
-              </a:lnSpc>
-              <a:buNone/>
-            </a:pPr>
-            <a:r>
-              <a:rPr lang="en-US" sz="1100" dirty="0">
-                <a:solidFill>
-                  <a:srgbClr val="1C2833"/>
-                </a:solidFill>
-                <a:latin typeface="Courier New" pitchFamily="34" charset="0"/>
-                <a:ea typeface="Courier New" pitchFamily="34" charset="-122"/>
-                <a:cs typeface="Courier New" pitchFamily="34" charset="-120"/>
-              </a:rPr>
-              <a:t>99 × 99      → Nikhilam (101 × 99 would also be nice)</a:t>
-            </a:r>
-            <a:endParaRPr lang="en-US" sz="1100" dirty="0"/>
-          </a:p>
-        </p:txBody>
-      </p:sp>
-      <p:sp>
-        <p:nvSpPr>
-          <p:cNvPr id="19" name="Text 17"/>
-          <p:cNvSpPr/>
-          <p:nvPr/>
-        </p:nvSpPr>
-        <p:spPr>
-          <a:xfrm>
-            <a:off x="631627" y="4149626"/>
-            <a:ext cx="8086939" cy="174575"/>
-          </a:xfrm>
-          <a:prstGeom prst="rect">
-            <a:avLst/>
-          </a:prstGeom>
-          <a:noFill/>
-          <a:ln/>
-        </p:spPr>
-        <p:txBody>
-          <a:bodyPr wrap="square" lIns="0" tIns="0" rIns="0" bIns="0" rtlCol="0" anchor="t"/>
-          <a:lstStyle/>
-          <a:p>
-            <a:pPr algn="l" indent="0" marL="0">
-              <a:lnSpc>
-                <a:spcPts val="1375"/>
-              </a:lnSpc>
-              <a:buNone/>
-            </a:pPr>
-            <a:r>
-              <a:rPr lang="en-US" sz="1100" dirty="0">
-                <a:solidFill>
-                  <a:srgbClr val="1C2833"/>
-                </a:solidFill>
-                <a:latin typeface="Courier New" pitchFamily="34" charset="0"/>
-                <a:ea typeface="Courier New" pitchFamily="34" charset="-122"/>
-                <a:cs typeface="Courier New" pitchFamily="34" charset="-120"/>
-              </a:rPr>
-              <a:t>1003 × 1004  → Nikhilam</a:t>
-            </a:r>
-            <a:endParaRPr lang="en-US" sz="1100" dirty="0"/>
-          </a:p>
-        </p:txBody>
-      </p:sp>
-      <p:sp>
-        <p:nvSpPr>
-          <p:cNvPr id="20" name="Text 18"/>
-          <p:cNvSpPr/>
-          <p:nvPr/>
-        </p:nvSpPr>
-        <p:spPr>
-          <a:xfrm>
-            <a:off x="631627" y="4324201"/>
-            <a:ext cx="8086939" cy="174575"/>
-          </a:xfrm>
-          <a:prstGeom prst="rect">
-            <a:avLst/>
-          </a:prstGeom>
-          <a:noFill/>
-          <a:ln/>
-        </p:spPr>
-        <p:txBody>
-          <a:bodyPr wrap="square" lIns="0" tIns="0" rIns="0" bIns="0" rtlCol="0" anchor="t"/>
-          <a:lstStyle/>
-          <a:p>
-            <a:pPr algn="l" indent="0" marL="0">
-              <a:lnSpc>
-                <a:spcPts val="1375"/>
-              </a:lnSpc>
-              <a:buNone/>
-            </a:pPr>
-            <a:r>
-              <a:rPr lang="en-US" sz="1100" dirty="0">
-                <a:solidFill>
-                  <a:srgbClr val="1C2833"/>
-                </a:solidFill>
-                <a:latin typeface="Courier New" pitchFamily="34" charset="0"/>
-                <a:ea typeface="Courier New" pitchFamily="34" charset="-122"/>
-                <a:cs typeface="Courier New" pitchFamily="34" charset="-120"/>
-              </a:rPr>
-              <a:t>65 × 75      → Long</a:t>
-            </a:r>
-            <a:endParaRPr lang="en-US" sz="1100" dirty="0"/>
-          </a:p>
-        </p:txBody>
-      </p:sp>
-      <p:sp>
-        <p:nvSpPr>
-          <p:cNvPr id="21" name="Text 19"/>
-          <p:cNvSpPr/>
-          <p:nvPr/>
-        </p:nvSpPr>
-        <p:spPr>
-          <a:xfrm>
-            <a:off x="631627" y="4498777"/>
-            <a:ext cx="8086939" cy="174575"/>
-          </a:xfrm>
-          <a:prstGeom prst="rect">
-            <a:avLst/>
-          </a:prstGeom>
-          <a:noFill/>
-          <a:ln/>
-        </p:spPr>
-        <p:txBody>
-          <a:bodyPr wrap="square" lIns="0" tIns="0" rIns="0" bIns="0" rtlCol="0" anchor="t"/>
-          <a:lstStyle/>
-          <a:p>
-            <a:pPr algn="l" indent="0" marL="0">
-              <a:lnSpc>
-                <a:spcPts val="1375"/>
-              </a:lnSpc>
-              <a:buNone/>
-            </a:pPr>
-            <a:r>
-              <a:rPr lang="en-US" sz="1100" dirty="0">
-                <a:solidFill>
-                  <a:srgbClr val="1C2833"/>
-                </a:solidFill>
-                <a:latin typeface="Courier New" pitchFamily="34" charset="0"/>
-                <a:ea typeface="Courier New" pitchFamily="34" charset="-122"/>
-                <a:cs typeface="Courier New" pitchFamily="34" charset="-120"/>
-              </a:rPr>
-              <a:t>107 × 108    → Nikhilam</a:t>
-            </a:r>
-            <a:endParaRPr lang="en-US" sz="1100" dirty="0"/>
-          </a:p>
-        </p:txBody>
-      </p:sp>
-      <p:sp>
-        <p:nvSpPr>
-          <p:cNvPr id="22" name="Text 20"/>
-          <p:cNvSpPr/>
-          <p:nvPr/>
-        </p:nvSpPr>
-        <p:spPr>
-          <a:xfrm>
-            <a:off x="631627" y="4673352"/>
-            <a:ext cx="8086939" cy="174575"/>
-          </a:xfrm>
-          <a:prstGeom prst="rect">
-            <a:avLst/>
-          </a:prstGeom>
-          <a:noFill/>
-          <a:ln/>
-        </p:spPr>
-        <p:txBody>
-          <a:bodyPr wrap="square" lIns="0" tIns="0" rIns="0" bIns="0" rtlCol="0" anchor="t"/>
-          <a:lstStyle/>
-          <a:p>
-            <a:pPr algn="l" indent="0" marL="0">
-              <a:lnSpc>
-                <a:spcPts val="1375"/>
-              </a:lnSpc>
-              <a:buNone/>
-            </a:pPr>
-            <a:r>
-              <a:rPr lang="en-US" sz="1100" dirty="0">
-                <a:solidFill>
-                  <a:srgbClr val="1C2833"/>
-                </a:solidFill>
-                <a:latin typeface="Courier New" pitchFamily="34" charset="0"/>
-                <a:ea typeface="Courier New" pitchFamily="34" charset="-122"/>
-                <a:cs typeface="Courier New" pitchFamily="34" charset="-120"/>
-              </a:rPr>
-              <a:t>1234 × 9876  → Long (too far apart, too random)</a:t>
-            </a:r>
-            <a:endParaRPr lang="en-US" sz="1100" dirty="0"/>
-          </a:p>
-        </p:txBody>
-      </p:sp>
-      <p:sp>
-        <p:nvSpPr>
-          <p:cNvPr id="23" name="Text 21"/>
-          <p:cNvSpPr/>
-          <p:nvPr/>
-        </p:nvSpPr>
-        <p:spPr>
-          <a:xfrm>
-            <a:off x="631627" y="4847927"/>
-            <a:ext cx="8086939" cy="174575"/>
-          </a:xfrm>
-          <a:prstGeom prst="rect">
-            <a:avLst/>
-          </a:prstGeom>
-          <a:noFill/>
-          <a:ln/>
-        </p:spPr>
-        <p:txBody>
-          <a:bodyPr wrap="square" lIns="0" tIns="0" rIns="0" bIns="0" rtlCol="0" anchor="t"/>
-          <a:lstStyle/>
-          <a:p>
-            <a:pPr algn="l" indent="0" marL="0">
-              <a:lnSpc>
-                <a:spcPts val="1375"/>
-              </a:lnSpc>
-              <a:buNone/>
-            </a:pPr>
-            <a:r>
-              <a:rPr lang="en-US" sz="1100" dirty="0">
-                <a:solidFill>
-                  <a:srgbClr val="1C2833"/>
-                </a:solidFill>
-                <a:latin typeface="Courier New" pitchFamily="34" charset="0"/>
-                <a:ea typeface="Courier New" pitchFamily="34" charset="-122"/>
-                <a:cs typeface="Courier New" pitchFamily="34" charset="-120"/>
-              </a:rPr>
-              <a:t>9999 × 9998  → Nikhilam (near 10000)</a:t>
-            </a:r>
-            <a:endParaRPr lang="en-US" sz="1100" dirty="0"/>
-          </a:p>
-        </p:txBody>
-      </p:sp>
-      <p:sp>
-        <p:nvSpPr>
-          <p:cNvPr id="24" name="Text 22"/>
-          <p:cNvSpPr/>
-          <p:nvPr/>
-        </p:nvSpPr>
-        <p:spPr>
-          <a:xfrm>
-            <a:off x="631627" y="5022503"/>
-            <a:ext cx="8086939" cy="174575"/>
-          </a:xfrm>
-          <a:prstGeom prst="rect">
-            <a:avLst/>
-          </a:prstGeom>
-          <a:noFill/>
-          <a:ln/>
-        </p:spPr>
-        <p:txBody>
-          <a:bodyPr wrap="square" lIns="0" tIns="0" rIns="0" bIns="0" rtlCol="0" anchor="t"/>
-          <a:lstStyle/>
-          <a:p>
-            <a:pPr algn="l" indent="0" marL="0">
-              <a:lnSpc>
-                <a:spcPts val="1375"/>
-              </a:lnSpc>
-              <a:buNone/>
-            </a:pPr>
-            <a:r>
-              <a:rPr lang="en-US" sz="1100" dirty="0">
-                <a:solidFill>
-                  <a:srgbClr val="1C2833"/>
-                </a:solidFill>
-                <a:latin typeface="Courier New" pitchFamily="34" charset="0"/>
-                <a:ea typeface="Courier New" pitchFamily="34" charset="-122"/>
-                <a:cs typeface="Courier New" pitchFamily="34" charset="-120"/>
-              </a:rPr>
-              <a:t>112 × 113    → Nikhilam (with carry)</a:t>
-            </a:r>
-            <a:endParaRPr lang="en-US" sz="1100" dirty="0"/>
-          </a:p>
-        </p:txBody>
-      </p:sp>
-      <p:sp>
-        <p:nvSpPr>
-          <p:cNvPr id="25" name="Text 23"/>
-          <p:cNvSpPr/>
-          <p:nvPr/>
-        </p:nvSpPr>
-        <p:spPr>
-          <a:xfrm>
-            <a:off x="631627" y="5197078"/>
-            <a:ext cx="8086939" cy="174575"/>
-          </a:xfrm>
-          <a:prstGeom prst="rect">
-            <a:avLst/>
-          </a:prstGeom>
-          <a:noFill/>
-          <a:ln/>
-        </p:spPr>
-        <p:txBody>
-          <a:bodyPr wrap="square" lIns="0" tIns="0" rIns="0" bIns="0" rtlCol="0" anchor="t"/>
-          <a:lstStyle/>
-          <a:p>
-            <a:pPr algn="l" indent="0" marL="0">
-              <a:lnSpc>
-                <a:spcPts val="1375"/>
-              </a:lnSpc>
-              <a:buNone/>
-            </a:pPr>
-            <a:r>
-              <a:rPr lang="en-US" sz="1100" dirty="0">
-                <a:solidFill>
-                  <a:srgbClr val="1C2833"/>
-                </a:solidFill>
-                <a:latin typeface="Courier New" pitchFamily="34" charset="0"/>
-                <a:ea typeface="Courier New" pitchFamily="34" charset="-122"/>
-                <a:cs typeface="Courier New" pitchFamily="34" charset="-120"/>
-              </a:rPr>
-              <a:t>156 × 178    → Long</a:t>
-            </a:r>
-            <a:endParaRPr lang="en-US" sz="1100" dirty="0"/>
-          </a:p>
-        </p:txBody>
-      </p:sp>
-      <p:sp>
-        <p:nvSpPr>
-          <p:cNvPr id="26" name="Text 24"/>
-          <p:cNvSpPr/>
-          <p:nvPr/>
-        </p:nvSpPr>
-        <p:spPr>
-          <a:xfrm>
-            <a:off x="631627" y="5371654"/>
-            <a:ext cx="8086939" cy="174575"/>
-          </a:xfrm>
-          <a:prstGeom prst="rect">
-            <a:avLst/>
-          </a:prstGeom>
-          <a:noFill/>
-          <a:ln/>
-        </p:spPr>
-        <p:txBody>
-          <a:bodyPr wrap="square" lIns="0" tIns="0" rIns="0" bIns="0" rtlCol="0" anchor="t"/>
-          <a:lstStyle/>
-          <a:p>
-            <a:pPr algn="l" indent="0" marL="0">
-              <a:lnSpc>
-                <a:spcPts val="1375"/>
-              </a:lnSpc>
-              <a:buNone/>
-            </a:pPr>
-            <a:r>
-              <a:rPr lang="en-US" sz="1100" dirty="0">
-                <a:solidFill>
-                  <a:srgbClr val="1C2833"/>
-                </a:solidFill>
-                <a:latin typeface="Courier New" pitchFamily="34" charset="0"/>
-                <a:ea typeface="Courier New" pitchFamily="34" charset="-122"/>
-                <a:cs typeface="Courier New" pitchFamily="34" charset="-120"/>
-              </a:rPr>
-              <a:t>49 × 51      → Nikhilam (both near 50 if comfortable; else long)</a:t>
-            </a:r>
-            <a:endParaRPr lang="en-US" sz="1100" dirty="0"/>
-          </a:p>
-        </p:txBody>
-      </p:sp>
-      <p:sp>
-        <p:nvSpPr>
-          <p:cNvPr id="27" name="Text 25"/>
-          <p:cNvSpPr/>
-          <p:nvPr/>
-        </p:nvSpPr>
-        <p:spPr>
-          <a:xfrm>
-            <a:off x="631627" y="5546229"/>
-            <a:ext cx="8086939" cy="174575"/>
-          </a:xfrm>
-          <a:prstGeom prst="rect">
-            <a:avLst/>
-          </a:prstGeom>
-          <a:noFill/>
-          <a:ln/>
-        </p:spPr>
-        <p:txBody>
-          <a:bodyPr wrap="square" lIns="0" tIns="0" rIns="0" bIns="0" rtlCol="0" anchor="t"/>
-          <a:lstStyle/>
-          <a:p>
-            <a:pPr algn="l" indent="0" marL="0">
-              <a:lnSpc>
-                <a:spcPts val="1375"/>
-              </a:lnSpc>
-              <a:buNone/>
-            </a:pPr>
-            <a:r>
-              <a:rPr lang="en-US" sz="1100" dirty="0">
-                <a:solidFill>
-                  <a:srgbClr val="1C2833"/>
-                </a:solidFill>
-                <a:latin typeface="Courier New" pitchFamily="34" charset="0"/>
-                <a:ea typeface="Courier New" pitchFamily="34" charset="-122"/>
-                <a:cs typeface="Courier New" pitchFamily="34" charset="-120"/>
-              </a:rPr>
-              <a:t>997 × 1003   → Nikhilam (mixed, near 1000)</a:t>
-            </a:r>
-            <a:endParaRPr lang="en-US" sz="1100" dirty="0"/>
-          </a:p>
-        </p:txBody>
-      </p:sp>
-      <p:sp>
-        <p:nvSpPr>
-          <p:cNvPr id="28" name="Text 26"/>
-          <p:cNvSpPr/>
-          <p:nvPr/>
-        </p:nvSpPr>
-        <p:spPr>
-          <a:xfrm>
-            <a:off x="406301" y="5936605"/>
-            <a:ext cx="8498026" cy="213271"/>
-          </a:xfrm>
-          <a:prstGeom prst="rect">
-            <a:avLst/>
-          </a:prstGeom>
-          <a:noFill/>
-          <a:ln/>
-        </p:spPr>
-        <p:txBody>
-          <a:bodyPr wrap="square" lIns="0" tIns="0" rIns="0" bIns="0" rtlCol="0" anchor="t"/>
-          <a:lstStyle/>
-          <a:p>
-            <a:pPr algn="l" indent="0" marL="0">
-              <a:lnSpc>
-                <a:spcPts val="1680"/>
-              </a:lnSpc>
-              <a:spcBef>
-                <a:spcPts val="300"/>
-              </a:spcBef>
-              <a:spcAft>
-                <a:spcPts val="300"/>
-              </a:spcAft>
-              <a:buNone/>
-            </a:pPr>
-            <a:r>
-              <a:rPr lang="en-US" sz="1200" dirty="0">
-                <a:solidFill>
-                  <a:srgbClr val="1C2833"/>
-                </a:solidFill>
-                <a:latin typeface="Arial" pitchFamily="34" charset="0"/>
-                <a:ea typeface="Arial" pitchFamily="34" charset="-122"/>
-                <a:cs typeface="Arial" pitchFamily="34" charset="-120"/>
-              </a:rPr>
-              <a:t>– 20 cards in 20 minutes. Pairs that finish early swap decks with another pair.</a:t>
-            </a:r>
-            <a:endParaRPr lang="en-US" sz="1200" dirty="0"/>
-          </a:p>
-        </p:txBody>
-      </p:sp>
-      <p:sp>
-        <p:nvSpPr>
-          <p:cNvPr id="29" name="Text 27"/>
-          <p:cNvSpPr/>
-          <p:nvPr/>
-        </p:nvSpPr>
-        <p:spPr>
-          <a:xfrm>
-            <a:off x="406301" y="6302276"/>
+            <a:off x="406301" y="4434929"/>
             <a:ext cx="8498026" cy="213271"/>
           </a:xfrm>
           <a:prstGeom prst="rect">
@@ -6563,7 +9129,7 @@
                 <a:ea typeface="Georgia" pitchFamily="34" charset="-122"/>
                 <a:cs typeface="Georgia" pitchFamily="34" charset="-120"/>
               </a:rPr>
-              <a:t>Wrap-up (5 min)</a:t>
+              <a:t>Core (15 min) — When it works, when it doesn't (cont.)</a:t>
             </a:r>
             <a:endParaRPr lang="en-US" sz="1800" dirty="0"/>
           </a:p>
@@ -6577,8 +9143,8 @@
         </p:nvSpPr>
         <p:spPr>
           <a:xfrm>
-            <a:off x="406301" y="870942"/>
-            <a:ext cx="8498026" cy="639812"/>
+            <a:off x="634901" y="883593"/>
+            <a:ext cx="8102798" cy="300930"/>
           </a:xfrm>
           <a:prstGeom prst="rect">
             <a:avLst/>
@@ -6590,17 +9156,101 @@
           <a:bodyPr wrap="square" lIns="0" tIns="0" rIns="0" bIns="0" rtlCol="0" anchor="t"/>
           <a:lstStyle/>
           <a:p>
-            <a:pPr algn="l" indent="0" marL="0">
-              <a:lnSpc>
-                <a:spcPts val="1680"/>
-              </a:lnSpc>
-              <a:spcBef>
-                <a:spcPts val="300"/>
-              </a:spcBef>
-              <a:spcAft>
-                <a:spcPts val="300"/>
-              </a:spcAft>
-              <a:buNone/>
+            <a:pPr algn="l" marL="342900" indent="-342900">
+              <a:lnSpc>
+                <a:spcPts val="1620"/>
+              </a:lnSpc>
+              <a:spcAft>
+                <a:spcPts val="300"/>
+              </a:spcAft>
+              <a:buSzPct val="100000"/>
+              <a:buChar char="•"/>
+            </a:pPr>
+            <a:r>
+              <a:rPr lang="en-US" sz="1200" b="1" dirty="0">
+                <a:solidFill>
+                  <a:srgbClr val="1C2833"/>
+                </a:solidFill>
+                <a:latin typeface="Arial" pitchFamily="34" charset="0"/>
+                <a:ea typeface="Arial" pitchFamily="34" charset="-122"/>
+                <a:cs typeface="Arial" pitchFamily="34" charset="-120"/>
+              </a:rPr>
+              <a:t>Try a "bad" example: </a:t>
+            </a:r>
+            <a:pPr algn="l" indent="0" marL="0">
+              <a:lnSpc>
+                <a:spcPts val="1620"/>
+              </a:lnSpc>
+              <a:spcAft>
+                <a:spcPts val="300"/>
+              </a:spcAft>
+              <a:buNone/>
+            </a:pPr>
+            <a:r>
+              <a:rPr lang="en-US" sz="1200" b="1" dirty="0">
+                <a:solidFill>
+                  <a:srgbClr val="1C2833"/>
+                </a:solidFill>
+                <a:latin typeface="Arial" pitchFamily="34" charset="0"/>
+                <a:ea typeface="Arial" pitchFamily="34" charset="-122"/>
+                <a:cs typeface="Arial" pitchFamily="34" charset="-120"/>
+              </a:rPr>
+              <a:t>47 × 53</a:t>
+            </a:r>
+            <a:pPr algn="l" indent="0" marL="0">
+              <a:lnSpc>
+                <a:spcPts val="1620"/>
+              </a:lnSpc>
+              <a:spcAft>
+                <a:spcPts val="300"/>
+              </a:spcAft>
+              <a:buNone/>
+            </a:pPr>
+            <a:r>
+              <a:rPr lang="en-US" sz="1200" b="1" dirty="0">
+                <a:solidFill>
+                  <a:srgbClr val="1C2833"/>
+                </a:solidFill>
+                <a:latin typeface="Arial" pitchFamily="34" charset="0"/>
+                <a:ea typeface="Arial" pitchFamily="34" charset="-122"/>
+                <a:cs typeface="Arial" pitchFamily="34" charset="-120"/>
+              </a:rPr>
+              <a:t>:</a:t>
+            </a:r>
+            <a:endParaRPr lang="en-US" sz="1200" dirty="0"/>
+          </a:p>
+        </p:txBody>
+      </p:sp>
+      <p:sp>
+        <p:nvSpPr>
+          <p:cNvPr id="5" name="Text 3"/>
+          <p:cNvSpPr/>
+          <p:nvPr/>
+        </p:nvSpPr>
+        <p:spPr>
+          <a:xfrm>
+            <a:off x="634901" y="1286024"/>
+            <a:ext cx="8102798" cy="975122"/>
+          </a:xfrm>
+          <a:prstGeom prst="rect">
+            <a:avLst/>
+          </a:prstGeom>
+          <a:noFill/>
+          <a:ln/>
+        </p:spPr>
+        <p:txBody>
+          <a:bodyPr wrap="square" lIns="0" tIns="0" rIns="0" bIns="0" rtlCol="0" anchor="t"/>
+          <a:lstStyle/>
+          <a:p>
+            <a:pPr algn="l" marL="342900" indent="-342900">
+              <a:lnSpc>
+                <a:spcPts val="1620"/>
+              </a:lnSpc>
+              <a:spcAft>
+                <a:spcPts val="300"/>
+              </a:spcAft>
+              <a:buSzPct val="100000"/>
+              <a:buChar char="•"/>
             </a:pPr>
             <a:r>
               <a:rPr lang="en-US" sz="1200" dirty="0">
@@ -6611,19 +9261,124 @@
                 <a:ea typeface="Arial" pitchFamily="34" charset="-122"/>
                 <a:cs typeface="Arial" pitchFamily="34" charset="-120"/>
               </a:rPr>
-              <a:t>– Class discussion: which cards did pairs most often mis-categorise? – Insight to leave with: </a:t>
-            </a:r>
-            <a:pPr algn="l" indent="0" marL="0">
-              <a:lnSpc>
-                <a:spcPts val="1680"/>
-              </a:lnSpc>
-              <a:spcBef>
-                <a:spcPts val="300"/>
-              </a:spcBef>
-              <a:spcAft>
-                <a:spcPts val="300"/>
-              </a:spcAft>
-              <a:buNone/>
+              <a:t>Base = ? Neither factor is near 10 (too big), near 100 (too far below), or near 50 (a </a:t>
+            </a:r>
+            <a:pPr algn="l" indent="0" marL="0">
+              <a:lnSpc>
+                <a:spcPts val="1620"/>
+              </a:lnSpc>
+              <a:spcAft>
+                <a:spcPts val="300"/>
+              </a:spcAft>
+              <a:buNone/>
+            </a:pPr>
+            <a:r>
+              <a:rPr lang="en-US" sz="1200" i="1" dirty="0">
+                <a:solidFill>
+                  <a:srgbClr val="1C2833"/>
+                </a:solidFill>
+                <a:latin typeface="Arial" pitchFamily="34" charset="0"/>
+                <a:ea typeface="Arial" pitchFamily="34" charset="-122"/>
+                <a:cs typeface="Arial" pitchFamily="34" charset="-120"/>
+              </a:rPr>
+              <a:t>sub-base</a:t>
+            </a:r>
+            <a:pPr algn="l" indent="0" marL="0">
+              <a:lnSpc>
+                <a:spcPts val="1620"/>
+              </a:lnSpc>
+              <a:spcAft>
+                <a:spcPts val="300"/>
+              </a:spcAft>
+              <a:buNone/>
+            </a:pPr>
+            <a:r>
+              <a:rPr lang="en-US" sz="1200" dirty="0">
+                <a:solidFill>
+                  <a:srgbClr val="1C2833"/>
+                </a:solidFill>
+                <a:latin typeface="Arial" pitchFamily="34" charset="0"/>
+                <a:ea typeface="Arial" pitchFamily="34" charset="-122"/>
+                <a:cs typeface="Arial" pitchFamily="34" charset="-120"/>
+              </a:rPr>
+              <a:t>; advanced).</a:t>
+            </a:r>
+            <a:endParaRPr lang="en-US" sz="1200" dirty="0"/>
+          </a:p>
+          <a:p>
+            <a:pPr algn="l" marL="342900" indent="-342900">
+              <a:lnSpc>
+                <a:spcPts val="1620"/>
+              </a:lnSpc>
+              <a:spcAft>
+                <a:spcPts val="300"/>
+              </a:spcAft>
+              <a:buSzPct val="100000"/>
+              <a:buChar char="•"/>
+            </a:pPr>
+            <a:r>
+              <a:rPr lang="en-US" sz="1200" dirty="0">
+                <a:solidFill>
+                  <a:srgbClr val="1C2833"/>
+                </a:solidFill>
+                <a:latin typeface="Arial" pitchFamily="34" charset="0"/>
+                <a:ea typeface="Arial" pitchFamily="34" charset="-122"/>
+                <a:cs typeface="Arial" pitchFamily="34" charset="-120"/>
+              </a:rPr>
+              <a:t>If you force base 50: deficits +(−3), +3. Left = 47 + 3 = 50. Right = (−3)(+3) = −9. Answer = 50 × 50 − 9 = 2491. ✓ Slow because you have to compute 50 × 50 = 2500 = a </a:t>
+            </a:r>
+            <a:pPr algn="l" indent="0" marL="0">
+              <a:lnSpc>
+                <a:spcPts val="1620"/>
+              </a:lnSpc>
+              <a:spcAft>
+                <a:spcPts val="300"/>
+              </a:spcAft>
+              <a:buNone/>
+            </a:pPr>
+            <a:r>
+              <a:rPr lang="en-US" sz="1200" i="1" dirty="0">
+                <a:solidFill>
+                  <a:srgbClr val="1C2833"/>
+                </a:solidFill>
+                <a:latin typeface="Arial" pitchFamily="34" charset="0"/>
+                <a:ea typeface="Arial" pitchFamily="34" charset="-122"/>
+                <a:cs typeface="Arial" pitchFamily="34" charset="-120"/>
+              </a:rPr>
+              <a:t>multiplication</a:t>
+            </a:r>
+            <a:pPr algn="l" indent="0" marL="0">
+              <a:lnSpc>
+                <a:spcPts val="1620"/>
+              </a:lnSpc>
+              <a:spcAft>
+                <a:spcPts val="300"/>
+              </a:spcAft>
+              <a:buNone/>
+            </a:pPr>
+            <a:r>
+              <a:rPr lang="en-US" sz="1200" dirty="0">
+                <a:solidFill>
+                  <a:srgbClr val="1C2833"/>
+                </a:solidFill>
+                <a:latin typeface="Arial" pitchFamily="34" charset="0"/>
+                <a:ea typeface="Arial" pitchFamily="34" charset="-122"/>
+                <a:cs typeface="Arial" pitchFamily="34" charset="-120"/>
+              </a:rPr>
+              <a:t>.</a:t>
+            </a:r>
+            <a:endParaRPr lang="en-US" sz="1200" dirty="0"/>
+          </a:p>
+          <a:p>
+            <a:pPr algn="l" marL="342900" indent="-342900">
+              <a:lnSpc>
+                <a:spcPts val="1620"/>
+              </a:lnSpc>
+              <a:spcAft>
+                <a:spcPts val="300"/>
+              </a:spcAft>
+              <a:buSzPct val="100000"/>
+              <a:buChar char="•"/>
             </a:pPr>
             <a:r>
               <a:rPr lang="en-US" sz="1200" b="1" dirty="0">
@@ -6634,15 +9389,12 @@
                 <a:ea typeface="Arial" pitchFamily="34" charset="-122"/>
                 <a:cs typeface="Arial" pitchFamily="34" charset="-120"/>
               </a:rPr>
-              <a:t>the method is a tool, not a rule.</a:t>
-            </a:r>
-            <a:pPr algn="l" indent="0" marL="0">
-              <a:lnSpc>
-                <a:spcPts val="1680"/>
-              </a:lnSpc>
-              <a:spcBef>
-                <a:spcPts val="300"/>
-              </a:spcBef>
+              <a:t>Sub-bases work</a:t>
+            </a:r>
+            <a:pPr algn="l" indent="0" marL="0">
+              <a:lnSpc>
+                <a:spcPts val="1620"/>
+              </a:lnSpc>
               <a:spcAft>
                 <a:spcPts val="300"/>
               </a:spcAft>
@@ -6657,53 +9409,7 @@
                 <a:ea typeface="Arial" pitchFamily="34" charset="-122"/>
                 <a:cs typeface="Arial" pitchFamily="34" charset="-120"/>
               </a:rPr>
-              <a:t> Long multiplication is </a:t>
-            </a:r>
-            <a:pPr algn="l" indent="0" marL="0">
-              <a:lnSpc>
-                <a:spcPts val="1680"/>
-              </a:lnSpc>
-              <a:spcBef>
-                <a:spcPts val="300"/>
-              </a:spcBef>
-              <a:spcAft>
-                <a:spcPts val="300"/>
-              </a:spcAft>
-              <a:buNone/>
-            </a:pPr>
-            <a:r>
-              <a:rPr lang="en-US" sz="1200" i="1" dirty="0">
-                <a:solidFill>
-                  <a:srgbClr val="1C2833"/>
-                </a:solidFill>
-                <a:latin typeface="Arial" pitchFamily="34" charset="0"/>
-                <a:ea typeface="Arial" pitchFamily="34" charset="-122"/>
-                <a:cs typeface="Arial" pitchFamily="34" charset="-120"/>
-              </a:rPr>
-              <a:t>not</a:t>
-            </a:r>
-            <a:pPr algn="l" indent="0" marL="0">
-              <a:lnSpc>
-                <a:spcPts val="1680"/>
-              </a:lnSpc>
-              <a:spcBef>
-                <a:spcPts val="300"/>
-              </a:spcBef>
-              <a:spcAft>
-                <a:spcPts val="300"/>
-              </a:spcAft>
-              <a:buNone/>
-            </a:pPr>
-            <a:r>
-              <a:rPr lang="en-US" sz="1200" dirty="0">
-                <a:solidFill>
-                  <a:srgbClr val="1C2833"/>
-                </a:solidFill>
-                <a:latin typeface="Arial" pitchFamily="34" charset="0"/>
-                <a:ea typeface="Arial" pitchFamily="34" charset="-122"/>
-                <a:cs typeface="Arial" pitchFamily="34" charset="-120"/>
-              </a:rPr>
-              <a:t> "the wrong way." Each tool fits a certain shape of problem. – Preview Day 9: speed sprints + project start.</a:t>
+              <a:t> (Day 8 tier-up), but they're not faster than long multiplication for casual users.</a:t>
             </a:r>
             <a:endParaRPr lang="en-US" sz="1200" dirty="0"/>
           </a:p>
@@ -6711,7 +9417,7 @@
       </p:sp>
       <p:sp>
         <p:nvSpPr>
-          <p:cNvPr id="5" name="Text 3"/>
+          <p:cNvPr id="6" name="Text 4"/>
           <p:cNvSpPr/>
           <p:nvPr/>
         </p:nvSpPr>
@@ -6861,7 +9567,7 @@
                 <a:ea typeface="Georgia" pitchFamily="34" charset="-122"/>
                 <a:cs typeface="Georgia" pitchFamily="34" charset="-120"/>
               </a:rPr>
-              <a:t>Student-facing content</a:t>
+              <a:t>Core (15 min) — When it works, when it doesn't (cont.)</a:t>
             </a:r>
             <a:endParaRPr lang="en-US" sz="1800" dirty="0"/>
           </a:p>
@@ -6875,50 +9581,173 @@
         </p:nvSpPr>
         <p:spPr>
           <a:xfrm>
-            <a:off x="406301" y="883593"/>
-            <a:ext cx="8331398" cy="2862263"/>
-          </a:xfrm>
-          <a:prstGeom prst="rect">
-            <a:avLst/>
-          </a:prstGeom>
-          <a:solidFill>
-            <a:srgbClr val="F4F8F9"/>
-          </a:solidFill>
-          <a:ln/>
-        </p:spPr>
-        <p:txBody>
-          <a:bodyPr wrap="square" rtlCol="0" anchor="ctr"/>
-          <a:lstStyle/>
-          <a:p>
-            <a:pPr indent="0" marL="0">
-              <a:buNone/>
-            </a:pPr>
-            <a:endParaRPr lang="en-US" dirty="0"/>
-          </a:p>
-        </p:txBody>
-      </p:sp>
-      <p:sp>
-        <p:nvSpPr>
-          <p:cNvPr id="5" name="Shape 3"/>
-          <p:cNvSpPr/>
-          <p:nvPr/>
-        </p:nvSpPr>
-        <p:spPr>
-          <a:xfrm>
-            <a:off x="434876" y="883593"/>
-            <a:ext cx="0" cy="2862263"/>
-          </a:xfrm>
-          <a:prstGeom prst="line">
+            <a:off x="634901" y="883593"/>
+            <a:ext cx="8102798" cy="300930"/>
+          </a:xfrm>
+          <a:prstGeom prst="rect">
             <a:avLst/>
           </a:prstGeom>
           <a:noFill/>
-          <a:ln w="57150">
-            <a:solidFill>
-              <a:srgbClr val="FE4447"/>
-            </a:solidFill>
-            <a:prstDash val="solid"/>
-          </a:ln>
-        </p:spPr>
+          <a:ln/>
+        </p:spPr>
+        <p:txBody>
+          <a:bodyPr wrap="square" lIns="0" tIns="0" rIns="0" bIns="0" rtlCol="0" anchor="t"/>
+          <a:lstStyle/>
+          <a:p>
+            <a:pPr algn="l" marL="342900" indent="-342900">
+              <a:lnSpc>
+                <a:spcPts val="1620"/>
+              </a:lnSpc>
+              <a:spcAft>
+                <a:spcPts val="300"/>
+              </a:spcAft>
+              <a:buSzPct val="100000"/>
+              <a:buChar char="•"/>
+            </a:pPr>
+            <a:r>
+              <a:rPr lang="en-US" sz="1200" b="1" dirty="0">
+                <a:solidFill>
+                  <a:srgbClr val="1C2833"/>
+                </a:solidFill>
+                <a:latin typeface="Arial" pitchFamily="34" charset="0"/>
+                <a:ea typeface="Arial" pitchFamily="34" charset="-122"/>
+                <a:cs typeface="Arial" pitchFamily="34" charset="-120"/>
+              </a:rPr>
+              <a:t>A genuinely bad case: </a:t>
+            </a:r>
+            <a:pPr algn="l" indent="0" marL="0">
+              <a:lnSpc>
+                <a:spcPts val="1620"/>
+              </a:lnSpc>
+              <a:spcAft>
+                <a:spcPts val="300"/>
+              </a:spcAft>
+              <a:buNone/>
+            </a:pPr>
+            <a:r>
+              <a:rPr lang="en-US" sz="1200" b="1" dirty="0">
+                <a:solidFill>
+                  <a:srgbClr val="1C2833"/>
+                </a:solidFill>
+                <a:latin typeface="Arial" pitchFamily="34" charset="0"/>
+                <a:ea typeface="Arial" pitchFamily="34" charset="-122"/>
+                <a:cs typeface="Arial" pitchFamily="34" charset="-120"/>
+              </a:rPr>
+              <a:t>47 × 89</a:t>
+            </a:r>
+            <a:pPr algn="l" indent="0" marL="0">
+              <a:lnSpc>
+                <a:spcPts val="1620"/>
+              </a:lnSpc>
+              <a:spcAft>
+                <a:spcPts val="300"/>
+              </a:spcAft>
+              <a:buNone/>
+            </a:pPr>
+            <a:r>
+              <a:rPr lang="en-US" sz="1200" b="1" dirty="0">
+                <a:solidFill>
+                  <a:srgbClr val="1C2833"/>
+                </a:solidFill>
+                <a:latin typeface="Arial" pitchFamily="34" charset="0"/>
+                <a:ea typeface="Arial" pitchFamily="34" charset="-122"/>
+                <a:cs typeface="Arial" pitchFamily="34" charset="-120"/>
+              </a:rPr>
+              <a:t>:</a:t>
+            </a:r>
+            <a:endParaRPr lang="en-US" sz="1200" dirty="0"/>
+          </a:p>
+        </p:txBody>
+      </p:sp>
+      <p:sp>
+        <p:nvSpPr>
+          <p:cNvPr id="5" name="Text 3"/>
+          <p:cNvSpPr/>
+          <p:nvPr/>
+        </p:nvSpPr>
+        <p:spPr>
+          <a:xfrm>
+            <a:off x="634901" y="1286024"/>
+            <a:ext cx="8102798" cy="525661"/>
+          </a:xfrm>
+          <a:prstGeom prst="rect">
+            <a:avLst/>
+          </a:prstGeom>
+          <a:noFill/>
+          <a:ln/>
+        </p:spPr>
+        <p:txBody>
+          <a:bodyPr wrap="square" lIns="0" tIns="0" rIns="0" bIns="0" rtlCol="0" anchor="t"/>
+          <a:lstStyle/>
+          <a:p>
+            <a:pPr algn="l" marL="342900" indent="-342900">
+              <a:lnSpc>
+                <a:spcPts val="1620"/>
+              </a:lnSpc>
+              <a:spcAft>
+                <a:spcPts val="300"/>
+              </a:spcAft>
+              <a:buSzPct val="100000"/>
+              <a:buChar char="•"/>
+            </a:pPr>
+            <a:r>
+              <a:rPr lang="en-US" sz="1200" dirty="0">
+                <a:solidFill>
+                  <a:srgbClr val="1C2833"/>
+                </a:solidFill>
+                <a:latin typeface="Arial" pitchFamily="34" charset="0"/>
+                <a:ea typeface="Arial" pitchFamily="34" charset="-122"/>
+                <a:cs typeface="Arial" pitchFamily="34" charset="-120"/>
+              </a:rPr>
+              <a:t>Not near any common base.</a:t>
+            </a:r>
+            <a:endParaRPr lang="en-US" sz="1200" dirty="0"/>
+          </a:p>
+          <a:p>
+            <a:pPr algn="l" marL="342900" indent="-342900">
+              <a:lnSpc>
+                <a:spcPts val="1620"/>
+              </a:lnSpc>
+              <a:spcAft>
+                <a:spcPts val="300"/>
+              </a:spcAft>
+              <a:buSzPct val="100000"/>
+              <a:buChar char="•"/>
+            </a:pPr>
+            <a:r>
+              <a:rPr lang="en-US" sz="1200" dirty="0">
+                <a:solidFill>
+                  <a:srgbClr val="1C2833"/>
+                </a:solidFill>
+                <a:latin typeface="Arial" pitchFamily="34" charset="0"/>
+                <a:ea typeface="Arial" pitchFamily="34" charset="-122"/>
+                <a:cs typeface="Arial" pitchFamily="34" charset="-120"/>
+              </a:rPr>
+              <a:t>Use long multiplication. </a:t>
+            </a:r>
+            <a:pPr algn="l" indent="0" marL="0">
+              <a:lnSpc>
+                <a:spcPts val="1620"/>
+              </a:lnSpc>
+              <a:spcAft>
+                <a:spcPts val="300"/>
+              </a:spcAft>
+              <a:buNone/>
+            </a:pPr>
+            <a:r>
+              <a:rPr lang="en-US" sz="1200" b="1" dirty="0">
+                <a:solidFill>
+                  <a:srgbClr val="1C2833"/>
+                </a:solidFill>
+                <a:latin typeface="Arial" pitchFamily="34" charset="0"/>
+                <a:ea typeface="Arial" pitchFamily="34" charset="-122"/>
+                <a:cs typeface="Arial" pitchFamily="34" charset="-120"/>
+              </a:rPr>
+              <a:t>It's faster.</a:t>
+            </a:r>
+            <a:endParaRPr lang="en-US" sz="1200" dirty="0"/>
+          </a:p>
+        </p:txBody>
       </p:sp>
       <p:sp>
         <p:nvSpPr>
@@ -6928,8 +9757,8 @@
         </p:nvSpPr>
         <p:spPr>
           <a:xfrm>
-            <a:off x="692051" y="1074093"/>
-            <a:ext cx="7973389" cy="230981"/>
+            <a:off x="634901" y="1913186"/>
+            <a:ext cx="8102798" cy="281880"/>
           </a:xfrm>
           <a:prstGeom prst="rect">
             <a:avLst/>
@@ -6941,619 +9770,34 @@
           <a:bodyPr wrap="square" lIns="0" tIns="0" rIns="0" bIns="0" rtlCol="0" anchor="t"/>
           <a:lstStyle/>
           <a:p>
-            <a:pPr algn="l" indent="0" marL="0">
-              <a:lnSpc>
-                <a:spcPts val="1820"/>
-              </a:lnSpc>
-              <a:spcBef>
-                <a:spcPts val="300"/>
-              </a:spcBef>
-              <a:spcAft>
-                <a:spcPts val="300"/>
-              </a:spcAft>
-              <a:buNone/>
-            </a:pPr>
-            <a:r>
-              <a:rPr lang="en-US" sz="1300" b="1" i="1" dirty="0">
-                <a:solidFill>
-                  <a:srgbClr val="1C2833"/>
-                </a:solidFill>
-                <a:latin typeface="Georgia" pitchFamily="34" charset="0"/>
-                <a:ea typeface="Georgia" pitchFamily="34" charset="-122"/>
-                <a:cs typeface="Georgia" pitchFamily="34" charset="-120"/>
-              </a:rPr>
-              <a:t>When to use Nikhilam — and when not to</a:t>
-            </a:r>
-            <a:endParaRPr lang="en-US" sz="1300" dirty="0"/>
+            <a:pPr algn="l" marL="342900" indent="-342900">
+              <a:lnSpc>
+                <a:spcPts val="1620"/>
+              </a:lnSpc>
+              <a:spcAft>
+                <a:spcPts val="300"/>
+              </a:spcAft>
+              <a:buSzPct val="100000"/>
+              <a:buChar char="•"/>
+            </a:pPr>
+            <a:r>
+              <a:rPr lang="en-US" sz="1200" b="1" dirty="0">
+                <a:solidFill>
+                  <a:srgbClr val="1C2833"/>
+                </a:solidFill>
+                <a:latin typeface="Arial" pitchFamily="34" charset="0"/>
+                <a:ea typeface="Arial" pitchFamily="34" charset="-122"/>
+                <a:cs typeface="Arial" pitchFamily="34" charset="-120"/>
+              </a:rPr>
+              <a:t>The decision rule (write on board, boxed):</a:t>
+            </a:r>
+            <a:endParaRPr lang="en-US" sz="1200" dirty="0"/>
           </a:p>
         </p:txBody>
       </p:sp>
       <p:sp>
         <p:nvSpPr>
           <p:cNvPr id="7" name="Text 5"/>
-          <p:cNvSpPr/>
-          <p:nvPr/>
-        </p:nvSpPr>
-        <p:spPr>
-          <a:xfrm>
-            <a:off x="692051" y="1343174"/>
-            <a:ext cx="7973389" cy="692944"/>
-          </a:xfrm>
-          <a:prstGeom prst="rect">
-            <a:avLst/>
-          </a:prstGeom>
-          <a:noFill/>
-          <a:ln/>
-        </p:spPr>
-        <p:txBody>
-          <a:bodyPr wrap="square" lIns="0" tIns="0" rIns="0" bIns="0" rtlCol="0" anchor="t"/>
-          <a:lstStyle/>
-          <a:p>
-            <a:pPr algn="l" indent="0" marL="0">
-              <a:lnSpc>
-                <a:spcPts val="1820"/>
-              </a:lnSpc>
-              <a:spcBef>
-                <a:spcPts val="300"/>
-              </a:spcBef>
-              <a:spcAft>
-                <a:spcPts val="300"/>
-              </a:spcAft>
-              <a:buNone/>
-            </a:pPr>
-            <a:r>
-              <a:rPr lang="en-US" sz="1300" dirty="0">
-                <a:solidFill>
-                  <a:srgbClr val="1C2833"/>
-                </a:solidFill>
-                <a:latin typeface="Georgia" pitchFamily="34" charset="0"/>
-                <a:ea typeface="Georgia" pitchFamily="34" charset="-122"/>
-                <a:cs typeface="Georgia" pitchFamily="34" charset="-120"/>
-              </a:rPr>
-              <a:t>| Use Nikhilam | Use long multiplication | |---|---| | Both factors within ~10 of 10, 100, 1000, 10000 | One factor "random" (not near a base) | | Mental math, no pencil | Pencil work, no time pressure | | Mixed below/above same base | Factors near </a:t>
-            </a:r>
-            <a:pPr algn="l" indent="0" marL="0">
-              <a:lnSpc>
-                <a:spcPts val="1820"/>
-              </a:lnSpc>
-              <a:spcBef>
-                <a:spcPts val="300"/>
-              </a:spcBef>
-              <a:spcAft>
-                <a:spcPts val="300"/>
-              </a:spcAft>
-              <a:buNone/>
-            </a:pPr>
-            <a:r>
-              <a:rPr lang="en-US" sz="1300" i="1" dirty="0">
-                <a:solidFill>
-                  <a:srgbClr val="1C2833"/>
-                </a:solidFill>
-                <a:latin typeface="Georgia" pitchFamily="34" charset="0"/>
-                <a:ea typeface="Georgia" pitchFamily="34" charset="-122"/>
-                <a:cs typeface="Georgia" pitchFamily="34" charset="-120"/>
-              </a:rPr>
-              <a:t>different</a:t>
-            </a:r>
-            <a:pPr algn="l" indent="0" marL="0">
-              <a:lnSpc>
-                <a:spcPts val="1820"/>
-              </a:lnSpc>
-              <a:spcBef>
-                <a:spcPts val="300"/>
-              </a:spcBef>
-              <a:spcAft>
-                <a:spcPts val="300"/>
-              </a:spcAft>
-              <a:buNone/>
-            </a:pPr>
-            <a:r>
-              <a:rPr lang="en-US" sz="1300" dirty="0">
-                <a:solidFill>
-                  <a:srgbClr val="1C2833"/>
-                </a:solidFill>
-                <a:latin typeface="Georgia" pitchFamily="34" charset="0"/>
-                <a:ea typeface="Georgia" pitchFamily="34" charset="-122"/>
-                <a:cs typeface="Georgia" pitchFamily="34" charset="-120"/>
-              </a:rPr>
-              <a:t> bases |</a:t>
-            </a:r>
-            <a:endParaRPr lang="en-US" sz="1300" dirty="0"/>
-          </a:p>
-        </p:txBody>
-      </p:sp>
-      <p:sp>
-        <p:nvSpPr>
-          <p:cNvPr id="8" name="Text 6"/>
-          <p:cNvSpPr/>
-          <p:nvPr/>
-        </p:nvSpPr>
-        <p:spPr>
-          <a:xfrm>
-            <a:off x="692051" y="2074218"/>
-            <a:ext cx="7973389" cy="461963"/>
-          </a:xfrm>
-          <a:prstGeom prst="rect">
-            <a:avLst/>
-          </a:prstGeom>
-          <a:noFill/>
-          <a:ln/>
-        </p:spPr>
-        <p:txBody>
-          <a:bodyPr wrap="square" lIns="0" tIns="0" rIns="0" bIns="0" rtlCol="0" anchor="t"/>
-          <a:lstStyle/>
-          <a:p>
-            <a:pPr algn="l" indent="0" marL="0">
-              <a:lnSpc>
-                <a:spcPts val="1820"/>
-              </a:lnSpc>
-              <a:spcBef>
-                <a:spcPts val="300"/>
-              </a:spcBef>
-              <a:spcAft>
-                <a:spcPts val="300"/>
-              </a:spcAft>
-              <a:buNone/>
-            </a:pPr>
-            <a:r>
-              <a:rPr lang="en-US" sz="1300" b="1" i="1" dirty="0">
-                <a:solidFill>
-                  <a:srgbClr val="1C2833"/>
-                </a:solidFill>
-                <a:latin typeface="Georgia" pitchFamily="34" charset="0"/>
-                <a:ea typeface="Georgia" pitchFamily="34" charset="-122"/>
-                <a:cs typeface="Georgia" pitchFamily="34" charset="-120"/>
-              </a:rPr>
-              <a:t>The honest truth:</a:t>
-            </a:r>
-            <a:pPr algn="l" indent="0" marL="0">
-              <a:lnSpc>
-                <a:spcPts val="1820"/>
-              </a:lnSpc>
-              <a:spcBef>
-                <a:spcPts val="300"/>
-              </a:spcBef>
-              <a:spcAft>
-                <a:spcPts val="300"/>
-              </a:spcAft>
-              <a:buNone/>
-            </a:pPr>
-            <a:r>
-              <a:rPr lang="en-US" sz="1300" dirty="0">
-                <a:solidFill>
-                  <a:srgbClr val="1C2833"/>
-                </a:solidFill>
-                <a:latin typeface="Georgia" pitchFamily="34" charset="0"/>
-                <a:ea typeface="Georgia" pitchFamily="34" charset="-122"/>
-                <a:cs typeface="Georgia" pitchFamily="34" charset="-120"/>
-              </a:rPr>
-              <a:t> Most multiplication problems in life are NOT Nikhilam-shaped. Long multiplication remains your everyday workhorse.</a:t>
-            </a:r>
-            <a:endParaRPr lang="en-US" sz="1300" dirty="0"/>
-          </a:p>
-        </p:txBody>
-      </p:sp>
-      <p:sp>
-        <p:nvSpPr>
-          <p:cNvPr id="9" name="Text 7"/>
-          <p:cNvSpPr/>
-          <p:nvPr/>
-        </p:nvSpPr>
-        <p:spPr>
-          <a:xfrm>
-            <a:off x="692051" y="2574280"/>
-            <a:ext cx="7973389" cy="250031"/>
-          </a:xfrm>
-          <a:prstGeom prst="rect">
-            <a:avLst/>
-          </a:prstGeom>
-          <a:noFill/>
-          <a:ln/>
-        </p:spPr>
-        <p:txBody>
-          <a:bodyPr wrap="square" lIns="0" tIns="0" rIns="0" bIns="0" rtlCol="0" anchor="t"/>
-          <a:lstStyle/>
-          <a:p>
-            <a:pPr algn="l" indent="0" marL="0">
-              <a:lnSpc>
-                <a:spcPts val="1820"/>
-              </a:lnSpc>
-              <a:spcBef>
-                <a:spcPts val="300"/>
-              </a:spcBef>
-              <a:spcAft>
-                <a:spcPts val="300"/>
-              </a:spcAft>
-              <a:buNone/>
-            </a:pPr>
-            <a:r>
-              <a:rPr lang="en-US" sz="1300" dirty="0">
-                <a:solidFill>
-                  <a:srgbClr val="1C2833"/>
-                </a:solidFill>
-                <a:latin typeface="Georgia" pitchFamily="34" charset="0"/>
-                <a:ea typeface="Georgia" pitchFamily="34" charset="-122"/>
-                <a:cs typeface="Georgia" pitchFamily="34" charset="-120"/>
-              </a:rPr>
-              <a:t>But when both factors </a:t>
-            </a:r>
-            <a:pPr algn="l" indent="0" marL="0">
-              <a:lnSpc>
-                <a:spcPts val="1820"/>
-              </a:lnSpc>
-              <a:spcBef>
-                <a:spcPts val="300"/>
-              </a:spcBef>
-              <a:spcAft>
-                <a:spcPts val="300"/>
-              </a:spcAft>
-              <a:buNone/>
-            </a:pPr>
-            <a:r>
-              <a:rPr lang="en-US" sz="1300" i="1" dirty="0">
-                <a:solidFill>
-                  <a:srgbClr val="1C2833"/>
-                </a:solidFill>
-                <a:latin typeface="Georgia" pitchFamily="34" charset="0"/>
-                <a:ea typeface="Georgia" pitchFamily="34" charset="-122"/>
-                <a:cs typeface="Georgia" pitchFamily="34" charset="-120"/>
-              </a:rPr>
-              <a:t>are</a:t>
-            </a:r>
-            <a:pPr algn="l" indent="0" marL="0">
-              <a:lnSpc>
-                <a:spcPts val="1820"/>
-              </a:lnSpc>
-              <a:spcBef>
-                <a:spcPts val="300"/>
-              </a:spcBef>
-              <a:spcAft>
-                <a:spcPts val="300"/>
-              </a:spcAft>
-              <a:buNone/>
-            </a:pPr>
-            <a:r>
-              <a:rPr lang="en-US" sz="1300" dirty="0">
-                <a:solidFill>
-                  <a:srgbClr val="1C2833"/>
-                </a:solidFill>
-                <a:latin typeface="Georgia" pitchFamily="34" charset="0"/>
-                <a:ea typeface="Georgia" pitchFamily="34" charset="-122"/>
-                <a:cs typeface="Georgia" pitchFamily="34" charset="-120"/>
-              </a:rPr>
-              <a:t> near a base — </a:t>
-            </a:r>
-            <a:pPr algn="l" indent="0" marL="0">
-              <a:lnSpc>
-                <a:spcPts val="1820"/>
-              </a:lnSpc>
-              <a:spcBef>
-                <a:spcPts val="300"/>
-              </a:spcBef>
-              <a:spcAft>
-                <a:spcPts val="300"/>
-              </a:spcAft>
-              <a:buNone/>
-            </a:pPr>
-            <a:r>
-              <a:rPr lang="en-US" sz="1300" i="1" dirty="0">
-                <a:solidFill>
-                  <a:srgbClr val="1C2833"/>
-                </a:solidFill>
-                <a:latin typeface="Georgia" pitchFamily="34" charset="0"/>
-                <a:ea typeface="Georgia" pitchFamily="34" charset="-122"/>
-                <a:cs typeface="Georgia" pitchFamily="34" charset="-120"/>
-              </a:rPr>
-              <a:t>97 × 96</a:t>
-            </a:r>
-            <a:pPr algn="l" indent="0" marL="0">
-              <a:lnSpc>
-                <a:spcPts val="1820"/>
-              </a:lnSpc>
-              <a:spcBef>
-                <a:spcPts val="300"/>
-              </a:spcBef>
-              <a:spcAft>
-                <a:spcPts val="300"/>
-              </a:spcAft>
-              <a:buNone/>
-            </a:pPr>
-            <a:r>
-              <a:rPr lang="en-US" sz="1300" dirty="0">
-                <a:solidFill>
-                  <a:srgbClr val="1C2833"/>
-                </a:solidFill>
-                <a:latin typeface="Georgia" pitchFamily="34" charset="0"/>
-                <a:ea typeface="Georgia" pitchFamily="34" charset="-122"/>
-                <a:cs typeface="Georgia" pitchFamily="34" charset="-120"/>
-              </a:rPr>
-              <a:t>, </a:t>
-            </a:r>
-            <a:pPr algn="l" indent="0" marL="0">
-              <a:lnSpc>
-                <a:spcPts val="1820"/>
-              </a:lnSpc>
-              <a:spcBef>
-                <a:spcPts val="300"/>
-              </a:spcBef>
-              <a:spcAft>
-                <a:spcPts val="300"/>
-              </a:spcAft>
-              <a:buNone/>
-            </a:pPr>
-            <a:r>
-              <a:rPr lang="en-US" sz="1300" i="1" dirty="0">
-                <a:solidFill>
-                  <a:srgbClr val="1C2833"/>
-                </a:solidFill>
-                <a:latin typeface="Georgia" pitchFamily="34" charset="0"/>
-                <a:ea typeface="Georgia" pitchFamily="34" charset="-122"/>
-                <a:cs typeface="Georgia" pitchFamily="34" charset="-120"/>
-              </a:rPr>
-              <a:t>1003 × 1004</a:t>
-            </a:r>
-            <a:pPr algn="l" indent="0" marL="0">
-              <a:lnSpc>
-                <a:spcPts val="1820"/>
-              </a:lnSpc>
-              <a:spcBef>
-                <a:spcPts val="300"/>
-              </a:spcBef>
-              <a:spcAft>
-                <a:spcPts val="300"/>
-              </a:spcAft>
-              <a:buNone/>
-            </a:pPr>
-            <a:r>
-              <a:rPr lang="en-US" sz="1300" dirty="0">
-                <a:solidFill>
-                  <a:srgbClr val="1C2833"/>
-                </a:solidFill>
-                <a:latin typeface="Georgia" pitchFamily="34" charset="0"/>
-                <a:ea typeface="Georgia" pitchFamily="34" charset="-122"/>
-                <a:cs typeface="Georgia" pitchFamily="34" charset="-120"/>
-              </a:rPr>
-              <a:t> — Nikhilam is 5–10× faster.</a:t>
-            </a:r>
-            <a:endParaRPr lang="en-US" sz="1300" dirty="0"/>
-          </a:p>
-        </p:txBody>
-      </p:sp>
-      <p:sp>
-        <p:nvSpPr>
-          <p:cNvPr id="10" name="Text 8"/>
-          <p:cNvSpPr/>
-          <p:nvPr/>
-        </p:nvSpPr>
-        <p:spPr>
-          <a:xfrm>
-            <a:off x="692051" y="2862411"/>
-            <a:ext cx="7973389" cy="692944"/>
-          </a:xfrm>
-          <a:prstGeom prst="rect">
-            <a:avLst/>
-          </a:prstGeom>
-          <a:noFill/>
-          <a:ln/>
-        </p:spPr>
-        <p:txBody>
-          <a:bodyPr wrap="square" lIns="0" tIns="0" rIns="0" bIns="0" rtlCol="0" anchor="t"/>
-          <a:lstStyle/>
-          <a:p>
-            <a:pPr algn="l" indent="0" marL="0">
-              <a:lnSpc>
-                <a:spcPts val="1820"/>
-              </a:lnSpc>
-              <a:spcBef>
-                <a:spcPts val="300"/>
-              </a:spcBef>
-              <a:spcAft>
-                <a:spcPts val="300"/>
-              </a:spcAft>
-              <a:buNone/>
-            </a:pPr>
-            <a:r>
-              <a:rPr lang="en-US" sz="1300" dirty="0">
-                <a:solidFill>
-                  <a:srgbClr val="1C2833"/>
-                </a:solidFill>
-                <a:latin typeface="Georgia" pitchFamily="34" charset="0"/>
-                <a:ea typeface="Georgia" pitchFamily="34" charset="-122"/>
-                <a:cs typeface="Georgia" pitchFamily="34" charset="-120"/>
-              </a:rPr>
-              <a:t>Tirthaji's other multiplication sūtra, </a:t>
-            </a:r>
-            <a:pPr algn="l" indent="0" marL="0">
-              <a:lnSpc>
-                <a:spcPts val="1820"/>
-              </a:lnSpc>
-              <a:spcBef>
-                <a:spcPts val="300"/>
-              </a:spcBef>
-              <a:spcAft>
-                <a:spcPts val="300"/>
-              </a:spcAft>
-              <a:buNone/>
-            </a:pPr>
-            <a:r>
-              <a:rPr lang="en-US" sz="1300" i="1" dirty="0">
-                <a:solidFill>
-                  <a:srgbClr val="1C2833"/>
-                </a:solidFill>
-                <a:latin typeface="Georgia" pitchFamily="34" charset="0"/>
-                <a:ea typeface="Georgia" pitchFamily="34" charset="-122"/>
-                <a:cs typeface="Georgia" pitchFamily="34" charset="-120"/>
-              </a:rPr>
-              <a:t>Ūrdhva-tiryagbhyāṁ</a:t>
-            </a:r>
-            <a:pPr algn="l" indent="0" marL="0">
-              <a:lnSpc>
-                <a:spcPts val="1820"/>
-              </a:lnSpc>
-              <a:spcBef>
-                <a:spcPts val="300"/>
-              </a:spcBef>
-              <a:spcAft>
-                <a:spcPts val="300"/>
-              </a:spcAft>
-              <a:buNone/>
-            </a:pPr>
-            <a:r>
-              <a:rPr lang="en-US" sz="1300" dirty="0">
-                <a:solidFill>
-                  <a:srgbClr val="1C2833"/>
-                </a:solidFill>
-                <a:latin typeface="Georgia" pitchFamily="34" charset="0"/>
-                <a:ea typeface="Georgia" pitchFamily="34" charset="-122"/>
-                <a:cs typeface="Georgia" pitchFamily="34" charset="-120"/>
-              </a:rPr>
-              <a:t> ("vertically and crosswise"), works for any pair of numbers and is taught in its own module. Nikhilam is the </a:t>
-            </a:r>
-            <a:pPr algn="l" indent="0" marL="0">
-              <a:lnSpc>
-                <a:spcPts val="1820"/>
-              </a:lnSpc>
-              <a:spcBef>
-                <a:spcPts val="300"/>
-              </a:spcBef>
-              <a:spcAft>
-                <a:spcPts val="300"/>
-              </a:spcAft>
-              <a:buNone/>
-            </a:pPr>
-            <a:r>
-              <a:rPr lang="en-US" sz="1300" i="1" dirty="0">
-                <a:solidFill>
-                  <a:srgbClr val="1C2833"/>
-                </a:solidFill>
-                <a:latin typeface="Georgia" pitchFamily="34" charset="0"/>
-                <a:ea typeface="Georgia" pitchFamily="34" charset="-122"/>
-                <a:cs typeface="Georgia" pitchFamily="34" charset="-120"/>
-              </a:rPr>
-              <a:t>near-base specialist</a:t>
-            </a:r>
-            <a:pPr algn="l" indent="0" marL="0">
-              <a:lnSpc>
-                <a:spcPts val="1820"/>
-              </a:lnSpc>
-              <a:spcBef>
-                <a:spcPts val="300"/>
-              </a:spcBef>
-              <a:spcAft>
-                <a:spcPts val="300"/>
-              </a:spcAft>
-              <a:buNone/>
-            </a:pPr>
-            <a:r>
-              <a:rPr lang="en-US" sz="1300" dirty="0">
-                <a:solidFill>
-                  <a:srgbClr val="1C2833"/>
-                </a:solidFill>
-                <a:latin typeface="Georgia" pitchFamily="34" charset="0"/>
-                <a:ea typeface="Georgia" pitchFamily="34" charset="-122"/>
-                <a:cs typeface="Georgia" pitchFamily="34" charset="-120"/>
-              </a:rPr>
-              <a:t>; </a:t>
-            </a:r>
-            <a:pPr algn="l" indent="0" marL="0">
-              <a:lnSpc>
-                <a:spcPts val="1820"/>
-              </a:lnSpc>
-              <a:spcBef>
-                <a:spcPts val="300"/>
-              </a:spcBef>
-              <a:spcAft>
-                <a:spcPts val="300"/>
-              </a:spcAft>
-              <a:buNone/>
-            </a:pPr>
-            <a:r>
-              <a:rPr lang="en-US" sz="1300" i="1" dirty="0">
-                <a:solidFill>
-                  <a:srgbClr val="1C2833"/>
-                </a:solidFill>
-                <a:latin typeface="Georgia" pitchFamily="34" charset="0"/>
-                <a:ea typeface="Georgia" pitchFamily="34" charset="-122"/>
-                <a:cs typeface="Georgia" pitchFamily="34" charset="-120"/>
-              </a:rPr>
-              <a:t>Ūrdhva</a:t>
-            </a:r>
-            <a:pPr algn="l" indent="0" marL="0">
-              <a:lnSpc>
-                <a:spcPts val="1820"/>
-              </a:lnSpc>
-              <a:spcBef>
-                <a:spcPts val="300"/>
-              </a:spcBef>
-              <a:spcAft>
-                <a:spcPts val="300"/>
-              </a:spcAft>
-              <a:buNone/>
-            </a:pPr>
-            <a:r>
-              <a:rPr lang="en-US" sz="1300" dirty="0">
-                <a:solidFill>
-                  <a:srgbClr val="1C2833"/>
-                </a:solidFill>
-                <a:latin typeface="Georgia" pitchFamily="34" charset="0"/>
-                <a:ea typeface="Georgia" pitchFamily="34" charset="-122"/>
-                <a:cs typeface="Georgia" pitchFamily="34" charset="-120"/>
-              </a:rPr>
-              <a:t> is the </a:t>
-            </a:r>
-            <a:pPr algn="l" indent="0" marL="0">
-              <a:lnSpc>
-                <a:spcPts val="1820"/>
-              </a:lnSpc>
-              <a:spcBef>
-                <a:spcPts val="300"/>
-              </a:spcBef>
-              <a:spcAft>
-                <a:spcPts val="300"/>
-              </a:spcAft>
-              <a:buNone/>
-            </a:pPr>
-            <a:r>
-              <a:rPr lang="en-US" sz="1300" i="1" dirty="0">
-                <a:solidFill>
-                  <a:srgbClr val="1C2833"/>
-                </a:solidFill>
-                <a:latin typeface="Georgia" pitchFamily="34" charset="0"/>
-                <a:ea typeface="Georgia" pitchFamily="34" charset="-122"/>
-                <a:cs typeface="Georgia" pitchFamily="34" charset="-120"/>
-              </a:rPr>
-              <a:t>generalist</a:t>
-            </a:r>
-            <a:pPr algn="l" indent="0" marL="0">
-              <a:lnSpc>
-                <a:spcPts val="1820"/>
-              </a:lnSpc>
-              <a:spcBef>
-                <a:spcPts val="300"/>
-              </a:spcBef>
-              <a:spcAft>
-                <a:spcPts val="300"/>
-              </a:spcAft>
-              <a:buNone/>
-            </a:pPr>
-            <a:r>
-              <a:rPr lang="en-US" sz="1300" dirty="0">
-                <a:solidFill>
-                  <a:srgbClr val="1C2833"/>
-                </a:solidFill>
-                <a:latin typeface="Georgia" pitchFamily="34" charset="0"/>
-                <a:ea typeface="Georgia" pitchFamily="34" charset="-122"/>
-                <a:cs typeface="Georgia" pitchFamily="34" charset="-120"/>
-              </a:rPr>
-              <a:t>.</a:t>
-            </a:r>
-            <a:endParaRPr lang="en-US" sz="1300" dirty="0"/>
-          </a:p>
-        </p:txBody>
-      </p:sp>
-      <p:sp>
-        <p:nvSpPr>
-          <p:cNvPr id="11" name="Text 9"/>
           <p:cNvSpPr/>
           <p:nvPr/>
         </p:nvSpPr>
@@ -7703,7 +9947,7 @@
                 <a:ea typeface="Georgia" pitchFamily="34" charset="-122"/>
                 <a:cs typeface="Georgia" pitchFamily="34" charset="-120"/>
               </a:rPr>
-              <a:t>Homework</a:t>
+              <a:t>Core (15 min) — When it works, when it doesn't (cont.)</a:t>
             </a:r>
             <a:endParaRPr lang="en-US" sz="1800" dirty="0"/>
           </a:p>
@@ -7717,13 +9961,66 @@
         </p:nvSpPr>
         <p:spPr>
           <a:xfrm>
-            <a:off x="406301" y="870942"/>
-            <a:ext cx="8498026" cy="426541"/>
-          </a:xfrm>
-          <a:prstGeom prst="rect">
+            <a:off x="406301" y="883593"/>
+            <a:ext cx="8331398" cy="2226469"/>
+          </a:xfrm>
+          <a:prstGeom prst="rect">
+            <a:avLst/>
+          </a:prstGeom>
+          <a:solidFill>
+            <a:srgbClr val="F4F8F9"/>
+          </a:solidFill>
+          <a:ln/>
+        </p:spPr>
+        <p:txBody>
+          <a:bodyPr wrap="square" rtlCol="0" anchor="ctr"/>
+          <a:lstStyle/>
+          <a:p>
+            <a:pPr indent="0" marL="0">
+              <a:buNone/>
+            </a:pPr>
+            <a:endParaRPr lang="en-US" dirty="0"/>
+          </a:p>
+        </p:txBody>
+      </p:sp>
+      <p:sp>
+        <p:nvSpPr>
+          <p:cNvPr id="5" name="Shape 3"/>
+          <p:cNvSpPr/>
+          <p:nvPr/>
+        </p:nvSpPr>
+        <p:spPr>
+          <a:xfrm>
+            <a:off x="434876" y="883593"/>
+            <a:ext cx="0" cy="2226469"/>
+          </a:xfrm>
+          <a:prstGeom prst="line">
             <a:avLst/>
           </a:prstGeom>
           <a:noFill/>
+          <a:ln w="57150">
+            <a:solidFill>
+              <a:srgbClr val="FE4447"/>
+            </a:solidFill>
+            <a:prstDash val="solid"/>
+          </a:ln>
+        </p:spPr>
+      </p:sp>
+      <p:sp>
+        <p:nvSpPr>
+          <p:cNvPr id="6" name="Text 4"/>
+          <p:cNvSpPr/>
+          <p:nvPr/>
+        </p:nvSpPr>
+        <p:spPr>
+          <a:xfrm>
+            <a:off x="692051" y="1074093"/>
+            <a:ext cx="7973389" cy="230981"/>
+          </a:xfrm>
+          <a:prstGeom prst="rect">
+            <a:avLst/>
+          </a:prstGeom>
+          <a:noFill/>
           <a:ln/>
         </p:spPr>
         <p:txBody>
@@ -7732,7 +10029,7 @@
           <a:p>
             <a:pPr algn="l" indent="0" marL="0">
               <a:lnSpc>
-                <a:spcPts val="1680"/>
+                <a:spcPts val="1820"/>
               </a:lnSpc>
               <a:spcBef>
                 <a:spcPts val="300"/>
@@ -7743,23 +10040,403 @@
               <a:buNone/>
             </a:pPr>
             <a:r>
-              <a:rPr lang="en-US" sz="1200" dirty="0">
-                <a:solidFill>
-                  <a:srgbClr val="1C2833"/>
-                </a:solidFill>
-                <a:latin typeface="Arial" pitchFamily="34" charset="0"/>
-                <a:ea typeface="Arial" pitchFamily="34" charset="-122"/>
-                <a:cs typeface="Arial" pitchFamily="34" charset="-120"/>
-              </a:rPr>
-              <a:t>– Find 5 multiplication problems in your school textbook (any subject). For each, decide: Nikhilam, long, or Ūrdhva. Write 1 sentence justifying your choice. Bring tomorrow.</a:t>
-            </a:r>
-            <a:endParaRPr lang="en-US" sz="1200" dirty="0"/>
-          </a:p>
-        </p:txBody>
-      </p:sp>
-      <p:sp>
-        <p:nvSpPr>
-          <p:cNvPr id="5" name="Text 3"/>
+              <a:rPr lang="en-US" sz="1300" b="1" i="1" dirty="0">
+                <a:solidFill>
+                  <a:srgbClr val="1C2833"/>
+                </a:solidFill>
+                <a:latin typeface="Georgia" pitchFamily="34" charset="0"/>
+                <a:ea typeface="Georgia" pitchFamily="34" charset="-122"/>
+                <a:cs typeface="Georgia" pitchFamily="34" charset="-120"/>
+              </a:rPr>
+              <a:t>Use Nikhilam when:</a:t>
+            </a:r>
+            <a:endParaRPr lang="en-US" sz="1300" dirty="0"/>
+          </a:p>
+        </p:txBody>
+      </p:sp>
+      <p:sp>
+        <p:nvSpPr>
+          <p:cNvPr id="7" name="Text 5"/>
+          <p:cNvSpPr/>
+          <p:nvPr/>
+        </p:nvSpPr>
+        <p:spPr>
+          <a:xfrm>
+            <a:off x="692051" y="1343174"/>
+            <a:ext cx="7973389" cy="230981"/>
+          </a:xfrm>
+          <a:prstGeom prst="rect">
+            <a:avLst/>
+          </a:prstGeom>
+          <a:noFill/>
+          <a:ln/>
+        </p:spPr>
+        <p:txBody>
+          <a:bodyPr wrap="square" lIns="0" tIns="0" rIns="0" bIns="0" rtlCol="0" anchor="t"/>
+          <a:lstStyle/>
+          <a:p>
+            <a:pPr algn="l" indent="0" marL="0">
+              <a:lnSpc>
+                <a:spcPts val="1820"/>
+              </a:lnSpc>
+              <a:spcBef>
+                <a:spcPts val="300"/>
+              </a:spcBef>
+              <a:spcAft>
+                <a:spcPts val="300"/>
+              </a:spcAft>
+              <a:buNone/>
+            </a:pPr>
+            <a:r>
+              <a:rPr lang="en-US" sz="1300" i="1" dirty="0">
+                <a:solidFill>
+                  <a:srgbClr val="1C2833"/>
+                </a:solidFill>
+                <a:latin typeface="Georgia" pitchFamily="34" charset="0"/>
+                <a:ea typeface="Georgia" pitchFamily="34" charset="-122"/>
+                <a:cs typeface="Georgia" pitchFamily="34" charset="-120"/>
+              </a:rPr>
+              <a:t>Both factors are within ~5 of a power of 10 (10, 100, 1000): trivially fast.</a:t>
+            </a:r>
+            <a:endParaRPr lang="en-US" sz="1300" dirty="0"/>
+          </a:p>
+        </p:txBody>
+      </p:sp>
+      <p:sp>
+        <p:nvSpPr>
+          <p:cNvPr id="8" name="Text 6"/>
+          <p:cNvSpPr/>
+          <p:nvPr/>
+        </p:nvSpPr>
+        <p:spPr>
+          <a:xfrm>
+            <a:off x="692051" y="1612255"/>
+            <a:ext cx="7973389" cy="230981"/>
+          </a:xfrm>
+          <a:prstGeom prst="rect">
+            <a:avLst/>
+          </a:prstGeom>
+          <a:noFill/>
+          <a:ln/>
+        </p:spPr>
+        <p:txBody>
+          <a:bodyPr wrap="square" lIns="0" tIns="0" rIns="0" bIns="0" rtlCol="0" anchor="t"/>
+          <a:lstStyle/>
+          <a:p>
+            <a:pPr algn="l" indent="0" marL="0">
+              <a:lnSpc>
+                <a:spcPts val="1820"/>
+              </a:lnSpc>
+              <a:spcBef>
+                <a:spcPts val="300"/>
+              </a:spcBef>
+              <a:spcAft>
+                <a:spcPts val="300"/>
+              </a:spcAft>
+              <a:buNone/>
+            </a:pPr>
+            <a:r>
+              <a:rPr lang="en-US" sz="1300" i="1" dirty="0">
+                <a:solidFill>
+                  <a:srgbClr val="1C2833"/>
+                </a:solidFill>
+                <a:latin typeface="Georgia" pitchFamily="34" charset="0"/>
+                <a:ea typeface="Georgia" pitchFamily="34" charset="-122"/>
+                <a:cs typeface="Georgia" pitchFamily="34" charset="-120"/>
+              </a:rPr>
+              <a:t>Both within ~10–15 of a power of 10: still faster than long multiplication for most students.</a:t>
+            </a:r>
+            <a:endParaRPr lang="en-US" sz="1300" dirty="0"/>
+          </a:p>
+        </p:txBody>
+      </p:sp>
+      <p:sp>
+        <p:nvSpPr>
+          <p:cNvPr id="9" name="Text 7"/>
+          <p:cNvSpPr/>
+          <p:nvPr/>
+        </p:nvSpPr>
+        <p:spPr>
+          <a:xfrm>
+            <a:off x="692051" y="1881336"/>
+            <a:ext cx="7973389" cy="230981"/>
+          </a:xfrm>
+          <a:prstGeom prst="rect">
+            <a:avLst/>
+          </a:prstGeom>
+          <a:noFill/>
+          <a:ln/>
+        </p:spPr>
+        <p:txBody>
+          <a:bodyPr wrap="square" lIns="0" tIns="0" rIns="0" bIns="0" rtlCol="0" anchor="t"/>
+          <a:lstStyle/>
+          <a:p>
+            <a:pPr algn="l" indent="0" marL="0">
+              <a:lnSpc>
+                <a:spcPts val="1820"/>
+              </a:lnSpc>
+              <a:spcBef>
+                <a:spcPts val="300"/>
+              </a:spcBef>
+              <a:spcAft>
+                <a:spcPts val="300"/>
+              </a:spcAft>
+              <a:buNone/>
+            </a:pPr>
+            <a:r>
+              <a:rPr lang="en-US" sz="1300" dirty="0">
+                <a:solidFill>
+                  <a:srgbClr val="1C2833"/>
+                </a:solidFill>
+                <a:latin typeface="Georgia" pitchFamily="34" charset="0"/>
+                <a:ea typeface="Georgia" pitchFamily="34" charset="-122"/>
+                <a:cs typeface="Georgia" pitchFamily="34" charset="-120"/>
+              </a:rPr>
+              <a:t>*</a:t>
+            </a:r>
+            <a:pPr algn="l" indent="0" marL="0">
+              <a:lnSpc>
+                <a:spcPts val="1820"/>
+              </a:lnSpc>
+              <a:spcBef>
+                <a:spcPts val="300"/>
+              </a:spcBef>
+              <a:spcAft>
+                <a:spcPts val="300"/>
+              </a:spcAft>
+              <a:buNone/>
+            </a:pPr>
+            <a:r>
+              <a:rPr lang="en-US" sz="1300" i="1" dirty="0">
+                <a:solidFill>
+                  <a:srgbClr val="1C2833"/>
+                </a:solidFill>
+                <a:latin typeface="Georgia" pitchFamily="34" charset="0"/>
+                <a:ea typeface="Georgia" pitchFamily="34" charset="-122"/>
+                <a:cs typeface="Georgia" pitchFamily="34" charset="-120"/>
+              </a:rPr>
+              <a:t>Use long multiplication (or</a:t>
+            </a:r>
+            <a:pPr algn="l" indent="0" marL="0">
+              <a:lnSpc>
+                <a:spcPts val="1820"/>
+              </a:lnSpc>
+              <a:spcBef>
+                <a:spcPts val="300"/>
+              </a:spcBef>
+              <a:spcAft>
+                <a:spcPts val="300"/>
+              </a:spcAft>
+              <a:buNone/>
+            </a:pPr>
+            <a:r>
+              <a:rPr lang="en-US" sz="1300" dirty="0">
+                <a:solidFill>
+                  <a:srgbClr val="1C2833"/>
+                </a:solidFill>
+                <a:latin typeface="Georgia" pitchFamily="34" charset="0"/>
+                <a:ea typeface="Georgia" pitchFamily="34" charset="-122"/>
+                <a:cs typeface="Georgia" pitchFamily="34" charset="-120"/>
+              </a:rPr>
+              <a:t>Ūrdhva</a:t>
+            </a:r>
+            <a:pPr algn="l" indent="0" marL="0">
+              <a:lnSpc>
+                <a:spcPts val="1820"/>
+              </a:lnSpc>
+              <a:spcBef>
+                <a:spcPts val="300"/>
+              </a:spcBef>
+              <a:spcAft>
+                <a:spcPts val="300"/>
+              </a:spcAft>
+              <a:buNone/>
+            </a:pPr>
+            <a:r>
+              <a:rPr lang="en-US" sz="1300" i="1" dirty="0">
+                <a:solidFill>
+                  <a:srgbClr val="1C2833"/>
+                </a:solidFill>
+                <a:latin typeface="Georgia" pitchFamily="34" charset="0"/>
+                <a:ea typeface="Georgia" pitchFamily="34" charset="-122"/>
+                <a:cs typeface="Georgia" pitchFamily="34" charset="-120"/>
+              </a:rPr>
+              <a:t>) when:</a:t>
+            </a:r>
+            <a:pPr algn="l" indent="0" marL="0">
+              <a:lnSpc>
+                <a:spcPts val="1820"/>
+              </a:lnSpc>
+              <a:spcBef>
+                <a:spcPts val="300"/>
+              </a:spcBef>
+              <a:spcAft>
+                <a:spcPts val="300"/>
+              </a:spcAft>
+              <a:buNone/>
+            </a:pPr>
+            <a:r>
+              <a:rPr lang="en-US" sz="1300" dirty="0">
+                <a:solidFill>
+                  <a:srgbClr val="1C2833"/>
+                </a:solidFill>
+                <a:latin typeface="Georgia" pitchFamily="34" charset="0"/>
+                <a:ea typeface="Georgia" pitchFamily="34" charset="-122"/>
+                <a:cs typeface="Georgia" pitchFamily="34" charset="-120"/>
+              </a:rPr>
+              <a:t>*</a:t>
+            </a:r>
+            <a:endParaRPr lang="en-US" sz="1300" dirty="0"/>
+          </a:p>
+        </p:txBody>
+      </p:sp>
+      <p:sp>
+        <p:nvSpPr>
+          <p:cNvPr id="10" name="Text 8"/>
+          <p:cNvSpPr/>
+          <p:nvPr/>
+        </p:nvSpPr>
+        <p:spPr>
+          <a:xfrm>
+            <a:off x="692051" y="2150418"/>
+            <a:ext cx="7973389" cy="230981"/>
+          </a:xfrm>
+          <a:prstGeom prst="rect">
+            <a:avLst/>
+          </a:prstGeom>
+          <a:noFill/>
+          <a:ln/>
+        </p:spPr>
+        <p:txBody>
+          <a:bodyPr wrap="square" lIns="0" tIns="0" rIns="0" bIns="0" rtlCol="0" anchor="t"/>
+          <a:lstStyle/>
+          <a:p>
+            <a:pPr algn="l" indent="0" marL="0">
+              <a:lnSpc>
+                <a:spcPts val="1820"/>
+              </a:lnSpc>
+              <a:spcBef>
+                <a:spcPts val="300"/>
+              </a:spcBef>
+              <a:spcAft>
+                <a:spcPts val="300"/>
+              </a:spcAft>
+              <a:buNone/>
+            </a:pPr>
+            <a:r>
+              <a:rPr lang="en-US" sz="1300" i="1" dirty="0">
+                <a:solidFill>
+                  <a:srgbClr val="1C2833"/>
+                </a:solidFill>
+                <a:latin typeface="Georgia" pitchFamily="34" charset="0"/>
+                <a:ea typeface="Georgia" pitchFamily="34" charset="-122"/>
+                <a:cs typeface="Georgia" pitchFamily="34" charset="-120"/>
+              </a:rPr>
+              <a:t>One factor is "random" (not near a base).</a:t>
+            </a:r>
+            <a:endParaRPr lang="en-US" sz="1300" dirty="0"/>
+          </a:p>
+        </p:txBody>
+      </p:sp>
+      <p:sp>
+        <p:nvSpPr>
+          <p:cNvPr id="11" name="Text 9"/>
+          <p:cNvSpPr/>
+          <p:nvPr/>
+        </p:nvSpPr>
+        <p:spPr>
+          <a:xfrm>
+            <a:off x="692051" y="2419499"/>
+            <a:ext cx="7973389" cy="230981"/>
+          </a:xfrm>
+          <a:prstGeom prst="rect">
+            <a:avLst/>
+          </a:prstGeom>
+          <a:noFill/>
+          <a:ln/>
+        </p:spPr>
+        <p:txBody>
+          <a:bodyPr wrap="square" lIns="0" tIns="0" rIns="0" bIns="0" rtlCol="0" anchor="t"/>
+          <a:lstStyle/>
+          <a:p>
+            <a:pPr algn="l" indent="0" marL="0">
+              <a:lnSpc>
+                <a:spcPts val="1820"/>
+              </a:lnSpc>
+              <a:spcBef>
+                <a:spcPts val="300"/>
+              </a:spcBef>
+              <a:spcAft>
+                <a:spcPts val="300"/>
+              </a:spcAft>
+              <a:buNone/>
+            </a:pPr>
+            <a:r>
+              <a:rPr lang="en-US" sz="1300" i="1" dirty="0">
+                <a:solidFill>
+                  <a:srgbClr val="1C2833"/>
+                </a:solidFill>
+                <a:latin typeface="Georgia" pitchFamily="34" charset="0"/>
+                <a:ea typeface="Georgia" pitchFamily="34" charset="-122"/>
+                <a:cs typeface="Georgia" pitchFamily="34" charset="-120"/>
+              </a:rPr>
+              <a:t>The factors are near different bases.</a:t>
+            </a:r>
+            <a:endParaRPr lang="en-US" sz="1300" dirty="0"/>
+          </a:p>
+        </p:txBody>
+      </p:sp>
+      <p:sp>
+        <p:nvSpPr>
+          <p:cNvPr id="12" name="Text 10"/>
+          <p:cNvSpPr/>
+          <p:nvPr/>
+        </p:nvSpPr>
+        <p:spPr>
+          <a:xfrm>
+            <a:off x="692051" y="2688580"/>
+            <a:ext cx="7973389" cy="230981"/>
+          </a:xfrm>
+          <a:prstGeom prst="rect">
+            <a:avLst/>
+          </a:prstGeom>
+          <a:noFill/>
+          <a:ln/>
+        </p:spPr>
+        <p:txBody>
+          <a:bodyPr wrap="square" lIns="0" tIns="0" rIns="0" bIns="0" rtlCol="0" anchor="t"/>
+          <a:lstStyle/>
+          <a:p>
+            <a:pPr algn="l" indent="0" marL="0">
+              <a:lnSpc>
+                <a:spcPts val="1820"/>
+              </a:lnSpc>
+              <a:spcBef>
+                <a:spcPts val="300"/>
+              </a:spcBef>
+              <a:spcAft>
+                <a:spcPts val="300"/>
+              </a:spcAft>
+              <a:buNone/>
+            </a:pPr>
+            <a:r>
+              <a:rPr lang="en-US" sz="1300" i="1" dirty="0">
+                <a:solidFill>
+                  <a:srgbClr val="1C2833"/>
+                </a:solidFill>
+                <a:latin typeface="Georgia" pitchFamily="34" charset="0"/>
+                <a:ea typeface="Georgia" pitchFamily="34" charset="-122"/>
+                <a:cs typeface="Georgia" pitchFamily="34" charset="-120"/>
+              </a:rPr>
+              <a:t>Speed doesn't matter (writing out long multiplication is more error-resistant).</a:t>
+            </a:r>
+            <a:endParaRPr lang="en-US" sz="1300" dirty="0"/>
+          </a:p>
+        </p:txBody>
+      </p:sp>
+      <p:sp>
+        <p:nvSpPr>
+          <p:cNvPr id="13" name="Text 11"/>
           <p:cNvSpPr/>
           <p:nvPr/>
         </p:nvSpPr>
